--- a/RECURSOS/Presentacion.pptx
+++ b/RECURSOS/Presentacion.pptx
@@ -5,17 +5,16 @@
     <p:sldMasterId id="2147483648" r:id="rId1"/>
   </p:sldMasterIdLst>
   <p:sldIdLst>
-    <p:sldId id="256" r:id="rId7"/>
-    <p:sldId id="257" r:id="rId8"/>
-    <p:sldId id="258" r:id="rId9"/>
-    <p:sldId id="259" r:id="rId10"/>
-    <p:sldId id="260" r:id="rId11"/>
-    <p:sldId id="261" r:id="rId12"/>
-    <p:sldId id="262" r:id="rId13"/>
-    <p:sldId id="263" r:id="rId14"/>
-    <p:sldId id="264" r:id="rId15"/>
+    <p:sldId id="256" r:id="rId2"/>
+    <p:sldId id="257" r:id="rId3"/>
+    <p:sldId id="258" r:id="rId4"/>
+    <p:sldId id="259" r:id="rId5"/>
+    <p:sldId id="260" r:id="rId6"/>
+    <p:sldId id="261" r:id="rId7"/>
+    <p:sldId id="262" r:id="rId8"/>
+    <p:sldId id="263" r:id="rId9"/>
   </p:sldIdLst>
-  <p:sldSz cx="12188952" cy="6858000" type="screen4x3"/>
+  <p:sldSz cx="12188825" cy="6858000"/>
   <p:notesSz cx="6858000" cy="9144000"/>
   <p:defaultTextStyle>
     <a:defPPr>
@@ -112,6 +111,22 @@
       </a:defRPr>
     </a:lvl9pPr>
   </p:defaultTextStyle>
+  <p:extLst>
+    <p:ext uri="{EFAFB233-063F-42B5-8137-9DF3F51BA10A}">
+      <p15:sldGuideLst xmlns:p15="http://schemas.microsoft.com/office/powerpoint/2012/main">
+        <p15:guide id="1" orient="horz" pos="2160">
+          <p15:clr>
+            <a:srgbClr val="A4A3A4"/>
+          </p15:clr>
+        </p15:guide>
+        <p15:guide id="2" pos="2880">
+          <p15:clr>
+            <a:srgbClr val="A4A3A4"/>
+          </p15:clr>
+        </p15:guide>
+      </p15:sldGuideLst>
+    </p:ext>
+  </p:extLst>
 </p:presentation>
 </file>
 
@@ -296,7 +311,7 @@
           <a:p>
             <a:fld id="{5BCAD085-E8A6-8845-BD4E-CB4CCA059FC4}" type="datetimeFigureOut">
               <a:rPr lang="en-US" smtClean="0"/>
-              <a:t>1/27/13</a:t>
+              <a:t>7/13/2026</a:t>
             </a:fld>
             <a:endParaRPr lang="en-US"/>
           </a:p>
@@ -338,7 +353,7 @@
           <a:p>
             <a:fld id="{C1FF6DA9-008F-8B48-92A6-B652298478BF}" type="slidenum">
               <a:rPr lang="en-US" smtClean="0"/>
-              <a:t>‹#›</a:t>
+              <a:t>‹Nº›</a:t>
             </a:fld>
             <a:endParaRPr lang="en-US"/>
           </a:p>
@@ -466,7 +481,7 @@
           <a:p>
             <a:fld id="{5BCAD085-E8A6-8845-BD4E-CB4CCA059FC4}" type="datetimeFigureOut">
               <a:rPr lang="en-US" smtClean="0"/>
-              <a:t>1/27/13</a:t>
+              <a:t>7/13/2026</a:t>
             </a:fld>
             <a:endParaRPr lang="en-US"/>
           </a:p>
@@ -508,7 +523,7 @@
           <a:p>
             <a:fld id="{C1FF6DA9-008F-8B48-92A6-B652298478BF}" type="slidenum">
               <a:rPr lang="en-US" smtClean="0"/>
-              <a:t>‹#›</a:t>
+              <a:t>‹Nº›</a:t>
             </a:fld>
             <a:endParaRPr lang="en-US"/>
           </a:p>
@@ -646,7 +661,7 @@
           <a:p>
             <a:fld id="{5BCAD085-E8A6-8845-BD4E-CB4CCA059FC4}" type="datetimeFigureOut">
               <a:rPr lang="en-US" smtClean="0"/>
-              <a:t>1/27/13</a:t>
+              <a:t>7/13/2026</a:t>
             </a:fld>
             <a:endParaRPr lang="en-US"/>
           </a:p>
@@ -688,7 +703,7 @@
           <a:p>
             <a:fld id="{C1FF6DA9-008F-8B48-92A6-B652298478BF}" type="slidenum">
               <a:rPr lang="en-US" smtClean="0"/>
-              <a:t>‹#›</a:t>
+              <a:t>‹Nº›</a:t>
             </a:fld>
             <a:endParaRPr lang="en-US"/>
           </a:p>
@@ -816,7 +831,7 @@
           <a:p>
             <a:fld id="{5BCAD085-E8A6-8845-BD4E-CB4CCA059FC4}" type="datetimeFigureOut">
               <a:rPr lang="en-US" smtClean="0"/>
-              <a:t>1/27/13</a:t>
+              <a:t>7/13/2026</a:t>
             </a:fld>
             <a:endParaRPr lang="en-US"/>
           </a:p>
@@ -858,7 +873,7 @@
           <a:p>
             <a:fld id="{C1FF6DA9-008F-8B48-92A6-B652298478BF}" type="slidenum">
               <a:rPr lang="en-US" smtClean="0"/>
-              <a:t>‹#›</a:t>
+              <a:t>‹Nº›</a:t>
             </a:fld>
             <a:endParaRPr lang="en-US"/>
           </a:p>
@@ -1062,7 +1077,7 @@
           <a:p>
             <a:fld id="{5BCAD085-E8A6-8845-BD4E-CB4CCA059FC4}" type="datetimeFigureOut">
               <a:rPr lang="en-US" smtClean="0"/>
-              <a:t>1/27/13</a:t>
+              <a:t>7/13/2026</a:t>
             </a:fld>
             <a:endParaRPr lang="en-US"/>
           </a:p>
@@ -1104,7 +1119,7 @@
           <a:p>
             <a:fld id="{C1FF6DA9-008F-8B48-92A6-B652298478BF}" type="slidenum">
               <a:rPr lang="en-US" smtClean="0"/>
-              <a:t>‹#›</a:t>
+              <a:t>‹Nº›</a:t>
             </a:fld>
             <a:endParaRPr lang="en-US"/>
           </a:p>
@@ -1350,7 +1365,7 @@
           <a:p>
             <a:fld id="{5BCAD085-E8A6-8845-BD4E-CB4CCA059FC4}" type="datetimeFigureOut">
               <a:rPr lang="en-US" smtClean="0"/>
-              <a:t>1/27/13</a:t>
+              <a:t>7/13/2026</a:t>
             </a:fld>
             <a:endParaRPr lang="en-US"/>
           </a:p>
@@ -1392,7 +1407,7 @@
           <a:p>
             <a:fld id="{C1FF6DA9-008F-8B48-92A6-B652298478BF}" type="slidenum">
               <a:rPr lang="en-US" smtClean="0"/>
-              <a:t>‹#›</a:t>
+              <a:t>‹Nº›</a:t>
             </a:fld>
             <a:endParaRPr lang="en-US"/>
           </a:p>
@@ -1772,7 +1787,7 @@
           <a:p>
             <a:fld id="{5BCAD085-E8A6-8845-BD4E-CB4CCA059FC4}" type="datetimeFigureOut">
               <a:rPr lang="en-US" smtClean="0"/>
-              <a:t>1/27/13</a:t>
+              <a:t>7/13/2026</a:t>
             </a:fld>
             <a:endParaRPr lang="en-US"/>
           </a:p>
@@ -1814,7 +1829,7 @@
           <a:p>
             <a:fld id="{C1FF6DA9-008F-8B48-92A6-B652298478BF}" type="slidenum">
               <a:rPr lang="en-US" smtClean="0"/>
-              <a:t>‹#›</a:t>
+              <a:t>‹Nº›</a:t>
             </a:fld>
             <a:endParaRPr lang="en-US"/>
           </a:p>
@@ -1890,7 +1905,7 @@
           <a:p>
             <a:fld id="{5BCAD085-E8A6-8845-BD4E-CB4CCA059FC4}" type="datetimeFigureOut">
               <a:rPr lang="en-US" smtClean="0"/>
-              <a:t>1/27/13</a:t>
+              <a:t>7/13/2026</a:t>
             </a:fld>
             <a:endParaRPr lang="en-US"/>
           </a:p>
@@ -1932,7 +1947,7 @@
           <a:p>
             <a:fld id="{C1FF6DA9-008F-8B48-92A6-B652298478BF}" type="slidenum">
               <a:rPr lang="en-US" smtClean="0"/>
-              <a:t>‹#›</a:t>
+              <a:t>‹Nº›</a:t>
             </a:fld>
             <a:endParaRPr lang="en-US"/>
           </a:p>
@@ -1985,7 +2000,7 @@
           <a:p>
             <a:fld id="{5BCAD085-E8A6-8845-BD4E-CB4CCA059FC4}" type="datetimeFigureOut">
               <a:rPr lang="en-US" smtClean="0"/>
-              <a:t>1/27/13</a:t>
+              <a:t>7/13/2026</a:t>
             </a:fld>
             <a:endParaRPr lang="en-US"/>
           </a:p>
@@ -2027,7 +2042,7 @@
           <a:p>
             <a:fld id="{C1FF6DA9-008F-8B48-92A6-B652298478BF}" type="slidenum">
               <a:rPr lang="en-US" smtClean="0"/>
-              <a:t>‹#›</a:t>
+              <a:t>‹Nº›</a:t>
             </a:fld>
             <a:endParaRPr lang="en-US"/>
           </a:p>
@@ -2262,7 +2277,7 @@
           <a:p>
             <a:fld id="{5BCAD085-E8A6-8845-BD4E-CB4CCA059FC4}" type="datetimeFigureOut">
               <a:rPr lang="en-US" smtClean="0"/>
-              <a:t>1/27/13</a:t>
+              <a:t>7/13/2026</a:t>
             </a:fld>
             <a:endParaRPr lang="en-US"/>
           </a:p>
@@ -2304,7 +2319,7 @@
           <a:p>
             <a:fld id="{C1FF6DA9-008F-8B48-92A6-B652298478BF}" type="slidenum">
               <a:rPr lang="en-US" smtClean="0"/>
-              <a:t>‹#›</a:t>
+              <a:t>‹Nº›</a:t>
             </a:fld>
             <a:endParaRPr lang="en-US"/>
           </a:p>
@@ -2515,7 +2530,7 @@
           <a:p>
             <a:fld id="{5BCAD085-E8A6-8845-BD4E-CB4CCA059FC4}" type="datetimeFigureOut">
               <a:rPr lang="en-US" smtClean="0"/>
-              <a:t>1/27/13</a:t>
+              <a:t>7/13/2026</a:t>
             </a:fld>
             <a:endParaRPr lang="en-US"/>
           </a:p>
@@ -2557,7 +2572,7 @@
           <a:p>
             <a:fld id="{C1FF6DA9-008F-8B48-92A6-B652298478BF}" type="slidenum">
               <a:rPr lang="en-US" smtClean="0"/>
-              <a:t>‹#›</a:t>
+              <a:t>‹Nº›</a:t>
             </a:fld>
             <a:endParaRPr lang="en-US"/>
           </a:p>
@@ -2728,7 +2743,7 @@
           <a:p>
             <a:fld id="{5BCAD085-E8A6-8845-BD4E-CB4CCA059FC4}" type="datetimeFigureOut">
               <a:rPr lang="en-US" smtClean="0"/>
-              <a:t>1/27/13</a:t>
+              <a:t>7/13/2026</a:t>
             </a:fld>
             <a:endParaRPr lang="en-US"/>
           </a:p>
@@ -2806,7 +2821,7 @@
           <a:p>
             <a:fld id="{C1FF6DA9-008F-8B48-92A6-B652298478BF}" type="slidenum">
               <a:rPr lang="en-US" smtClean="0"/>
-              <a:t>‹#›</a:t>
+              <a:t>‹Nº›</a:t>
             </a:fld>
             <a:endParaRPr lang="en-US"/>
           </a:p>
@@ -3087,7 +3102,7 @@
 </file>
 
 <file path=ppt/slides/slide1.xml><?xml version="1.0" encoding="utf-8"?>
-<p:sld xmlns:a="http://schemas.openxmlformats.org/drawingml/2006/main" xmlns:p="http://schemas.openxmlformats.org/presentationml/2006/main" xmlns:r="http://schemas.openxmlformats.org/officeDocument/2006/relationships">
+<p:sld xmlns:a="http://schemas.openxmlformats.org/drawingml/2006/main" xmlns:r="http://schemas.openxmlformats.org/officeDocument/2006/relationships" xmlns:p="http://schemas.openxmlformats.org/presentationml/2006/main">
   <p:cSld>
     <p:bg>
       <p:bgPr>
@@ -3103,7 +3118,14 @@
         <p:cNvGrpSpPr/>
         <p:nvPr/>
       </p:nvGrpSpPr>
-      <p:grpSpPr/>
+      <p:grpSpPr>
+        <a:xfrm>
+          <a:off x="0" y="0"/>
+          <a:ext cx="0" cy="0"/>
+          <a:chOff x="0" y="0"/>
+          <a:chExt cx="0" cy="0"/>
+        </a:xfrm>
+      </p:grpSpPr>
       <p:sp>
         <p:nvSpPr>
           <p:cNvPr id="2" name="Rectangle 1"/>
@@ -3113,7 +3135,7 @@
         <p:spPr>
           <a:xfrm>
             <a:off x="0" y="0"/>
-            <a:ext cx="6858000" cy="6858000"/>
+            <a:ext cx="6995160" cy="6858000"/>
           </a:xfrm>
           <a:prstGeom prst="rect">
             <a:avLst/>
@@ -3144,6 +3166,7 @@
           <a:lstStyle/>
           <a:p>
             <a:pPr algn="ctr"/>
+            <a:endParaRPr/>
           </a:p>
         </p:txBody>
       </p:sp>
@@ -3187,6 +3210,7 @@
           <a:lstStyle/>
           <a:p>
             <a:pPr algn="ctr"/>
+            <a:endParaRPr/>
           </a:p>
         </p:txBody>
       </p:sp>
@@ -3264,6 +3288,7 @@
           <a:lstStyle/>
           <a:p>
             <a:pPr algn="ctr"/>
+            <a:endParaRPr/>
           </a:p>
         </p:txBody>
       </p:sp>
@@ -3276,7 +3301,7 @@
         <p:spPr>
           <a:xfrm>
             <a:off x="320040" y="2103120"/>
-            <a:ext cx="6400800" cy="1005840"/>
+            <a:ext cx="6400800" cy="738664"/>
           </a:xfrm>
           <a:prstGeom prst="rect">
             <a:avLst/>
@@ -3291,14 +3316,91 @@
           <a:p>
             <a:pPr algn="l"/>
             <a:r>
-              <a:rPr sz="2100" b="0" i="0">
+              <a:rPr sz="2100" b="0" i="0" dirty="0">
                 <a:solidFill>
                   <a:srgbClr val="BDD5F5"/>
                 </a:solidFill>
               </a:rPr>
-              <a:t>Sistema de Alerta Temprana de
-Desabastecimiento Farmaceutico</a:t>
-            </a:r>
+              <a:t>Sistema de </a:t>
+            </a:r>
+            <a:r>
+              <a:rPr sz="2100" b="0" i="0" dirty="0" err="1">
+                <a:solidFill>
+                  <a:srgbClr val="BDD5F5"/>
+                </a:solidFill>
+              </a:rPr>
+              <a:t>Alerta</a:t>
+            </a:r>
+            <a:r>
+              <a:rPr sz="2100" b="0" i="0" dirty="0">
+                <a:solidFill>
+                  <a:srgbClr val="BDD5F5"/>
+                </a:solidFill>
+              </a:rPr>
+              <a:t> </a:t>
+            </a:r>
+            <a:r>
+              <a:rPr sz="2100" b="0" i="0" dirty="0" err="1">
+                <a:solidFill>
+                  <a:srgbClr val="BDD5F5"/>
+                </a:solidFill>
+              </a:rPr>
+              <a:t>Temprana</a:t>
+            </a:r>
+            <a:r>
+              <a:rPr sz="2100" b="0" i="0" dirty="0">
+                <a:solidFill>
+                  <a:srgbClr val="BDD5F5"/>
+                </a:solidFill>
+              </a:rPr>
+              <a:t> de
+</a:t>
+            </a:r>
+            <a:r>
+              <a:rPr sz="2100" b="0" i="0" dirty="0" err="1">
+                <a:solidFill>
+                  <a:srgbClr val="BDD5F5"/>
+                </a:solidFill>
+              </a:rPr>
+              <a:t>Desabastecimiento</a:t>
+            </a:r>
+            <a:r>
+              <a:rPr sz="2100" b="0" i="0" dirty="0">
+                <a:solidFill>
+                  <a:srgbClr val="BDD5F5"/>
+                </a:solidFill>
+              </a:rPr>
+              <a:t> </a:t>
+            </a:r>
+            <a:r>
+              <a:rPr sz="2100" b="0" i="0" dirty="0" err="1" smtClean="0">
+                <a:solidFill>
+                  <a:srgbClr val="BDD5F5"/>
+                </a:solidFill>
+              </a:rPr>
+              <a:t>Farmac</a:t>
+            </a:r>
+            <a:r>
+              <a:rPr lang="es-419" sz="2100" b="0" i="0" dirty="0" smtClean="0">
+                <a:solidFill>
+                  <a:srgbClr val="BDD5F5"/>
+                </a:solidFill>
+              </a:rPr>
+              <a:t>é</a:t>
+            </a:r>
+            <a:r>
+              <a:rPr sz="2100" b="0" i="0" dirty="0" err="1" smtClean="0">
+                <a:solidFill>
+                  <a:srgbClr val="BDD5F5"/>
+                </a:solidFill>
+              </a:rPr>
+              <a:t>utico</a:t>
+            </a:r>
+            <a:endParaRPr sz="2100" b="0" i="0" dirty="0">
+              <a:solidFill>
+                <a:srgbClr val="BDD5F5"/>
+              </a:solidFill>
+            </a:endParaRPr>
           </a:p>
         </p:txBody>
       </p:sp>
@@ -3311,7 +3413,7 @@
         <p:spPr>
           <a:xfrm>
             <a:off x="320040" y="3246120"/>
-            <a:ext cx="6400800" cy="502920"/>
+            <a:ext cx="6400800" cy="307777"/>
           </a:xfrm>
           <a:prstGeom prst="rect">
             <a:avLst/>
@@ -3326,13 +3428,66 @@
           <a:p>
             <a:pPr algn="l"/>
             <a:r>
-              <a:rPr sz="1400" b="0" i="0">
+              <a:rPr sz="1400" b="0" i="0" dirty="0" err="1" smtClean="0">
                 <a:solidFill>
                   <a:srgbClr val="7BA8D8"/>
                 </a:solidFill>
               </a:rPr>
-              <a:t>Prediccion con IA  ·  CUM + INVIMA  ·  Reportes Ciudadanos</a:t>
-            </a:r>
+              <a:t>Predicci</a:t>
+            </a:r>
+            <a:r>
+              <a:rPr lang="es-419" sz="1400" b="0" i="0" dirty="0" err="1" smtClean="0">
+                <a:solidFill>
+                  <a:srgbClr val="7BA8D8"/>
+                </a:solidFill>
+              </a:rPr>
+              <a:t>ó</a:t>
+            </a:r>
+            <a:r>
+              <a:rPr sz="1400" b="0" i="0" dirty="0" smtClean="0">
+                <a:solidFill>
+                  <a:srgbClr val="7BA8D8"/>
+                </a:solidFill>
+              </a:rPr>
+              <a:t>n </a:t>
+            </a:r>
+            <a:r>
+              <a:rPr sz="1400" b="0" i="0" dirty="0">
+                <a:solidFill>
+                  <a:srgbClr val="7BA8D8"/>
+                </a:solidFill>
+              </a:rPr>
+              <a:t>con IA  ·  CUM + INVIMA  ·  </a:t>
+            </a:r>
+            <a:r>
+              <a:rPr sz="1400" b="0" i="0" dirty="0" err="1">
+                <a:solidFill>
+                  <a:srgbClr val="7BA8D8"/>
+                </a:solidFill>
+              </a:rPr>
+              <a:t>Reportes</a:t>
+            </a:r>
+            <a:r>
+              <a:rPr sz="1400" b="0" i="0" dirty="0">
+                <a:solidFill>
+                  <a:srgbClr val="7BA8D8"/>
+                </a:solidFill>
+              </a:rPr>
+              <a:t> </a:t>
+            </a:r>
+            <a:r>
+              <a:rPr sz="1400" b="0" i="0" dirty="0" err="1">
+                <a:solidFill>
+                  <a:srgbClr val="7BA8D8"/>
+                </a:solidFill>
+              </a:rPr>
+              <a:t>Ciudadanos</a:t>
+            </a:r>
+            <a:endParaRPr sz="1400" b="0" i="0" dirty="0">
+              <a:solidFill>
+                <a:srgbClr val="7BA8D8"/>
+              </a:solidFill>
+            </a:endParaRPr>
           </a:p>
         </p:txBody>
       </p:sp>
@@ -3376,6 +3531,7 @@
           <a:lstStyle/>
           <a:p>
             <a:pPr algn="ctr"/>
+            <a:endParaRPr/>
           </a:p>
         </p:txBody>
       </p:sp>
@@ -3422,7 +3578,7 @@
         <p:spPr>
           <a:xfrm>
             <a:off x="4343400" y="3931920"/>
-            <a:ext cx="2286000" cy="548640"/>
+            <a:ext cx="2377440" cy="548640"/>
           </a:xfrm>
           <a:prstGeom prst="rect">
             <a:avLst/>
@@ -3453,6 +3609,7 @@
           <a:lstStyle/>
           <a:p>
             <a:pPr algn="ctr"/>
+            <a:endParaRPr/>
           </a:p>
         </p:txBody>
       </p:sp>
@@ -3465,7 +3622,7 @@
         <p:spPr>
           <a:xfrm>
             <a:off x="4434840" y="3968496"/>
-            <a:ext cx="2103120" cy="475488"/>
+            <a:ext cx="2103120" cy="276999"/>
           </a:xfrm>
           <a:prstGeom prst="rect">
             <a:avLst/>
@@ -3480,13 +3637,50 @@
           <a:p>
             <a:pPr algn="l"/>
             <a:r>
-              <a:rPr sz="1200" b="1" i="0">
+              <a:rPr sz="1200" b="1" i="0" dirty="0" err="1" smtClean="0">
                 <a:solidFill>
                   <a:srgbClr val="FFFFFF"/>
                 </a:solidFill>
               </a:rPr>
-              <a:t>Categoria: Avanzado</a:t>
-            </a:r>
+              <a:t>Categor</a:t>
+            </a:r>
+            <a:r>
+              <a:rPr lang="es-419" sz="1200" b="1" i="0" dirty="0" smtClean="0">
+                <a:solidFill>
+                  <a:srgbClr val="FFFFFF"/>
+                </a:solidFill>
+              </a:rPr>
+              <a:t>í</a:t>
+            </a:r>
+            <a:r>
+              <a:rPr sz="1200" b="1" i="0" dirty="0" smtClean="0">
+                <a:solidFill>
+                  <a:srgbClr val="FFFFFF"/>
+                </a:solidFill>
+              </a:rPr>
+              <a:t>a</a:t>
+            </a:r>
+            <a:r>
+              <a:rPr sz="1200" b="1" i="0" dirty="0">
+                <a:solidFill>
+                  <a:srgbClr val="FFFFFF"/>
+                </a:solidFill>
+              </a:rPr>
+              <a:t>: </a:t>
+            </a:r>
+            <a:r>
+              <a:rPr sz="1200" b="1" i="0" dirty="0" err="1">
+                <a:solidFill>
+                  <a:srgbClr val="FFFFFF"/>
+                </a:solidFill>
+              </a:rPr>
+              <a:t>Avanzado</a:t>
+            </a:r>
+            <a:endParaRPr sz="1200" b="1" i="0" dirty="0">
+              <a:solidFill>
+                <a:srgbClr val="FFFFFF"/>
+              </a:solidFill>
+            </a:endParaRPr>
           </a:p>
         </p:txBody>
       </p:sp>
@@ -3499,7 +3693,7 @@
         <p:spPr>
           <a:xfrm>
             <a:off x="320040" y="4709160"/>
-            <a:ext cx="6217920" cy="1143000"/>
+            <a:ext cx="6400800" cy="1143000"/>
           </a:xfrm>
           <a:prstGeom prst="rect">
             <a:avLst/>
@@ -3532,6 +3726,7 @@
           <a:lstStyle/>
           <a:p>
             <a:pPr algn="ctr"/>
+            <a:endParaRPr/>
           </a:p>
         </p:txBody>
       </p:sp>
@@ -3544,7 +3739,7 @@
         <p:spPr>
           <a:xfrm>
             <a:off x="457200" y="4773168"/>
-            <a:ext cx="5852160" cy="347472"/>
+            <a:ext cx="5852160" cy="246221"/>
           </a:xfrm>
           <a:prstGeom prst="rect">
             <a:avLst/>
@@ -3559,13 +3754,18 @@
           <a:p>
             <a:pPr algn="l"/>
             <a:r>
-              <a:rPr sz="1000" b="1" i="0">
+              <a:rPr sz="1000" b="1" i="0" dirty="0" smtClean="0">
                 <a:solidFill>
                   <a:srgbClr val="F5A623"/>
                 </a:solidFill>
               </a:rPr>
-              <a:t>⚠  EQUIPO — BORRADOR</a:t>
-            </a:r>
+              <a:t>EQUIPO</a:t>
+            </a:r>
+            <a:endParaRPr sz="1000" b="1" i="0" dirty="0">
+              <a:solidFill>
+                <a:srgbClr val="F5A623"/>
+              </a:solidFill>
+            </a:endParaRPr>
           </a:p>
         </p:txBody>
       </p:sp>
@@ -3578,28 +3778,43 @@
         <p:spPr>
           <a:xfrm>
             <a:off x="457200" y="5102352"/>
-            <a:ext cx="5852160" cy="320040"/>
-          </a:xfrm>
-          <a:prstGeom prst="rect">
-            <a:avLst/>
-          </a:prstGeom>
-          <a:noFill/>
-        </p:spPr>
-        <p:txBody>
-          <a:bodyPr wrap="square">
-            <a:spAutoFit/>
-          </a:bodyPr>
-          <a:lstStyle/>
+            <a:ext cx="6263640" cy="400110"/>
+          </a:xfrm>
+          <a:prstGeom prst="rect">
+            <a:avLst/>
+          </a:prstGeom>
+          <a:noFill/>
+        </p:spPr>
+        <p:txBody>
+          <a:bodyPr wrap="square">
+            <a:spAutoFit/>
+          </a:bodyPr>
+          <a:lstStyle/>
+          <a:p>
+            <a:r>
+              <a:rPr lang="es-419" sz="1000" dirty="0" smtClean="0">
+                <a:solidFill>
+                  <a:srgbClr val="BBCCDD"/>
+                </a:solidFill>
+              </a:rPr>
+              <a:t>Líder</a:t>
+            </a:r>
+            <a:r>
+              <a:rPr lang="es-419" sz="1000" dirty="0">
+                <a:solidFill>
+                  <a:srgbClr val="BBCCDD"/>
+                </a:solidFill>
+              </a:rPr>
+              <a:t>: Vladimir Manrique Waldo  ·  Analista de Datos: Laura Vélez Zapata  ·  Comunicador: Daniel Sepúlveda Restrepo</a:t>
+            </a:r>
+          </a:p>
           <a:p>
             <a:pPr algn="l"/>
-            <a:r>
-              <a:rPr sz="1000" b="0" i="0">
-                <a:solidFill>
-                  <a:srgbClr val="BBCCDD"/>
-                </a:solidFill>
-              </a:rPr>
-              <a:t>Lider: [NOMBRE]  ·  Analista ML: [NOMBRE]  ·  Desarrollador: [NOMBRE]</a:t>
-            </a:r>
+            <a:endParaRPr sz="1000" b="0" i="0" dirty="0">
+              <a:solidFill>
+                <a:srgbClr val="BBCCDD"/>
+              </a:solidFill>
+            </a:endParaRPr>
           </a:p>
         </p:txBody>
       </p:sp>
@@ -3639,7 +3854,9 @@
       </p:sp>
       <p:sp>
         <p:nvSpPr>
-          <p:cNvPr id="16" name="TextBox 15"/>
+          <p:cNvPr id="16" name="TextBox 15">
+            <a:hlinkClick r:id="rId2"/>
+          </p:cNvPr>
           <p:cNvSpPr txBox="1"/>
           <p:nvPr/>
         </p:nvSpPr>
@@ -3661,13 +3878,18 @@
           <a:p>
             <a:pPr algn="l"/>
             <a:r>
-              <a:rPr sz="1100" b="0" i="0">
+              <a:rPr sz="1100" b="0" i="0" dirty="0" err="1">
                 <a:solidFill>
                   <a:srgbClr val="7BA8D8"/>
                 </a:solidFill>
               </a:rPr>
               <a:t>openfarma-production.up.railway.app</a:t>
             </a:r>
+            <a:endParaRPr sz="1100" b="0" i="0" dirty="0">
+              <a:solidFill>
+                <a:srgbClr val="7BA8D8"/>
+              </a:solidFill>
+            </a:endParaRPr>
           </a:p>
         </p:txBody>
       </p:sp>
@@ -3713,6 +3935,7 @@
           <a:lstStyle/>
           <a:p>
             <a:pPr algn="ctr"/>
+            <a:endParaRPr/>
           </a:p>
         </p:txBody>
       </p:sp>
@@ -3756,6 +3979,7 @@
           <a:lstStyle/>
           <a:p>
             <a:pPr algn="ctr"/>
+            <a:endParaRPr/>
           </a:p>
         </p:txBody>
       </p:sp>
@@ -3903,6 +4127,7 @@
           <a:lstStyle/>
           <a:p>
             <a:pPr algn="ctr"/>
+            <a:endParaRPr/>
           </a:p>
         </p:txBody>
       </p:sp>
@@ -3946,6 +4171,7 @@
           <a:lstStyle/>
           <a:p>
             <a:pPr algn="ctr"/>
+            <a:endParaRPr/>
           </a:p>
         </p:txBody>
       </p:sp>
@@ -4093,6 +4319,7 @@
           <a:lstStyle/>
           <a:p>
             <a:pPr algn="ctr"/>
+            <a:endParaRPr/>
           </a:p>
         </p:txBody>
       </p:sp>
@@ -4136,6 +4363,7 @@
           <a:lstStyle/>
           <a:p>
             <a:pPr algn="ctr"/>
+            <a:endParaRPr/>
           </a:p>
         </p:txBody>
       </p:sp>
@@ -4283,6 +4511,7 @@
           <a:lstStyle/>
           <a:p>
             <a:pPr algn="ctr"/>
+            <a:endParaRPr/>
           </a:p>
         </p:txBody>
       </p:sp>
@@ -4326,6 +4555,7 @@
           <a:lstStyle/>
           <a:p>
             <a:pPr algn="ctr"/>
+            <a:endParaRPr/>
           </a:p>
         </p:txBody>
       </p:sp>
@@ -4372,7 +4602,7 @@
         <p:spPr>
           <a:xfrm>
             <a:off x="9646920" y="4206240"/>
-            <a:ext cx="2194560" cy="411480"/>
+            <a:ext cx="2194560" cy="261610"/>
           </a:xfrm>
           <a:prstGeom prst="rect">
             <a:avLst/>
@@ -4387,13 +4617,50 @@
           <a:p>
             <a:pPr algn="ctr"/>
             <a:r>
-              <a:rPr sz="1100" b="1" i="0">
-                <a:solidFill>
-                  <a:srgbClr val="1E293B"/>
-                </a:solidFill>
-              </a:rPr>
-              <a:t>Grupos terapeuticos</a:t>
-            </a:r>
+              <a:rPr sz="1100" b="1" i="0" dirty="0" err="1">
+                <a:solidFill>
+                  <a:srgbClr val="1E293B"/>
+                </a:solidFill>
+              </a:rPr>
+              <a:t>Grupos</a:t>
+            </a:r>
+            <a:r>
+              <a:rPr sz="1100" b="1" i="0" dirty="0">
+                <a:solidFill>
+                  <a:srgbClr val="1E293B"/>
+                </a:solidFill>
+              </a:rPr>
+              <a:t> </a:t>
+            </a:r>
+            <a:r>
+              <a:rPr sz="1100" b="1" i="0" dirty="0" err="1" smtClean="0">
+                <a:solidFill>
+                  <a:srgbClr val="1E293B"/>
+                </a:solidFill>
+              </a:rPr>
+              <a:t>terap</a:t>
+            </a:r>
+            <a:r>
+              <a:rPr lang="es-419" sz="1100" b="1" i="0" dirty="0" smtClean="0">
+                <a:solidFill>
+                  <a:srgbClr val="1E293B"/>
+                </a:solidFill>
+              </a:rPr>
+              <a:t>é</a:t>
+            </a:r>
+            <a:r>
+              <a:rPr sz="1100" b="1" i="0" dirty="0" err="1" smtClean="0">
+                <a:solidFill>
+                  <a:srgbClr val="1E293B"/>
+                </a:solidFill>
+              </a:rPr>
+              <a:t>uticos</a:t>
+            </a:r>
+            <a:endParaRPr sz="1100" b="1" i="0" dirty="0">
+              <a:solidFill>
+                <a:srgbClr val="1E293B"/>
+              </a:solidFill>
+            </a:endParaRPr>
           </a:p>
         </p:txBody>
       </p:sp>
@@ -4470,11 +4737,18 @@
   <p:clrMapOvr>
     <a:masterClrMapping/>
   </p:clrMapOvr>
+  <p:timing>
+    <p:tnLst>
+      <p:par>
+        <p:cTn id="1" dur="indefinite" restart="never" nodeType="tmRoot"/>
+      </p:par>
+    </p:tnLst>
+  </p:timing>
 </p:sld>
 </file>
 
 <file path=ppt/slides/slide2.xml><?xml version="1.0" encoding="utf-8"?>
-<p:sld xmlns:a="http://schemas.openxmlformats.org/drawingml/2006/main" xmlns:p="http://schemas.openxmlformats.org/presentationml/2006/main" xmlns:r="http://schemas.openxmlformats.org/officeDocument/2006/relationships">
+<p:sld xmlns:a="http://schemas.openxmlformats.org/drawingml/2006/main" xmlns:r="http://schemas.openxmlformats.org/officeDocument/2006/relationships" xmlns:p="http://schemas.openxmlformats.org/presentationml/2006/main">
   <p:cSld>
     <p:bg>
       <p:bgPr>
@@ -4490,7 +4764,14 @@
         <p:cNvGrpSpPr/>
         <p:nvPr/>
       </p:nvGrpSpPr>
-      <p:grpSpPr/>
+      <p:grpSpPr>
+        <a:xfrm>
+          <a:off x="0" y="0"/>
+          <a:ext cx="0" cy="0"/>
+          <a:chOff x="0" y="0"/>
+          <a:chExt cx="0" cy="0"/>
+        </a:xfrm>
+      </p:grpSpPr>
       <p:sp>
         <p:nvSpPr>
           <p:cNvPr id="2" name="Rectangle 1"/>
@@ -4531,6 +4812,7 @@
           <a:lstStyle/>
           <a:p>
             <a:pPr algn="ctr"/>
+            <a:endParaRPr/>
           </a:p>
         </p:txBody>
       </p:sp>
@@ -4574,6 +4856,7 @@
           <a:lstStyle/>
           <a:p>
             <a:pPr algn="ctr"/>
+            <a:endParaRPr/>
           </a:p>
         </p:txBody>
       </p:sp>
@@ -4586,7 +4869,7 @@
         <p:spPr>
           <a:xfrm>
             <a:off x="502920" y="164592"/>
-            <a:ext cx="10789920" cy="777240"/>
+            <a:ext cx="10789920" cy="507831"/>
           </a:xfrm>
           <a:prstGeom prst="rect">
             <a:avLst/>
@@ -4601,13 +4884,74 @@
           <a:p>
             <a:pPr algn="l"/>
             <a:r>
-              <a:rPr sz="2700" b="1" i="0">
+              <a:rPr sz="2700" b="1" i="0" dirty="0">
                 <a:solidFill>
                   <a:srgbClr val="0D2B55"/>
                 </a:solidFill>
               </a:rPr>
-              <a:t>El Problema: Desabastecimiento Farmaceutico</a:t>
-            </a:r>
+              <a:t>El </a:t>
+            </a:r>
+            <a:r>
+              <a:rPr sz="2700" b="1" i="0" dirty="0" err="1">
+                <a:solidFill>
+                  <a:srgbClr val="0D2B55"/>
+                </a:solidFill>
+              </a:rPr>
+              <a:t>Problema</a:t>
+            </a:r>
+            <a:r>
+              <a:rPr sz="2700" b="1" i="0" dirty="0">
+                <a:solidFill>
+                  <a:srgbClr val="0D2B55"/>
+                </a:solidFill>
+              </a:rPr>
+              <a:t>: </a:t>
+            </a:r>
+            <a:r>
+              <a:rPr sz="2700" b="1" i="0" dirty="0" err="1">
+                <a:solidFill>
+                  <a:srgbClr val="0D2B55"/>
+                </a:solidFill>
+              </a:rPr>
+              <a:t>Desabastecimiento</a:t>
+            </a:r>
+            <a:r>
+              <a:rPr sz="2700" b="1" i="0" dirty="0">
+                <a:solidFill>
+                  <a:srgbClr val="0D2B55"/>
+                </a:solidFill>
+              </a:rPr>
+              <a:t> </a:t>
+            </a:r>
+            <a:r>
+              <a:rPr sz="2700" b="1" i="0" dirty="0" err="1" smtClean="0">
+                <a:solidFill>
+                  <a:srgbClr val="0D2B55"/>
+                </a:solidFill>
+              </a:rPr>
+              <a:t>Farmac</a:t>
+            </a:r>
+            <a:r>
+              <a:rPr lang="es-419" sz="2700" b="1" i="0" dirty="0" smtClean="0">
+                <a:solidFill>
+                  <a:srgbClr val="0D2B55"/>
+                </a:solidFill>
+              </a:rPr>
+              <a:t>é</a:t>
+            </a:r>
+            <a:r>
+              <a:rPr sz="2700" b="1" i="0" dirty="0" err="1" smtClean="0">
+                <a:solidFill>
+                  <a:srgbClr val="0D2B55"/>
+                </a:solidFill>
+              </a:rPr>
+              <a:t>utico</a:t>
+            </a:r>
+            <a:endParaRPr sz="2700" b="1" i="0" dirty="0">
+              <a:solidFill>
+                <a:srgbClr val="0D2B55"/>
+              </a:solidFill>
+            </a:endParaRPr>
           </a:p>
         </p:txBody>
       </p:sp>
@@ -4651,6 +4995,7 @@
           <a:lstStyle/>
           <a:p>
             <a:pPr algn="ctr"/>
+            <a:endParaRPr/>
           </a:p>
         </p:txBody>
       </p:sp>
@@ -4730,6 +5075,7 @@
           <a:lstStyle/>
           <a:p>
             <a:pPr algn="ctr"/>
+            <a:endParaRPr/>
           </a:p>
         </p:txBody>
       </p:sp>
@@ -4742,7 +5088,7 @@
         <p:spPr>
           <a:xfrm>
             <a:off x="685800" y="1115568"/>
-            <a:ext cx="10789920" cy="640080"/>
+            <a:ext cx="10789920" cy="338554"/>
           </a:xfrm>
           <a:prstGeom prst="rect">
             <a:avLst/>
@@ -4757,12 +5103,180 @@
           <a:p>
             <a:pPr algn="l"/>
             <a:r>
-              <a:rPr sz="1600" b="0" i="1">
+              <a:rPr sz="1600" b="0" i="1" dirty="0" err="1">
                 <a:solidFill>
                   <a:srgbClr val="C82020"/>
                 </a:solidFill>
               </a:rPr>
-              <a:t>Cuando INVIMA publica una alerta, el medicamento ya lleva semanas sin llegar a las farmacias.</a:t>
+              <a:t>Cuando</a:t>
+            </a:r>
+            <a:r>
+              <a:rPr sz="1600" b="0" i="1" dirty="0">
+                <a:solidFill>
+                  <a:srgbClr val="C82020"/>
+                </a:solidFill>
+              </a:rPr>
+              <a:t> INVIMA </a:t>
+            </a:r>
+            <a:r>
+              <a:rPr sz="1600" b="0" i="1" dirty="0" smtClean="0">
+                <a:solidFill>
+                  <a:srgbClr val="C82020"/>
+                </a:solidFill>
+              </a:rPr>
+              <a:t>p</a:t>
+            </a:r>
+            <a:r>
+              <a:rPr lang="es-419" sz="1600" b="0" i="1" dirty="0" smtClean="0">
+                <a:solidFill>
+                  <a:srgbClr val="C82020"/>
+                </a:solidFill>
+              </a:rPr>
+              <a:t>ú</a:t>
+            </a:r>
+            <a:r>
+              <a:rPr sz="1600" b="0" i="1" dirty="0" err="1" smtClean="0">
+                <a:solidFill>
+                  <a:srgbClr val="C82020"/>
+                </a:solidFill>
+              </a:rPr>
+              <a:t>blica</a:t>
+            </a:r>
+            <a:r>
+              <a:rPr sz="1600" b="0" i="1" dirty="0" smtClean="0">
+                <a:solidFill>
+                  <a:srgbClr val="C82020"/>
+                </a:solidFill>
+              </a:rPr>
+              <a:t> </a:t>
+            </a:r>
+            <a:r>
+              <a:rPr sz="1600" b="0" i="1" dirty="0" err="1">
+                <a:solidFill>
+                  <a:srgbClr val="C82020"/>
+                </a:solidFill>
+              </a:rPr>
+              <a:t>una</a:t>
+            </a:r>
+            <a:r>
+              <a:rPr sz="1600" b="0" i="1" dirty="0">
+                <a:solidFill>
+                  <a:srgbClr val="C82020"/>
+                </a:solidFill>
+              </a:rPr>
+              <a:t> </a:t>
+            </a:r>
+            <a:r>
+              <a:rPr sz="1600" b="0" i="1" dirty="0" err="1">
+                <a:solidFill>
+                  <a:srgbClr val="C82020"/>
+                </a:solidFill>
+              </a:rPr>
+              <a:t>alerta</a:t>
+            </a:r>
+            <a:r>
+              <a:rPr sz="1600" b="0" i="1" dirty="0">
+                <a:solidFill>
+                  <a:srgbClr val="C82020"/>
+                </a:solidFill>
+              </a:rPr>
+              <a:t>, el </a:t>
+            </a:r>
+            <a:r>
+              <a:rPr sz="1600" b="0" i="1" dirty="0" err="1">
+                <a:solidFill>
+                  <a:srgbClr val="C82020"/>
+                </a:solidFill>
+              </a:rPr>
+              <a:t>medicamento</a:t>
+            </a:r>
+            <a:r>
+              <a:rPr sz="1600" b="0" i="1" dirty="0">
+                <a:solidFill>
+                  <a:srgbClr val="C82020"/>
+                </a:solidFill>
+              </a:rPr>
+              <a:t> </a:t>
+            </a:r>
+            <a:r>
+              <a:rPr sz="1600" b="0" i="1" dirty="0" err="1">
+                <a:solidFill>
+                  <a:srgbClr val="C82020"/>
+                </a:solidFill>
+              </a:rPr>
+              <a:t>ya</a:t>
+            </a:r>
+            <a:r>
+              <a:rPr sz="1600" b="0" i="1" dirty="0">
+                <a:solidFill>
+                  <a:srgbClr val="C82020"/>
+                </a:solidFill>
+              </a:rPr>
+              <a:t> </a:t>
+            </a:r>
+            <a:r>
+              <a:rPr sz="1600" b="0" i="1" dirty="0" err="1">
+                <a:solidFill>
+                  <a:srgbClr val="C82020"/>
+                </a:solidFill>
+              </a:rPr>
+              <a:t>lleva</a:t>
+            </a:r>
+            <a:r>
+              <a:rPr sz="1600" b="0" i="1" dirty="0">
+                <a:solidFill>
+                  <a:srgbClr val="C82020"/>
+                </a:solidFill>
+              </a:rPr>
+              <a:t> </a:t>
+            </a:r>
+            <a:r>
+              <a:rPr sz="1600" b="0" i="1" dirty="0" err="1">
+                <a:solidFill>
+                  <a:srgbClr val="C82020"/>
+                </a:solidFill>
+              </a:rPr>
+              <a:t>semanas</a:t>
+            </a:r>
+            <a:r>
+              <a:rPr sz="1600" b="0" i="1" dirty="0">
+                <a:solidFill>
+                  <a:srgbClr val="C82020"/>
+                </a:solidFill>
+              </a:rPr>
+              <a:t> sin </a:t>
+            </a:r>
+            <a:r>
+              <a:rPr sz="1600" b="0" i="1" dirty="0" err="1">
+                <a:solidFill>
+                  <a:srgbClr val="C82020"/>
+                </a:solidFill>
+              </a:rPr>
+              <a:t>llegar</a:t>
+            </a:r>
+            <a:r>
+              <a:rPr sz="1600" b="0" i="1" dirty="0">
+                <a:solidFill>
+                  <a:srgbClr val="C82020"/>
+                </a:solidFill>
+              </a:rPr>
+              <a:t> a las </a:t>
+            </a:r>
+            <a:r>
+              <a:rPr sz="1600" b="0" i="1" dirty="0" err="1">
+                <a:solidFill>
+                  <a:srgbClr val="C82020"/>
+                </a:solidFill>
+              </a:rPr>
+              <a:t>farmacias</a:t>
+            </a:r>
+            <a:r>
+              <a:rPr sz="1600" b="0" i="1" dirty="0">
+                <a:solidFill>
+                  <a:srgbClr val="C82020"/>
+                </a:solidFill>
+              </a:rPr>
+              <a:t>.</a:t>
             </a:r>
           </a:p>
         </p:txBody>
@@ -4809,6 +5323,7 @@
           <a:lstStyle/>
           <a:p>
             <a:pPr algn="ctr"/>
+            <a:endParaRPr/>
           </a:p>
         </p:txBody>
       </p:sp>
@@ -4852,6 +5367,7 @@
           <a:lstStyle/>
           <a:p>
             <a:pPr algn="ctr"/>
+            <a:endParaRPr/>
           </a:p>
         </p:txBody>
       </p:sp>
@@ -4947,12 +5463,36 @@
           <a:p>
             <a:pPr algn="ctr"/>
             <a:r>
-              <a:rPr sz="900" b="0" i="0">
+              <a:rPr sz="900" b="0" i="0" dirty="0" err="1">
                 <a:solidFill>
                   <a:srgbClr val="4A5B6E"/>
                 </a:solidFill>
               </a:rPr>
-              <a:t>ene 2025 – may 2026 (17 meses)</a:t>
+              <a:t>ene</a:t>
+            </a:r>
+            <a:r>
+              <a:rPr sz="900" b="0" i="0" dirty="0">
+                <a:solidFill>
+                  <a:srgbClr val="4A5B6E"/>
+                </a:solidFill>
+              </a:rPr>
+              <a:t> 2025 – may 2026 (17 </a:t>
+            </a:r>
+            <a:r>
+              <a:rPr sz="900" b="0" i="0" dirty="0" err="1">
+                <a:solidFill>
+                  <a:srgbClr val="4A5B6E"/>
+                </a:solidFill>
+              </a:rPr>
+              <a:t>meses</a:t>
+            </a:r>
+            <a:r>
+              <a:rPr sz="900" b="0" i="0" dirty="0">
+                <a:solidFill>
+                  <a:srgbClr val="4A5B6E"/>
+                </a:solidFill>
+              </a:rPr>
+              <a:t>)</a:t>
             </a:r>
           </a:p>
         </p:txBody>
@@ -4999,6 +5539,7 @@
           <a:lstStyle/>
           <a:p>
             <a:pPr algn="ctr"/>
+            <a:endParaRPr/>
           </a:p>
         </p:txBody>
       </p:sp>
@@ -5042,6 +5583,7 @@
           <a:lstStyle/>
           <a:p>
             <a:pPr algn="ctr"/>
+            <a:endParaRPr/>
           </a:p>
         </p:txBody>
       </p:sp>
@@ -5189,6 +5731,7 @@
           <a:lstStyle/>
           <a:p>
             <a:pPr algn="ctr"/>
+            <a:endParaRPr/>
           </a:p>
         </p:txBody>
       </p:sp>
@@ -5232,6 +5775,7 @@
           <a:lstStyle/>
           <a:p>
             <a:pPr algn="ctr"/>
+            <a:endParaRPr/>
           </a:p>
         </p:txBody>
       </p:sp>
@@ -5312,7 +5856,7 @@
         <p:spPr>
           <a:xfrm>
             <a:off x="8366760" y="3108960"/>
-            <a:ext cx="3429000" cy="274320"/>
+            <a:ext cx="3429000" cy="230832"/>
           </a:xfrm>
           <a:prstGeom prst="rect">
             <a:avLst/>
@@ -5327,12 +5871,68 @@
           <a:p>
             <a:pPr algn="ctr"/>
             <a:r>
-              <a:rPr sz="900" b="0" i="0">
+              <a:rPr sz="900" b="0" i="0" dirty="0" smtClean="0">
                 <a:solidFill>
                   <a:srgbClr val="4A5B6E"/>
                 </a:solidFill>
               </a:rPr>
-              <a:t>publicos integrados en Colombia</a:t>
+              <a:t>p</a:t>
+            </a:r>
+            <a:r>
+              <a:rPr lang="es-419" sz="900" b="0" i="0" dirty="0" smtClean="0">
+                <a:solidFill>
+                  <a:srgbClr val="4A5B6E"/>
+                </a:solidFill>
+              </a:rPr>
+              <a:t>ú</a:t>
+            </a:r>
+            <a:r>
+              <a:rPr sz="900" b="0" i="0" dirty="0" err="1" smtClean="0">
+                <a:solidFill>
+                  <a:srgbClr val="4A5B6E"/>
+                </a:solidFill>
+              </a:rPr>
+              <a:t>blicos</a:t>
+            </a:r>
+            <a:r>
+              <a:rPr sz="900" b="0" i="0" dirty="0" smtClean="0">
+                <a:solidFill>
+                  <a:srgbClr val="4A5B6E"/>
+                </a:solidFill>
+              </a:rPr>
+              <a:t> </a:t>
+            </a:r>
+            <a:r>
+              <a:rPr sz="900" b="0" i="0" dirty="0" err="1">
+                <a:solidFill>
+                  <a:srgbClr val="4A5B6E"/>
+                </a:solidFill>
+              </a:rPr>
+              <a:t>integrados</a:t>
+            </a:r>
+            <a:r>
+              <a:rPr sz="900" b="0" i="0" dirty="0">
+                <a:solidFill>
+                  <a:srgbClr val="4A5B6E"/>
+                </a:solidFill>
+              </a:rPr>
+              <a:t> </a:t>
+            </a:r>
+            <a:r>
+              <a:rPr sz="900" b="0" i="0" dirty="0" err="1">
+                <a:solidFill>
+                  <a:srgbClr val="4A5B6E"/>
+                </a:solidFill>
+              </a:rPr>
+              <a:t>en</a:t>
+            </a:r>
+            <a:r>
+              <a:rPr sz="900" b="0" i="0" dirty="0">
+                <a:solidFill>
+                  <a:srgbClr val="4A5B6E"/>
+                </a:solidFill>
+              </a:rPr>
+              <a:t> Colombia</a:t>
             </a:r>
           </a:p>
         </p:txBody>
@@ -5414,7 +6014,7 @@
         <p:spPr>
           <a:xfrm>
             <a:off x="1005840" y="4160520"/>
-            <a:ext cx="10698480" cy="457200"/>
+            <a:ext cx="10698480" cy="323165"/>
           </a:xfrm>
           <a:prstGeom prst="rect">
             <a:avLst/>
@@ -5429,13 +6029,98 @@
           <a:p>
             <a:pPr algn="l"/>
             <a:r>
-              <a:rPr sz="1500" b="0" i="0">
-                <a:solidFill>
-                  <a:srgbClr val="1E293B"/>
-                </a:solidFill>
-              </a:rPr>
-              <a:t>Pacientes con enfermedades cronicas interrumpen tratamientos</a:t>
-            </a:r>
+              <a:rPr sz="1500" b="0" i="0" dirty="0" err="1">
+                <a:solidFill>
+                  <a:srgbClr val="1E293B"/>
+                </a:solidFill>
+              </a:rPr>
+              <a:t>Pacientes</a:t>
+            </a:r>
+            <a:r>
+              <a:rPr sz="1500" b="0" i="0" dirty="0">
+                <a:solidFill>
+                  <a:srgbClr val="1E293B"/>
+                </a:solidFill>
+              </a:rPr>
+              <a:t> con </a:t>
+            </a:r>
+            <a:r>
+              <a:rPr sz="1500" b="0" i="0" dirty="0" err="1">
+                <a:solidFill>
+                  <a:srgbClr val="1E293B"/>
+                </a:solidFill>
+              </a:rPr>
+              <a:t>enfermedades</a:t>
+            </a:r>
+            <a:r>
+              <a:rPr sz="1500" b="0" i="0" dirty="0">
+                <a:solidFill>
+                  <a:srgbClr val="1E293B"/>
+                </a:solidFill>
+              </a:rPr>
+              <a:t> </a:t>
+            </a:r>
+            <a:r>
+              <a:rPr sz="1500" b="0" i="0" dirty="0" err="1" smtClean="0">
+                <a:solidFill>
+                  <a:srgbClr val="1E293B"/>
+                </a:solidFill>
+              </a:rPr>
+              <a:t>cr</a:t>
+            </a:r>
+            <a:r>
+              <a:rPr lang="es-419" sz="1500" b="0" i="0" dirty="0" err="1" smtClean="0">
+                <a:solidFill>
+                  <a:srgbClr val="1E293B"/>
+                </a:solidFill>
+              </a:rPr>
+              <a:t>ó</a:t>
+            </a:r>
+            <a:r>
+              <a:rPr sz="1500" b="0" i="0" dirty="0" err="1" smtClean="0">
+                <a:solidFill>
+                  <a:srgbClr val="1E293B"/>
+                </a:solidFill>
+              </a:rPr>
+              <a:t>nicas</a:t>
+            </a:r>
+            <a:r>
+              <a:rPr sz="1500" b="0" i="0" dirty="0" smtClean="0">
+                <a:solidFill>
+                  <a:srgbClr val="1E293B"/>
+                </a:solidFill>
+              </a:rPr>
+              <a:t> </a:t>
+            </a:r>
+            <a:r>
+              <a:rPr sz="1500" b="0" i="0" dirty="0" err="1">
+                <a:solidFill>
+                  <a:srgbClr val="1E293B"/>
+                </a:solidFill>
+              </a:rPr>
+              <a:t>interrumpen</a:t>
+            </a:r>
+            <a:r>
+              <a:rPr sz="1500" b="0" i="0" dirty="0">
+                <a:solidFill>
+                  <a:srgbClr val="1E293B"/>
+                </a:solidFill>
+              </a:rPr>
+              <a:t> </a:t>
+            </a:r>
+            <a:r>
+              <a:rPr sz="1500" b="0" i="0" dirty="0" err="1" smtClean="0">
+                <a:solidFill>
+                  <a:srgbClr val="1E293B"/>
+                </a:solidFill>
+              </a:rPr>
+              <a:t>tratamientos</a:t>
+            </a:r>
+            <a:endParaRPr sz="1500" b="0" i="0" dirty="0">
+              <a:solidFill>
+                <a:srgbClr val="1E293B"/>
+              </a:solidFill>
+            </a:endParaRPr>
           </a:p>
         </p:txBody>
       </p:sp>
@@ -5482,7 +6167,7 @@
         <p:spPr>
           <a:xfrm>
             <a:off x="1005840" y="4636008"/>
-            <a:ext cx="10698480" cy="457200"/>
+            <a:ext cx="10698480" cy="323165"/>
           </a:xfrm>
           <a:prstGeom prst="rect">
             <a:avLst/>
@@ -5497,13 +6182,114 @@
           <a:p>
             <a:pPr algn="l"/>
             <a:r>
-              <a:rPr sz="1500" b="0" i="0">
-                <a:solidFill>
-                  <a:srgbClr val="1E293B"/>
-                </a:solidFill>
-              </a:rPr>
-              <a:t>IPS y clinicas no pueden anticipar compras de emergencia</a:t>
-            </a:r>
+              <a:rPr sz="1500" b="0" i="0" dirty="0">
+                <a:solidFill>
+                  <a:srgbClr val="1E293B"/>
+                </a:solidFill>
+              </a:rPr>
+              <a:t>IPS y </a:t>
+            </a:r>
+            <a:r>
+              <a:rPr sz="1500" b="0" i="0" dirty="0" smtClean="0">
+                <a:solidFill>
+                  <a:srgbClr val="1E293B"/>
+                </a:solidFill>
+              </a:rPr>
+              <a:t>cl</a:t>
+            </a:r>
+            <a:r>
+              <a:rPr lang="es-419" sz="1500" b="0" i="0" dirty="0" smtClean="0">
+                <a:solidFill>
+                  <a:srgbClr val="1E293B"/>
+                </a:solidFill>
+              </a:rPr>
+              <a:t>í</a:t>
+            </a:r>
+            <a:r>
+              <a:rPr sz="1500" b="0" i="0" dirty="0" err="1" smtClean="0">
+                <a:solidFill>
+                  <a:srgbClr val="1E293B"/>
+                </a:solidFill>
+              </a:rPr>
+              <a:t>nicas</a:t>
+            </a:r>
+            <a:r>
+              <a:rPr sz="1500" b="0" i="0" dirty="0" smtClean="0">
+                <a:solidFill>
+                  <a:srgbClr val="1E293B"/>
+                </a:solidFill>
+              </a:rPr>
+              <a:t> </a:t>
+            </a:r>
+            <a:r>
+              <a:rPr sz="1500" b="0" i="0" dirty="0">
+                <a:solidFill>
+                  <a:srgbClr val="1E293B"/>
+                </a:solidFill>
+              </a:rPr>
+              <a:t>no </a:t>
+            </a:r>
+            <a:r>
+              <a:rPr sz="1500" b="0" i="0" dirty="0" err="1">
+                <a:solidFill>
+                  <a:srgbClr val="1E293B"/>
+                </a:solidFill>
+              </a:rPr>
+              <a:t>pueden</a:t>
+            </a:r>
+            <a:r>
+              <a:rPr sz="1500" b="0" i="0" dirty="0">
+                <a:solidFill>
+                  <a:srgbClr val="1E293B"/>
+                </a:solidFill>
+              </a:rPr>
+              <a:t> </a:t>
+            </a:r>
+            <a:r>
+              <a:rPr sz="1500" b="0" i="0" dirty="0" err="1">
+                <a:solidFill>
+                  <a:srgbClr val="1E293B"/>
+                </a:solidFill>
+              </a:rPr>
+              <a:t>anticipar</a:t>
+            </a:r>
+            <a:r>
+              <a:rPr sz="1500" b="0" i="0" dirty="0">
+                <a:solidFill>
+                  <a:srgbClr val="1E293B"/>
+                </a:solidFill>
+              </a:rPr>
+              <a:t> </a:t>
+            </a:r>
+            <a:r>
+              <a:rPr sz="1500" b="0" i="0" dirty="0" err="1">
+                <a:solidFill>
+                  <a:srgbClr val="1E293B"/>
+                </a:solidFill>
+              </a:rPr>
+              <a:t>compras</a:t>
+            </a:r>
+            <a:r>
+              <a:rPr sz="1500" b="0" i="0" dirty="0">
+                <a:solidFill>
+                  <a:srgbClr val="1E293B"/>
+                </a:solidFill>
+              </a:rPr>
+              <a:t> de </a:t>
+            </a:r>
+            <a:r>
+              <a:rPr sz="1500" b="0" i="0" dirty="0" err="1">
+                <a:solidFill>
+                  <a:srgbClr val="1E293B"/>
+                </a:solidFill>
+              </a:rPr>
+              <a:t>emergencia</a:t>
+            </a:r>
+            <a:endParaRPr sz="1500" b="0" i="0" dirty="0">
+              <a:solidFill>
+                <a:srgbClr val="1E293B"/>
+              </a:solidFill>
+            </a:endParaRPr>
           </a:p>
         </p:txBody>
       </p:sp>
@@ -5618,7 +6404,7 @@
         <p:spPr>
           <a:xfrm>
             <a:off x="1005840" y="5586983"/>
-            <a:ext cx="10698480" cy="457200"/>
+            <a:ext cx="10698480" cy="323165"/>
           </a:xfrm>
           <a:prstGeom prst="rect">
             <a:avLst/>
@@ -5633,13 +6419,130 @@
           <a:p>
             <a:pPr algn="l"/>
             <a:r>
-              <a:rPr sz="1500" b="0" i="0">
-                <a:solidFill>
-                  <a:srgbClr val="1E293B"/>
-                </a:solidFill>
-              </a:rPr>
-              <a:t>No existe senal ciudadana integrada con los datos regulatorios</a:t>
-            </a:r>
+              <a:rPr sz="1500" b="0" i="0" dirty="0">
+                <a:solidFill>
+                  <a:srgbClr val="1E293B"/>
+                </a:solidFill>
+              </a:rPr>
+              <a:t>No </a:t>
+            </a:r>
+            <a:r>
+              <a:rPr sz="1500" b="0" i="0" dirty="0" err="1">
+                <a:solidFill>
+                  <a:srgbClr val="1E293B"/>
+                </a:solidFill>
+              </a:rPr>
+              <a:t>existe</a:t>
+            </a:r>
+            <a:r>
+              <a:rPr sz="1500" b="0" i="0" dirty="0">
+                <a:solidFill>
+                  <a:srgbClr val="1E293B"/>
+                </a:solidFill>
+              </a:rPr>
+              <a:t> </a:t>
+            </a:r>
+            <a:r>
+              <a:rPr sz="1500" b="0" i="0" dirty="0" smtClean="0">
+                <a:solidFill>
+                  <a:srgbClr val="1E293B"/>
+                </a:solidFill>
+              </a:rPr>
+              <a:t>se</a:t>
+            </a:r>
+            <a:r>
+              <a:rPr lang="es-419" sz="1500" dirty="0" smtClean="0">
+                <a:solidFill>
+                  <a:srgbClr val="1E293B"/>
+                </a:solidFill>
+              </a:rPr>
+              <a:t>ñ</a:t>
+            </a:r>
+            <a:r>
+              <a:rPr sz="1500" b="0" i="0" dirty="0" smtClean="0">
+                <a:solidFill>
+                  <a:srgbClr val="1E293B"/>
+                </a:solidFill>
+              </a:rPr>
+              <a:t>al </a:t>
+            </a:r>
+            <a:r>
+              <a:rPr sz="1500" b="0" i="0" dirty="0" err="1">
+                <a:solidFill>
+                  <a:srgbClr val="1E293B"/>
+                </a:solidFill>
+              </a:rPr>
+              <a:t>ciudadana</a:t>
+            </a:r>
+            <a:r>
+              <a:rPr sz="1500" b="0" i="0" dirty="0">
+                <a:solidFill>
+                  <a:srgbClr val="1E293B"/>
+                </a:solidFill>
+              </a:rPr>
+              <a:t> </a:t>
+            </a:r>
+            <a:r>
+              <a:rPr sz="1500" b="0" i="0" dirty="0" err="1">
+                <a:solidFill>
+                  <a:srgbClr val="1E293B"/>
+                </a:solidFill>
+              </a:rPr>
+              <a:t>integrada</a:t>
+            </a:r>
+            <a:r>
+              <a:rPr sz="1500" b="0" i="0" dirty="0">
+                <a:solidFill>
+                  <a:srgbClr val="1E293B"/>
+                </a:solidFill>
+              </a:rPr>
+              <a:t> con </a:t>
+            </a:r>
+            <a:r>
+              <a:rPr sz="1500" b="0" i="0" dirty="0" err="1">
+                <a:solidFill>
+                  <a:srgbClr val="1E293B"/>
+                </a:solidFill>
+              </a:rPr>
+              <a:t>los</a:t>
+            </a:r>
+            <a:r>
+              <a:rPr sz="1500" b="0" i="0" dirty="0">
+                <a:solidFill>
+                  <a:srgbClr val="1E293B"/>
+                </a:solidFill>
+              </a:rPr>
+              <a:t> </a:t>
+            </a:r>
+            <a:r>
+              <a:rPr sz="1500" b="0" i="0" dirty="0" err="1">
+                <a:solidFill>
+                  <a:srgbClr val="1E293B"/>
+                </a:solidFill>
+              </a:rPr>
+              <a:t>datos</a:t>
+            </a:r>
+            <a:r>
+              <a:rPr sz="1500" b="0" i="0" dirty="0">
+                <a:solidFill>
+                  <a:srgbClr val="1E293B"/>
+                </a:solidFill>
+              </a:rPr>
+              <a:t> </a:t>
+            </a:r>
+            <a:r>
+              <a:rPr sz="1500" b="0" i="0" dirty="0" err="1">
+                <a:solidFill>
+                  <a:srgbClr val="1E293B"/>
+                </a:solidFill>
+              </a:rPr>
+              <a:t>regulatorios</a:t>
+            </a:r>
+            <a:endParaRPr sz="1500" b="0" i="0" dirty="0">
+              <a:solidFill>
+                <a:srgbClr val="1E293B"/>
+              </a:solidFill>
+            </a:endParaRPr>
           </a:p>
         </p:txBody>
       </p:sp>
@@ -5682,11 +6585,18 @@
   <p:clrMapOvr>
     <a:masterClrMapping/>
   </p:clrMapOvr>
+  <p:timing>
+    <p:tnLst>
+      <p:par>
+        <p:cTn id="1" dur="indefinite" restart="never" nodeType="tmRoot"/>
+      </p:par>
+    </p:tnLst>
+  </p:timing>
 </p:sld>
 </file>
 
 <file path=ppt/slides/slide3.xml><?xml version="1.0" encoding="utf-8"?>
-<p:sld xmlns:a="http://schemas.openxmlformats.org/drawingml/2006/main" xmlns:p="http://schemas.openxmlformats.org/presentationml/2006/main" xmlns:r="http://schemas.openxmlformats.org/officeDocument/2006/relationships">
+<p:sld xmlns:a="http://schemas.openxmlformats.org/drawingml/2006/main" xmlns:r="http://schemas.openxmlformats.org/officeDocument/2006/relationships" xmlns:p="http://schemas.openxmlformats.org/presentationml/2006/main">
   <p:cSld>
     <p:bg>
       <p:bgPr>
@@ -5702,7 +6612,14 @@
         <p:cNvGrpSpPr/>
         <p:nvPr/>
       </p:nvGrpSpPr>
-      <p:grpSpPr/>
+      <p:grpSpPr>
+        <a:xfrm>
+          <a:off x="0" y="0"/>
+          <a:ext cx="0" cy="0"/>
+          <a:chOff x="0" y="0"/>
+          <a:chExt cx="0" cy="0"/>
+        </a:xfrm>
+      </p:grpSpPr>
       <p:sp>
         <p:nvSpPr>
           <p:cNvPr id="2" name="Rectangle 1"/>
@@ -5743,6 +6660,7 @@
           <a:lstStyle/>
           <a:p>
             <a:pPr algn="ctr"/>
+            <a:endParaRPr/>
           </a:p>
         </p:txBody>
       </p:sp>
@@ -5786,6 +6704,7 @@
           <a:lstStyle/>
           <a:p>
             <a:pPr algn="ctr"/>
+            <a:endParaRPr/>
           </a:p>
         </p:txBody>
       </p:sp>
@@ -5798,7 +6717,7 @@
         <p:spPr>
           <a:xfrm>
             <a:off x="502920" y="164592"/>
-            <a:ext cx="10789920" cy="777240"/>
+            <a:ext cx="10789920" cy="507831"/>
           </a:xfrm>
           <a:prstGeom prst="rect">
             <a:avLst/>
@@ -5813,13 +6732,114 @@
           <a:p>
             <a:pPr algn="l"/>
             <a:r>
-              <a:rPr sz="2700" b="1" i="0">
+              <a:rPr sz="2700" b="1" i="0" dirty="0">
                 <a:solidFill>
                   <a:srgbClr val="0D2B55"/>
                 </a:solidFill>
               </a:rPr>
-              <a:t>Los Datos: Fuentes Publicas Integradas por Primera Vez</a:t>
-            </a:r>
+              <a:t>Los </a:t>
+            </a:r>
+            <a:r>
+              <a:rPr sz="2700" b="1" i="0" dirty="0" err="1">
+                <a:solidFill>
+                  <a:srgbClr val="0D2B55"/>
+                </a:solidFill>
+              </a:rPr>
+              <a:t>Datos</a:t>
+            </a:r>
+            <a:r>
+              <a:rPr sz="2700" b="1" i="0" dirty="0">
+                <a:solidFill>
+                  <a:srgbClr val="0D2B55"/>
+                </a:solidFill>
+              </a:rPr>
+              <a:t>: Fuentes </a:t>
+            </a:r>
+            <a:r>
+              <a:rPr lang="es-419" sz="2700" b="1" dirty="0" err="1" smtClean="0">
+                <a:solidFill>
+                  <a:srgbClr val="0D2B55"/>
+                </a:solidFill>
+              </a:rPr>
+              <a:t>Pú</a:t>
+            </a:r>
+            <a:r>
+              <a:rPr sz="2700" b="1" i="0" dirty="0" err="1" smtClean="0">
+                <a:solidFill>
+                  <a:srgbClr val="0D2B55"/>
+                </a:solidFill>
+              </a:rPr>
+              <a:t>blicas</a:t>
+            </a:r>
+            <a:r>
+              <a:rPr sz="2700" b="1" i="0" dirty="0" smtClean="0">
+                <a:solidFill>
+                  <a:srgbClr val="0D2B55"/>
+                </a:solidFill>
+              </a:rPr>
+              <a:t> </a:t>
+            </a:r>
+            <a:r>
+              <a:rPr sz="2700" b="1" i="0" dirty="0" err="1">
+                <a:solidFill>
+                  <a:srgbClr val="0D2B55"/>
+                </a:solidFill>
+              </a:rPr>
+              <a:t>Integradas</a:t>
+            </a:r>
+            <a:r>
+              <a:rPr sz="2700" b="1" i="0" dirty="0">
+                <a:solidFill>
+                  <a:srgbClr val="0D2B55"/>
+                </a:solidFill>
+              </a:rPr>
+              <a:t> </a:t>
+            </a:r>
+            <a:r>
+              <a:rPr sz="2700" b="1" i="0" dirty="0" err="1">
+                <a:solidFill>
+                  <a:srgbClr val="0D2B55"/>
+                </a:solidFill>
+              </a:rPr>
+              <a:t>por</a:t>
+            </a:r>
+            <a:r>
+              <a:rPr sz="2700" b="1" i="0" dirty="0">
+                <a:solidFill>
+                  <a:srgbClr val="0D2B55"/>
+                </a:solidFill>
+              </a:rPr>
+              <a:t> </a:t>
+            </a:r>
+            <a:r>
+              <a:rPr sz="2700" b="1" i="0" dirty="0" err="1">
+                <a:solidFill>
+                  <a:srgbClr val="0D2B55"/>
+                </a:solidFill>
+              </a:rPr>
+              <a:t>Primera</a:t>
+            </a:r>
+            <a:r>
+              <a:rPr sz="2700" b="1" i="0" dirty="0">
+                <a:solidFill>
+                  <a:srgbClr val="0D2B55"/>
+                </a:solidFill>
+              </a:rPr>
+              <a:t> </a:t>
+            </a:r>
+            <a:r>
+              <a:rPr sz="2700" b="1" i="0" dirty="0" err="1">
+                <a:solidFill>
+                  <a:srgbClr val="0D2B55"/>
+                </a:solidFill>
+              </a:rPr>
+              <a:t>Vez</a:t>
+            </a:r>
+            <a:endParaRPr sz="2700" b="1" i="0" dirty="0">
+              <a:solidFill>
+                <a:srgbClr val="0D2B55"/>
+              </a:solidFill>
+            </a:endParaRPr>
           </a:p>
         </p:txBody>
       </p:sp>
@@ -5863,6 +6883,7 @@
           <a:lstStyle/>
           <a:p>
             <a:pPr algn="ctr"/>
+            <a:endParaRPr/>
           </a:p>
         </p:txBody>
       </p:sp>
@@ -5942,6 +6963,7 @@
           <a:lstStyle/>
           <a:p>
             <a:pPr algn="ctr"/>
+            <a:endParaRPr/>
           </a:p>
         </p:txBody>
       </p:sp>
@@ -5985,6 +7007,7 @@
           <a:lstStyle/>
           <a:p>
             <a:pPr algn="ctr"/>
+            <a:endParaRPr/>
           </a:p>
         </p:txBody>
       </p:sp>
@@ -6166,6 +7189,7 @@
           <a:lstStyle/>
           <a:p>
             <a:pPr algn="ctr"/>
+            <a:endParaRPr/>
           </a:p>
         </p:txBody>
       </p:sp>
@@ -6209,6 +7233,7 @@
           <a:lstStyle/>
           <a:p>
             <a:pPr algn="ctr"/>
+            <a:endParaRPr/>
           </a:p>
         </p:txBody>
       </p:sp>
@@ -6221,7 +7246,7 @@
         <p:spPr>
           <a:xfrm>
             <a:off x="6446520" y="1234440"/>
-            <a:ext cx="5029200" cy="411480"/>
+            <a:ext cx="5029200" cy="292388"/>
           </a:xfrm>
           <a:prstGeom prst="rect">
             <a:avLst/>
@@ -6236,13 +7261,42 @@
           <a:p>
             <a:pPr algn="l"/>
             <a:r>
-              <a:rPr sz="1300" b="1" i="0">
+              <a:rPr sz="1300" b="1" i="0" dirty="0">
                 <a:solidFill>
                   <a:srgbClr val="1A568C"/>
                 </a:solidFill>
               </a:rPr>
-              <a:t>CUM Renovacion</a:t>
-            </a:r>
+              <a:t>CUM </a:t>
+            </a:r>
+            <a:r>
+              <a:rPr sz="1300" b="1" i="0" dirty="0" err="1" smtClean="0">
+                <a:solidFill>
+                  <a:srgbClr val="1A568C"/>
+                </a:solidFill>
+              </a:rPr>
+              <a:t>Renovaci</a:t>
+            </a:r>
+            <a:r>
+              <a:rPr lang="es-419" sz="1300" b="1" dirty="0" err="1">
+                <a:solidFill>
+                  <a:srgbClr val="1A568C"/>
+                </a:solidFill>
+              </a:rPr>
+              <a:t>ó</a:t>
+            </a:r>
+            <a:r>
+              <a:rPr sz="1300" b="1" i="0" dirty="0" smtClean="0">
+                <a:solidFill>
+                  <a:srgbClr val="1A568C"/>
+                </a:solidFill>
+              </a:rPr>
+              <a:t>n</a:t>
+            </a:r>
+            <a:endParaRPr sz="1300" b="1" i="0" dirty="0">
+              <a:solidFill>
+                <a:srgbClr val="1A568C"/>
+              </a:solidFill>
+            </a:endParaRPr>
           </a:p>
         </p:txBody>
       </p:sp>
@@ -6289,7 +7343,7 @@
         <p:spPr>
           <a:xfrm>
             <a:off x="6446520" y="2377440"/>
-            <a:ext cx="5029200" cy="320040"/>
+            <a:ext cx="5029200" cy="261610"/>
           </a:xfrm>
           <a:prstGeom prst="rect">
             <a:avLst/>
@@ -6304,13 +7358,66 @@
           <a:p>
             <a:pPr algn="l"/>
             <a:r>
-              <a:rPr sz="1100" b="0" i="0">
+              <a:rPr sz="1100" b="0" i="0" dirty="0" err="1">
                 <a:solidFill>
                   <a:srgbClr val="4A5B6E"/>
                 </a:solidFill>
               </a:rPr>
-              <a:t>registros en tramite</a:t>
-            </a:r>
+              <a:t>registros</a:t>
+            </a:r>
+            <a:r>
+              <a:rPr sz="1100" b="0" i="0" dirty="0">
+                <a:solidFill>
+                  <a:srgbClr val="4A5B6E"/>
+                </a:solidFill>
+              </a:rPr>
+              <a:t> </a:t>
+            </a:r>
+            <a:r>
+              <a:rPr sz="1100" b="0" i="0" dirty="0" err="1">
+                <a:solidFill>
+                  <a:srgbClr val="4A5B6E"/>
+                </a:solidFill>
+              </a:rPr>
+              <a:t>en</a:t>
+            </a:r>
+            <a:r>
+              <a:rPr sz="1100" b="0" i="0" dirty="0">
+                <a:solidFill>
+                  <a:srgbClr val="4A5B6E"/>
+                </a:solidFill>
+              </a:rPr>
+              <a:t> </a:t>
+            </a:r>
+            <a:r>
+              <a:rPr sz="1100" b="0" i="0" dirty="0" err="1" smtClean="0">
+                <a:solidFill>
+                  <a:srgbClr val="4A5B6E"/>
+                </a:solidFill>
+              </a:rPr>
+              <a:t>tr</a:t>
+            </a:r>
+            <a:r>
+              <a:rPr lang="es-419" sz="1100" b="0" i="0" dirty="0" smtClean="0">
+                <a:solidFill>
+                  <a:srgbClr val="4A5B6E"/>
+                </a:solidFill>
+              </a:rPr>
+              <a:t>á</a:t>
+            </a:r>
+            <a:r>
+              <a:rPr sz="1100" b="0" i="0" dirty="0" smtClean="0">
+                <a:solidFill>
+                  <a:srgbClr val="4A5B6E"/>
+                </a:solidFill>
+              </a:rPr>
+              <a:t>mite</a:t>
+            </a:r>
+            <a:endParaRPr sz="1100" b="0" i="0" dirty="0">
+              <a:solidFill>
+                <a:srgbClr val="4A5B6E"/>
+              </a:solidFill>
+            </a:endParaRPr>
           </a:p>
         </p:txBody>
       </p:sp>
@@ -6390,6 +7497,7 @@
           <a:lstStyle/>
           <a:p>
             <a:pPr algn="ctr"/>
+            <a:endParaRPr/>
           </a:p>
         </p:txBody>
       </p:sp>
@@ -6433,6 +7541,7 @@
           <a:lstStyle/>
           <a:p>
             <a:pPr algn="ctr"/>
+            <a:endParaRPr/>
           </a:p>
         </p:txBody>
       </p:sp>
@@ -6614,6 +7723,7 @@
           <a:lstStyle/>
           <a:p>
             <a:pPr algn="ctr"/>
+            <a:endParaRPr/>
           </a:p>
         </p:txBody>
       </p:sp>
@@ -6657,6 +7767,7 @@
           <a:lstStyle/>
           <a:p>
             <a:pPr algn="ctr"/>
+            <a:endParaRPr/>
           </a:p>
         </p:txBody>
       </p:sp>
@@ -6838,6 +7949,7 @@
           <a:lstStyle/>
           <a:p>
             <a:pPr algn="ctr"/>
+            <a:endParaRPr/>
           </a:p>
         </p:txBody>
       </p:sp>
@@ -6884,7 +7996,7 @@
 </file>
 
 <file path=ppt/slides/slide4.xml><?xml version="1.0" encoding="utf-8"?>
-<p:sld xmlns:a="http://schemas.openxmlformats.org/drawingml/2006/main" xmlns:p="http://schemas.openxmlformats.org/presentationml/2006/main" xmlns:r="http://schemas.openxmlformats.org/officeDocument/2006/relationships">
+<p:sld xmlns:a="http://schemas.openxmlformats.org/drawingml/2006/main" xmlns:r="http://schemas.openxmlformats.org/officeDocument/2006/relationships" xmlns:p="http://schemas.openxmlformats.org/presentationml/2006/main">
   <p:cSld>
     <p:bg>
       <p:bgPr>
@@ -6900,7 +8012,14 @@
         <p:cNvGrpSpPr/>
         <p:nvPr/>
       </p:nvGrpSpPr>
-      <p:grpSpPr/>
+      <p:grpSpPr>
+        <a:xfrm>
+          <a:off x="0" y="0"/>
+          <a:ext cx="0" cy="0"/>
+          <a:chOff x="0" y="0"/>
+          <a:chExt cx="0" cy="0"/>
+        </a:xfrm>
+      </p:grpSpPr>
       <p:sp>
         <p:nvSpPr>
           <p:cNvPr id="2" name="Rectangle 1"/>
@@ -6941,6 +8060,7 @@
           <a:lstStyle/>
           <a:p>
             <a:pPr algn="ctr"/>
+            <a:endParaRPr/>
           </a:p>
         </p:txBody>
       </p:sp>
@@ -6984,6 +8104,7 @@
           <a:lstStyle/>
           <a:p>
             <a:pPr algn="ctr"/>
+            <a:endParaRPr/>
           </a:p>
         </p:txBody>
       </p:sp>
@@ -7061,6 +8182,7 @@
           <a:lstStyle/>
           <a:p>
             <a:pPr algn="ctr"/>
+            <a:endParaRPr/>
           </a:p>
         </p:txBody>
       </p:sp>
@@ -7140,6 +8262,7 @@
           <a:lstStyle/>
           <a:p>
             <a:pPr algn="ctr"/>
+            <a:endParaRPr/>
           </a:p>
         </p:txBody>
       </p:sp>
@@ -7183,6 +8306,7 @@
           <a:lstStyle/>
           <a:p>
             <a:pPr algn="ctr"/>
+            <a:endParaRPr/>
           </a:p>
         </p:txBody>
       </p:sp>
@@ -7398,6 +8522,7 @@
           <a:lstStyle/>
           <a:p>
             <a:pPr algn="ctr"/>
+            <a:endParaRPr/>
           </a:p>
         </p:txBody>
       </p:sp>
@@ -7441,6 +8566,7 @@
           <a:lstStyle/>
           <a:p>
             <a:pPr algn="ctr"/>
+            <a:endParaRPr/>
           </a:p>
         </p:txBody>
       </p:sp>
@@ -7656,6 +8782,7 @@
           <a:lstStyle/>
           <a:p>
             <a:pPr algn="ctr"/>
+            <a:endParaRPr/>
           </a:p>
         </p:txBody>
       </p:sp>
@@ -7699,6 +8826,7 @@
           <a:lstStyle/>
           <a:p>
             <a:pPr algn="ctr"/>
+            <a:endParaRPr/>
           </a:p>
         </p:txBody>
       </p:sp>
@@ -7745,7 +8873,7 @@
         <p:spPr>
           <a:xfrm>
             <a:off x="4846320" y="1691640"/>
-            <a:ext cx="1920240" cy="685800"/>
+            <a:ext cx="1920240" cy="261610"/>
           </a:xfrm>
           <a:prstGeom prst="rect">
             <a:avLst/>
@@ -7760,12 +8888,44 @@
           <a:p>
             <a:pPr algn="ctr"/>
             <a:r>
-              <a:rPr sz="1100" b="0" i="0">
-                <a:solidFill>
-                  <a:srgbClr val="1E293B"/>
-                </a:solidFill>
-              </a:rPr>
-              <a:t>Busqueda CUM</a:t>
+              <a:rPr sz="1100" b="0" i="0" dirty="0" smtClean="0">
+                <a:solidFill>
+                  <a:srgbClr val="1E293B"/>
+                </a:solidFill>
+              </a:rPr>
+              <a:t>B</a:t>
+            </a:r>
+            <a:r>
+              <a:rPr lang="es-419" sz="1100" b="0" i="0" dirty="0" err="1" smtClean="0">
+                <a:solidFill>
+                  <a:srgbClr val="1E293B"/>
+                </a:solidFill>
+              </a:rPr>
+              <a:t>ús</a:t>
+            </a:r>
+            <a:r>
+              <a:rPr sz="1100" b="0" i="0" dirty="0" err="1" smtClean="0">
+                <a:solidFill>
+                  <a:srgbClr val="1E293B"/>
+                </a:solidFill>
+              </a:rPr>
+              <a:t>queda</a:t>
+            </a:r>
+            <a:r>
+              <a:rPr sz="1100" b="0" i="0" dirty="0" smtClean="0">
+                <a:solidFill>
+                  <a:srgbClr val="1E293B"/>
+                </a:solidFill>
+              </a:rPr>
+              <a:t> </a:t>
+            </a:r>
+            <a:r>
+              <a:rPr sz="1100" b="0" i="0" dirty="0">
+                <a:solidFill>
+                  <a:srgbClr val="1E293B"/>
+                </a:solidFill>
+              </a:rPr>
+              <a:t>CUM</a:t>
             </a:r>
           </a:p>
         </p:txBody>
@@ -7828,12 +8988,20 @@
           <a:p>
             <a:pPr algn="ctr"/>
             <a:r>
-              <a:rPr sz="1100" b="0" i="0">
-                <a:solidFill>
-                  <a:srgbClr val="1E293B"/>
-                </a:solidFill>
-              </a:rPr>
-              <a:t>Predicciones ML</a:t>
+              <a:rPr sz="1100" b="0" i="0" dirty="0" err="1">
+                <a:solidFill>
+                  <a:srgbClr val="1E293B"/>
+                </a:solidFill>
+              </a:rPr>
+              <a:t>Predicciones</a:t>
+            </a:r>
+            <a:r>
+              <a:rPr sz="1100" b="0" i="0" dirty="0">
+                <a:solidFill>
+                  <a:srgbClr val="1E293B"/>
+                </a:solidFill>
+              </a:rPr>
+              <a:t> ML</a:t>
             </a:r>
           </a:p>
         </p:txBody>
@@ -7881,7 +9049,7 @@
         <p:spPr>
           <a:xfrm>
             <a:off x="4846320" y="4800600"/>
-            <a:ext cx="1920240" cy="685800"/>
+            <a:ext cx="1920240" cy="261610"/>
           </a:xfrm>
           <a:prstGeom prst="rect">
             <a:avLst/>
@@ -7896,12 +9064,36 @@
           <a:p>
             <a:pPr algn="ctr"/>
             <a:r>
-              <a:rPr sz="1100" b="0" i="0">
-                <a:solidFill>
-                  <a:srgbClr val="1E293B"/>
-                </a:solidFill>
-              </a:rPr>
-              <a:t>Cache INVIMA</a:t>
+              <a:rPr sz="1100" b="0" i="0" dirty="0" err="1" smtClean="0">
+                <a:solidFill>
+                  <a:srgbClr val="1E293B"/>
+                </a:solidFill>
+              </a:rPr>
+              <a:t>Cach</a:t>
+            </a:r>
+            <a:r>
+              <a:rPr lang="es-419" sz="1100" b="0" i="0" dirty="0" smtClean="0">
+                <a:solidFill>
+                  <a:srgbClr val="1E293B"/>
+                </a:solidFill>
+              </a:rPr>
+              <a:t>é</a:t>
+            </a:r>
+            <a:r>
+              <a:rPr sz="1100" b="0" i="0" dirty="0" smtClean="0">
+                <a:solidFill>
+                  <a:srgbClr val="1E293B"/>
+                </a:solidFill>
+              </a:rPr>
+              <a:t> </a:t>
+            </a:r>
+            <a:r>
+              <a:rPr sz="1100" b="0" i="0" dirty="0">
+                <a:solidFill>
+                  <a:srgbClr val="1E293B"/>
+                </a:solidFill>
+              </a:rPr>
+              <a:t>INVIMA</a:t>
             </a:r>
           </a:p>
         </p:txBody>
@@ -7948,6 +9140,7 @@
           <a:lstStyle/>
           <a:p>
             <a:pPr algn="ctr"/>
+            <a:endParaRPr/>
           </a:p>
         </p:txBody>
       </p:sp>
@@ -7991,6 +9184,7 @@
           <a:lstStyle/>
           <a:p>
             <a:pPr algn="ctr"/>
+            <a:endParaRPr/>
           </a:p>
         </p:txBody>
       </p:sp>
@@ -8052,7 +9246,7 @@
           <a:p>
             <a:pPr algn="ctr"/>
             <a:r>
-              <a:rPr sz="1100" b="0" i="0">
+              <a:rPr sz="1100" b="0" i="0" dirty="0">
                 <a:solidFill>
                   <a:srgbClr val="1E293B"/>
                 </a:solidFill>
@@ -8240,6 +9434,7 @@
           <a:lstStyle/>
           <a:p>
             <a:pPr algn="ctr"/>
+            <a:endParaRPr/>
           </a:p>
         </p:txBody>
       </p:sp>
@@ -8283,6 +9478,7 @@
           <a:lstStyle/>
           <a:p>
             <a:pPr algn="ctr"/>
+            <a:endParaRPr/>
           </a:p>
         </p:txBody>
       </p:sp>
@@ -8329,7 +9525,7 @@
         <p:spPr>
           <a:xfrm>
             <a:off x="9326880" y="1691640"/>
-            <a:ext cx="1280160" cy="685800"/>
+            <a:ext cx="1280160" cy="430887"/>
           </a:xfrm>
           <a:prstGeom prst="rect">
             <a:avLst/>
@@ -8344,14 +9540,51 @@
           <a:p>
             <a:pPr algn="ctr"/>
             <a:r>
-              <a:rPr sz="1100" b="0" i="0">
-                <a:solidFill>
-                  <a:srgbClr val="1E293B"/>
-                </a:solidFill>
-              </a:rPr>
-              <a:t>Senales
-tempranas</a:t>
-            </a:r>
+              <a:rPr sz="1100" b="0" i="0" dirty="0" smtClean="0">
+                <a:solidFill>
+                  <a:srgbClr val="1E293B"/>
+                </a:solidFill>
+              </a:rPr>
+              <a:t>Se</a:t>
+            </a:r>
+            <a:r>
+              <a:rPr lang="es-419" sz="1100" dirty="0" smtClean="0">
+                <a:solidFill>
+                  <a:srgbClr val="1E293B"/>
+                </a:solidFill>
+              </a:rPr>
+              <a:t>ñ</a:t>
+            </a:r>
+            <a:r>
+              <a:rPr sz="1100" b="0" i="0" dirty="0" smtClean="0">
+                <a:solidFill>
+                  <a:srgbClr val="1E293B"/>
+                </a:solidFill>
+              </a:rPr>
+              <a:t>ales</a:t>
+            </a:r>
+            <a:r>
+              <a:rPr sz="1100" b="0" i="0" dirty="0">
+                <a:solidFill>
+                  <a:srgbClr val="1E293B"/>
+                </a:solidFill>
+              </a:rPr>
+              <a:t>
+</a:t>
+            </a:r>
+            <a:r>
+              <a:rPr sz="1100" b="0" i="0" dirty="0" err="1">
+                <a:solidFill>
+                  <a:srgbClr val="1E293B"/>
+                </a:solidFill>
+              </a:rPr>
+              <a:t>tempranas</a:t>
+            </a:r>
+            <a:endParaRPr sz="1100" b="0" i="0" dirty="0">
+              <a:solidFill>
+                <a:srgbClr val="1E293B"/>
+              </a:solidFill>
+            </a:endParaRPr>
           </a:p>
         </p:txBody>
       </p:sp>
@@ -8364,7 +9597,7 @@
         <p:spPr>
           <a:xfrm>
             <a:off x="9326880" y="2468880"/>
-            <a:ext cx="1280160" cy="685800"/>
+            <a:ext cx="1280160" cy="430887"/>
           </a:xfrm>
           <a:prstGeom prst="rect">
             <a:avLst/>
@@ -8379,12 +9612,44 @@
           <a:p>
             <a:pPr algn="ctr"/>
             <a:r>
-              <a:rPr sz="1100" b="0" i="0">
-                <a:solidFill>
-                  <a:srgbClr val="1E293B"/>
-                </a:solidFill>
-              </a:rPr>
-              <a:t>30 dias
+              <a:rPr sz="1100" b="0" i="0" dirty="0">
+                <a:solidFill>
+                  <a:srgbClr val="1E293B"/>
+                </a:solidFill>
+              </a:rPr>
+              <a:t>30 </a:t>
+            </a:r>
+            <a:r>
+              <a:rPr sz="1100" b="0" i="0" dirty="0" smtClean="0">
+                <a:solidFill>
+                  <a:srgbClr val="1E293B"/>
+                </a:solidFill>
+              </a:rPr>
+              <a:t>d</a:t>
+            </a:r>
+            <a:r>
+              <a:rPr lang="es-419" sz="1100" b="0" i="0" dirty="0" smtClean="0">
+                <a:solidFill>
+                  <a:srgbClr val="1E293B"/>
+                </a:solidFill>
+              </a:rPr>
+              <a:t>í</a:t>
+            </a:r>
+            <a:r>
+              <a:rPr sz="1100" b="0" i="0" dirty="0" smtClean="0">
+                <a:solidFill>
+                  <a:srgbClr val="1E293B"/>
+                </a:solidFill>
+              </a:rPr>
+              <a:t>as</a:t>
+            </a:r>
+            <a:r>
+              <a:rPr sz="1100" b="0" i="0" dirty="0">
+                <a:solidFill>
+                  <a:srgbClr val="1E293B"/>
+                </a:solidFill>
+              </a:rPr>
+              <a:t>
 antes</a:t>
             </a:r>
           </a:p>
@@ -8603,7 +9868,7 @@
 </file>
 
 <file path=ppt/slides/slide5.xml><?xml version="1.0" encoding="utf-8"?>
-<p:sld xmlns:a="http://schemas.openxmlformats.org/drawingml/2006/main" xmlns:p="http://schemas.openxmlformats.org/presentationml/2006/main" xmlns:r="http://schemas.openxmlformats.org/officeDocument/2006/relationships">
+<p:sld xmlns:a="http://schemas.openxmlformats.org/drawingml/2006/main" xmlns:r="http://schemas.openxmlformats.org/officeDocument/2006/relationships" xmlns:p="http://schemas.openxmlformats.org/presentationml/2006/main">
   <p:cSld>
     <p:bg>
       <p:bgPr>
@@ -8619,7 +9884,14 @@
         <p:cNvGrpSpPr/>
         <p:nvPr/>
       </p:nvGrpSpPr>
-      <p:grpSpPr/>
+      <p:grpSpPr>
+        <a:xfrm>
+          <a:off x="0" y="0"/>
+          <a:ext cx="0" cy="0"/>
+          <a:chOff x="0" y="0"/>
+          <a:chExt cx="0" cy="0"/>
+        </a:xfrm>
+      </p:grpSpPr>
       <p:sp>
         <p:nvSpPr>
           <p:cNvPr id="2" name="Rectangle 1"/>
@@ -8660,6 +9932,7 @@
           <a:lstStyle/>
           <a:p>
             <a:pPr algn="ctr"/>
+            <a:endParaRPr/>
           </a:p>
         </p:txBody>
       </p:sp>
@@ -8703,6 +9976,7 @@
           <a:lstStyle/>
           <a:p>
             <a:pPr algn="ctr"/>
+            <a:endParaRPr/>
           </a:p>
         </p:txBody>
       </p:sp>
@@ -8715,7 +9989,7 @@
         <p:spPr>
           <a:xfrm>
             <a:off x="502920" y="164592"/>
-            <a:ext cx="10789920" cy="777240"/>
+            <a:ext cx="10789920" cy="507831"/>
           </a:xfrm>
           <a:prstGeom prst="rect">
             <a:avLst/>
@@ -8730,13 +10004,98 @@
           <a:p>
             <a:pPr algn="l"/>
             <a:r>
-              <a:rPr sz="2700" b="1" i="0">
+              <a:rPr sz="2700" b="1" i="0" dirty="0">
                 <a:solidFill>
                   <a:srgbClr val="0D2B55"/>
                 </a:solidFill>
               </a:rPr>
-              <a:t>Pipeline ETL: Calidad Farmaceutica de Alta Precision</a:t>
-            </a:r>
+              <a:t>Pipeline ETL: </a:t>
+            </a:r>
+            <a:r>
+              <a:rPr sz="2700" b="1" i="0" dirty="0" err="1">
+                <a:solidFill>
+                  <a:srgbClr val="0D2B55"/>
+                </a:solidFill>
+              </a:rPr>
+              <a:t>Calidad</a:t>
+            </a:r>
+            <a:r>
+              <a:rPr sz="2700" b="1" i="0" dirty="0">
+                <a:solidFill>
+                  <a:srgbClr val="0D2B55"/>
+                </a:solidFill>
+              </a:rPr>
+              <a:t> </a:t>
+            </a:r>
+            <a:r>
+              <a:rPr sz="2700" b="1" i="0" dirty="0" err="1" smtClean="0">
+                <a:solidFill>
+                  <a:srgbClr val="0D2B55"/>
+                </a:solidFill>
+              </a:rPr>
+              <a:t>Farmac</a:t>
+            </a:r>
+            <a:r>
+              <a:rPr lang="es-419" sz="2700" b="1" i="0" dirty="0" smtClean="0">
+                <a:solidFill>
+                  <a:srgbClr val="0D2B55"/>
+                </a:solidFill>
+              </a:rPr>
+              <a:t>é</a:t>
+            </a:r>
+            <a:r>
+              <a:rPr sz="2700" b="1" i="0" dirty="0" err="1" smtClean="0">
+                <a:solidFill>
+                  <a:srgbClr val="0D2B55"/>
+                </a:solidFill>
+              </a:rPr>
+              <a:t>utica</a:t>
+            </a:r>
+            <a:r>
+              <a:rPr sz="2700" b="1" i="0" dirty="0" smtClean="0">
+                <a:solidFill>
+                  <a:srgbClr val="0D2B55"/>
+                </a:solidFill>
+              </a:rPr>
+              <a:t> </a:t>
+            </a:r>
+            <a:r>
+              <a:rPr sz="2700" b="1" i="0" dirty="0">
+                <a:solidFill>
+                  <a:srgbClr val="0D2B55"/>
+                </a:solidFill>
+              </a:rPr>
+              <a:t>de Alta </a:t>
+            </a:r>
+            <a:r>
+              <a:rPr sz="2700" b="1" i="0" dirty="0" err="1" smtClean="0">
+                <a:solidFill>
+                  <a:srgbClr val="0D2B55"/>
+                </a:solidFill>
+              </a:rPr>
+              <a:t>Precisi</a:t>
+            </a:r>
+            <a:r>
+              <a:rPr lang="es-419" sz="2700" b="1" i="0" dirty="0" err="1" smtClean="0">
+                <a:solidFill>
+                  <a:srgbClr val="0D2B55"/>
+                </a:solidFill>
+              </a:rPr>
+              <a:t>ó</a:t>
+            </a:r>
+            <a:r>
+              <a:rPr sz="2700" b="1" i="0" dirty="0" smtClean="0">
+                <a:solidFill>
+                  <a:srgbClr val="0D2B55"/>
+                </a:solidFill>
+              </a:rPr>
+              <a:t>n</a:t>
+            </a:r>
+            <a:endParaRPr sz="2700" b="1" i="0" dirty="0">
+              <a:solidFill>
+                <a:srgbClr val="0D2B55"/>
+              </a:solidFill>
+            </a:endParaRPr>
           </a:p>
         </p:txBody>
       </p:sp>
@@ -8780,6 +10139,7 @@
           <a:lstStyle/>
           <a:p>
             <a:pPr algn="ctr"/>
+            <a:endParaRPr/>
           </a:p>
         </p:txBody>
       </p:sp>
@@ -8859,6 +10219,7 @@
           <a:lstStyle/>
           <a:p>
             <a:pPr algn="ctr"/>
+            <a:endParaRPr/>
           </a:p>
         </p:txBody>
       </p:sp>
@@ -8905,7 +10266,7 @@
         <p:spPr>
           <a:xfrm>
             <a:off x="2103120" y="1207008"/>
-            <a:ext cx="9418320" cy="365760"/>
+            <a:ext cx="9418320" cy="307777"/>
           </a:xfrm>
           <a:prstGeom prst="rect">
             <a:avLst/>
@@ -8920,12 +10281,76 @@
           <a:p>
             <a:pPr algn="l"/>
             <a:r>
-              <a:rPr sz="1400" b="0" i="0">
-                <a:solidFill>
-                  <a:srgbClr val="1E293B"/>
-                </a:solidFill>
-              </a:rPr>
-              <a:t>medicamentos del CUM descargados via Socrata API (datos.gov.co)</a:t>
+              <a:rPr sz="1400" b="0" i="0" dirty="0" err="1">
+                <a:solidFill>
+                  <a:srgbClr val="1E293B"/>
+                </a:solidFill>
+              </a:rPr>
+              <a:t>medicamentos</a:t>
+            </a:r>
+            <a:r>
+              <a:rPr sz="1400" b="0" i="0" dirty="0">
+                <a:solidFill>
+                  <a:srgbClr val="1E293B"/>
+                </a:solidFill>
+              </a:rPr>
+              <a:t> del CUM </a:t>
+            </a:r>
+            <a:r>
+              <a:rPr sz="1400" b="0" i="0" dirty="0" err="1">
+                <a:solidFill>
+                  <a:srgbClr val="1E293B"/>
+                </a:solidFill>
+              </a:rPr>
+              <a:t>descargados</a:t>
+            </a:r>
+            <a:r>
+              <a:rPr sz="1400" b="0" i="0" dirty="0">
+                <a:solidFill>
+                  <a:srgbClr val="1E293B"/>
+                </a:solidFill>
+              </a:rPr>
+              <a:t> </a:t>
+            </a:r>
+            <a:r>
+              <a:rPr sz="1400" b="0" i="0" dirty="0" smtClean="0">
+                <a:solidFill>
+                  <a:srgbClr val="1E293B"/>
+                </a:solidFill>
+              </a:rPr>
+              <a:t>v</a:t>
+            </a:r>
+            <a:r>
+              <a:rPr lang="es-419" sz="1400" b="0" i="0" dirty="0" smtClean="0">
+                <a:solidFill>
+                  <a:srgbClr val="1E293B"/>
+                </a:solidFill>
+              </a:rPr>
+              <a:t>í</a:t>
+            </a:r>
+            <a:r>
+              <a:rPr sz="1400" b="0" i="0" dirty="0" smtClean="0">
+                <a:solidFill>
+                  <a:srgbClr val="1E293B"/>
+                </a:solidFill>
+              </a:rPr>
+              <a:t>a </a:t>
+            </a:r>
+            <a:r>
+              <a:rPr sz="1400" b="0" i="0" dirty="0" err="1">
+                <a:solidFill>
+                  <a:srgbClr val="1E293B"/>
+                </a:solidFill>
+              </a:rPr>
+              <a:t>Socrata</a:t>
+            </a:r>
+            <a:r>
+              <a:rPr sz="1400" b="0" i="0" dirty="0">
+                <a:solidFill>
+                  <a:srgbClr val="1E293B"/>
+                </a:solidFill>
+              </a:rPr>
+              <a:t> API (datos.gov.co)</a:t>
             </a:r>
           </a:p>
         </p:txBody>
@@ -8972,6 +10397,7 @@
           <a:lstStyle/>
           <a:p>
             <a:pPr algn="ctr"/>
+            <a:endParaRPr/>
           </a:p>
         </p:txBody>
       </p:sp>
@@ -9018,7 +10444,7 @@
         <p:spPr>
           <a:xfrm>
             <a:off x="2103120" y="1819656"/>
-            <a:ext cx="9418320" cy="365760"/>
+            <a:ext cx="9418320" cy="307777"/>
           </a:xfrm>
           <a:prstGeom prst="rect">
             <a:avLst/>
@@ -9033,13 +10459,98 @@
           <a:p>
             <a:pPr algn="l"/>
             <a:r>
-              <a:rPr sz="1400" b="0" i="0">
-                <a:solidFill>
-                  <a:srgbClr val="1E293B"/>
-                </a:solidFill>
-              </a:rPr>
-              <a:t>reglas de sinonimia INN + 50 patrones de sal farmaceutica</a:t>
-            </a:r>
+              <a:rPr sz="1400" b="0" i="0" dirty="0" err="1">
+                <a:solidFill>
+                  <a:srgbClr val="1E293B"/>
+                </a:solidFill>
+              </a:rPr>
+              <a:t>reglas</a:t>
+            </a:r>
+            <a:r>
+              <a:rPr sz="1400" b="0" i="0" dirty="0">
+                <a:solidFill>
+                  <a:srgbClr val="1E293B"/>
+                </a:solidFill>
+              </a:rPr>
+              <a:t> de </a:t>
+            </a:r>
+            <a:r>
+              <a:rPr sz="1400" b="0" i="0" dirty="0" err="1">
+                <a:solidFill>
+                  <a:srgbClr val="1E293B"/>
+                </a:solidFill>
+              </a:rPr>
+              <a:t>sinonimia</a:t>
+            </a:r>
+            <a:r>
+              <a:rPr sz="1400" b="0" i="0" dirty="0">
+                <a:solidFill>
+                  <a:srgbClr val="1E293B"/>
+                </a:solidFill>
+              </a:rPr>
+              <a:t> INN + 50 </a:t>
+            </a:r>
+            <a:r>
+              <a:rPr sz="1400" b="0" i="0" dirty="0" err="1">
+                <a:solidFill>
+                  <a:srgbClr val="1E293B"/>
+                </a:solidFill>
+              </a:rPr>
+              <a:t>patrones</a:t>
+            </a:r>
+            <a:r>
+              <a:rPr sz="1400" b="0" i="0" dirty="0">
+                <a:solidFill>
+                  <a:srgbClr val="1E293B"/>
+                </a:solidFill>
+              </a:rPr>
+              <a:t> de </a:t>
+            </a:r>
+            <a:r>
+              <a:rPr sz="1400" b="0" i="0" dirty="0" err="1">
+                <a:solidFill>
+                  <a:srgbClr val="1E293B"/>
+                </a:solidFill>
+              </a:rPr>
+              <a:t>sal</a:t>
+            </a:r>
+            <a:r>
+              <a:rPr sz="1400" b="0" i="0" dirty="0">
+                <a:solidFill>
+                  <a:srgbClr val="1E293B"/>
+                </a:solidFill>
+              </a:rPr>
+              <a:t> </a:t>
+            </a:r>
+            <a:r>
+              <a:rPr sz="1400" b="0" i="0" dirty="0" err="1" smtClean="0">
+                <a:solidFill>
+                  <a:srgbClr val="1E293B"/>
+                </a:solidFill>
+              </a:rPr>
+              <a:t>farmac</a:t>
+            </a:r>
+            <a:r>
+              <a:rPr lang="es-419" sz="1400" b="0" i="0" dirty="0" smtClean="0">
+                <a:solidFill>
+                  <a:srgbClr val="1E293B"/>
+                </a:solidFill>
+              </a:rPr>
+              <a:t>é</a:t>
+            </a:r>
+            <a:r>
+              <a:rPr sz="1400" b="0" i="0" dirty="0" err="1" smtClean="0">
+                <a:solidFill>
+                  <a:srgbClr val="1E293B"/>
+                </a:solidFill>
+              </a:rPr>
+              <a:t>utica</a:t>
+            </a:r>
+            <a:endParaRPr sz="1400" b="0" i="0" dirty="0">
+              <a:solidFill>
+                <a:srgbClr val="1E293B"/>
+              </a:solidFill>
+            </a:endParaRPr>
           </a:p>
         </p:txBody>
       </p:sp>
@@ -9085,6 +10596,7 @@
           <a:lstStyle/>
           <a:p>
             <a:pPr algn="ctr"/>
+            <a:endParaRPr/>
           </a:p>
         </p:txBody>
       </p:sp>
@@ -9131,7 +10643,7 @@
         <p:spPr>
           <a:xfrm>
             <a:off x="2103120" y="2432304"/>
-            <a:ext cx="9418320" cy="365760"/>
+            <a:ext cx="9418320" cy="307777"/>
           </a:xfrm>
           <a:prstGeom prst="rect">
             <a:avLst/>
@@ -9146,13 +10658,122 @@
           <a:p>
             <a:pPr algn="l"/>
             <a:r>
-              <a:rPr sz="1400" b="0" i="0">
-                <a:solidFill>
-                  <a:srgbClr val="1E293B"/>
-                </a:solidFill>
-              </a:rPr>
-              <a:t>grupos de equivalencia terapeutica — DeepSeek + reglas manuales</a:t>
-            </a:r>
+              <a:rPr sz="1400" b="0" i="0" dirty="0" err="1">
+                <a:solidFill>
+                  <a:srgbClr val="1E293B"/>
+                </a:solidFill>
+              </a:rPr>
+              <a:t>grupos</a:t>
+            </a:r>
+            <a:r>
+              <a:rPr sz="1400" b="0" i="0" dirty="0">
+                <a:solidFill>
+                  <a:srgbClr val="1E293B"/>
+                </a:solidFill>
+              </a:rPr>
+              <a:t> de </a:t>
+            </a:r>
+            <a:r>
+              <a:rPr sz="1400" b="0" i="0" dirty="0" err="1">
+                <a:solidFill>
+                  <a:srgbClr val="1E293B"/>
+                </a:solidFill>
+              </a:rPr>
+              <a:t>equivalencia</a:t>
+            </a:r>
+            <a:r>
+              <a:rPr sz="1400" b="0" i="0" dirty="0">
+                <a:solidFill>
+                  <a:srgbClr val="1E293B"/>
+                </a:solidFill>
+              </a:rPr>
+              <a:t> </a:t>
+            </a:r>
+            <a:r>
+              <a:rPr sz="1400" b="0" i="0" dirty="0" err="1" smtClean="0">
+                <a:solidFill>
+                  <a:srgbClr val="1E293B"/>
+                </a:solidFill>
+              </a:rPr>
+              <a:t>terap</a:t>
+            </a:r>
+            <a:r>
+              <a:rPr lang="es-419" sz="1400" b="0" i="0" dirty="0" smtClean="0">
+                <a:solidFill>
+                  <a:srgbClr val="1E293B"/>
+                </a:solidFill>
+              </a:rPr>
+              <a:t>é</a:t>
+            </a:r>
+            <a:r>
+              <a:rPr sz="1400" b="0" i="0" dirty="0" err="1" smtClean="0">
+                <a:solidFill>
+                  <a:srgbClr val="1E293B"/>
+                </a:solidFill>
+              </a:rPr>
+              <a:t>utica</a:t>
+            </a:r>
+            <a:r>
+              <a:rPr sz="1400" b="0" i="0" dirty="0" smtClean="0">
+                <a:solidFill>
+                  <a:srgbClr val="1E293B"/>
+                </a:solidFill>
+              </a:rPr>
+              <a:t> </a:t>
+            </a:r>
+            <a:r>
+              <a:rPr sz="1400" b="0" i="0" dirty="0">
+                <a:solidFill>
+                  <a:srgbClr val="1E293B"/>
+                </a:solidFill>
+              </a:rPr>
+              <a:t>— </a:t>
+            </a:r>
+            <a:r>
+              <a:rPr sz="1400" b="0" i="0" dirty="0" err="1">
+                <a:solidFill>
+                  <a:srgbClr val="1E293B"/>
+                </a:solidFill>
+              </a:rPr>
+              <a:t>DeepSeek</a:t>
+            </a:r>
+            <a:r>
+              <a:rPr sz="1400" b="0" i="0" dirty="0">
+                <a:solidFill>
+                  <a:srgbClr val="1E293B"/>
+                </a:solidFill>
+              </a:rPr>
+              <a:t> + </a:t>
+            </a:r>
+            <a:r>
+              <a:rPr sz="1400" b="0" i="0" dirty="0" err="1">
+                <a:solidFill>
+                  <a:srgbClr val="1E293B"/>
+                </a:solidFill>
+              </a:rPr>
+              <a:t>reglas</a:t>
+            </a:r>
+            <a:r>
+              <a:rPr sz="1400" b="0" i="0" dirty="0">
+                <a:solidFill>
+                  <a:srgbClr val="1E293B"/>
+                </a:solidFill>
+              </a:rPr>
+              <a:t> </a:t>
+            </a:r>
+            <a:r>
+              <a:rPr sz="1400" b="0" i="0" dirty="0" err="1">
+                <a:solidFill>
+                  <a:srgbClr val="1E293B"/>
+                </a:solidFill>
+              </a:rPr>
+              <a:t>manuales</a:t>
+            </a:r>
+            <a:endParaRPr sz="1400" b="0" i="0" dirty="0">
+              <a:solidFill>
+                <a:srgbClr val="1E293B"/>
+              </a:solidFill>
+            </a:endParaRPr>
           </a:p>
         </p:txBody>
       </p:sp>
@@ -9198,6 +10819,7 @@
           <a:lstStyle/>
           <a:p>
             <a:pPr algn="ctr"/>
+            <a:endParaRPr/>
           </a:p>
         </p:txBody>
       </p:sp>
@@ -9244,7 +10866,7 @@
         <p:spPr>
           <a:xfrm>
             <a:off x="2103120" y="3044952"/>
-            <a:ext cx="9418320" cy="365760"/>
+            <a:ext cx="9418320" cy="307777"/>
           </a:xfrm>
           <a:prstGeom prst="rect">
             <a:avLst/>
@@ -9259,13 +10881,146 @@
           <a:p>
             <a:pPr algn="l"/>
             <a:r>
-              <a:rPr sz="1400" b="0" i="0">
-                <a:solidFill>
-                  <a:srgbClr val="1E293B"/>
-                </a:solidFill>
-              </a:rPr>
-              <a:t>rondas de auditoria INN: radiofarmacos, vacunas, biologicos, hemoderivados</a:t>
-            </a:r>
+              <a:rPr sz="1400" b="0" i="0" dirty="0" err="1">
+                <a:solidFill>
+                  <a:srgbClr val="1E293B"/>
+                </a:solidFill>
+              </a:rPr>
+              <a:t>rondas</a:t>
+            </a:r>
+            <a:r>
+              <a:rPr sz="1400" b="0" i="0" dirty="0">
+                <a:solidFill>
+                  <a:srgbClr val="1E293B"/>
+                </a:solidFill>
+              </a:rPr>
+              <a:t> de </a:t>
+            </a:r>
+            <a:r>
+              <a:rPr sz="1400" b="0" i="0" dirty="0" smtClean="0">
+                <a:solidFill>
+                  <a:srgbClr val="1E293B"/>
+                </a:solidFill>
+              </a:rPr>
+              <a:t>auditor</a:t>
+            </a:r>
+            <a:r>
+              <a:rPr lang="es-419" sz="1400" b="0" i="0" dirty="0" smtClean="0">
+                <a:solidFill>
+                  <a:srgbClr val="1E293B"/>
+                </a:solidFill>
+              </a:rPr>
+              <a:t>í</a:t>
+            </a:r>
+            <a:r>
+              <a:rPr sz="1400" b="0" i="0" dirty="0" smtClean="0">
+                <a:solidFill>
+                  <a:srgbClr val="1E293B"/>
+                </a:solidFill>
+              </a:rPr>
+              <a:t>a </a:t>
+            </a:r>
+            <a:r>
+              <a:rPr sz="1400" b="0" i="0" dirty="0">
+                <a:solidFill>
+                  <a:srgbClr val="1E293B"/>
+                </a:solidFill>
+              </a:rPr>
+              <a:t>INN: </a:t>
+            </a:r>
+            <a:r>
+              <a:rPr sz="1400" b="0" i="0" dirty="0" err="1" smtClean="0">
+                <a:solidFill>
+                  <a:srgbClr val="1E293B"/>
+                </a:solidFill>
+              </a:rPr>
+              <a:t>radiof</a:t>
+            </a:r>
+            <a:r>
+              <a:rPr lang="es-419" sz="1400" b="0" i="0" dirty="0" smtClean="0">
+                <a:solidFill>
+                  <a:srgbClr val="1E293B"/>
+                </a:solidFill>
+              </a:rPr>
+              <a:t>á</a:t>
+            </a:r>
+            <a:r>
+              <a:rPr sz="1400" b="0" i="0" dirty="0" err="1" smtClean="0">
+                <a:solidFill>
+                  <a:srgbClr val="1E293B"/>
+                </a:solidFill>
+              </a:rPr>
+              <a:t>rmacos</a:t>
+            </a:r>
+            <a:r>
+              <a:rPr sz="1400" b="0" i="0" dirty="0">
+                <a:solidFill>
+                  <a:srgbClr val="1E293B"/>
+                </a:solidFill>
+              </a:rPr>
+              <a:t>, </a:t>
+            </a:r>
+            <a:r>
+              <a:rPr sz="1400" b="0" i="0" dirty="0" err="1">
+                <a:solidFill>
+                  <a:srgbClr val="1E293B"/>
+                </a:solidFill>
+              </a:rPr>
+              <a:t>vacunas</a:t>
+            </a:r>
+            <a:r>
+              <a:rPr sz="1400" b="0" i="0" dirty="0">
+                <a:solidFill>
+                  <a:srgbClr val="1E293B"/>
+                </a:solidFill>
+              </a:rPr>
+              <a:t>, </a:t>
+            </a:r>
+            <a:r>
+              <a:rPr sz="1400" b="0" i="0" dirty="0" err="1" smtClean="0">
+                <a:solidFill>
+                  <a:srgbClr val="1E293B"/>
+                </a:solidFill>
+              </a:rPr>
+              <a:t>biol</a:t>
+            </a:r>
+            <a:r>
+              <a:rPr lang="es-419" sz="1400" b="0" i="0" dirty="0" err="1" smtClean="0">
+                <a:solidFill>
+                  <a:srgbClr val="1E293B"/>
+                </a:solidFill>
+              </a:rPr>
+              <a:t>ó</a:t>
+            </a:r>
+            <a:r>
+              <a:rPr sz="1400" b="0" i="0" dirty="0" err="1" smtClean="0">
+                <a:solidFill>
+                  <a:srgbClr val="1E293B"/>
+                </a:solidFill>
+              </a:rPr>
+              <a:t>gicos</a:t>
+            </a:r>
+            <a:r>
+              <a:rPr sz="1400" b="0" i="0" dirty="0">
+                <a:solidFill>
+                  <a:srgbClr val="1E293B"/>
+                </a:solidFill>
+              </a:rPr>
+              <a:t>, </a:t>
+            </a:r>
+            <a:r>
+              <a:rPr sz="1400" b="0" i="0" dirty="0" err="1">
+                <a:solidFill>
+                  <a:srgbClr val="1E293B"/>
+                </a:solidFill>
+              </a:rPr>
+              <a:t>hemoderivados</a:t>
+            </a:r>
+            <a:endParaRPr sz="1400" b="0" i="0" dirty="0">
+              <a:solidFill>
+                <a:srgbClr val="1E293B"/>
+              </a:solidFill>
+            </a:endParaRPr>
           </a:p>
         </p:txBody>
       </p:sp>
@@ -9311,6 +11066,7 @@
           <a:lstStyle/>
           <a:p>
             <a:pPr algn="ctr"/>
+            <a:endParaRPr/>
           </a:p>
         </p:txBody>
       </p:sp>
@@ -9424,6 +11180,7 @@
           <a:lstStyle/>
           <a:p>
             <a:pPr algn="ctr"/>
+            <a:endParaRPr/>
           </a:p>
         </p:txBody>
       </p:sp>
@@ -9470,7 +11227,7 @@
         <p:spPr>
           <a:xfrm>
             <a:off x="2103120" y="4270248"/>
-            <a:ext cx="9418320" cy="365760"/>
+            <a:ext cx="9418320" cy="307777"/>
           </a:xfrm>
           <a:prstGeom prst="rect">
             <a:avLst/>
@@ -9485,13 +11242,90 @@
           <a:p>
             <a:pPr algn="l"/>
             <a:r>
-              <a:rPr sz="1400" b="0" i="0">
-                <a:solidFill>
-                  <a:srgbClr val="1E293B"/>
-                </a:solidFill>
-              </a:rPr>
-              <a:t>duplicados · 0 NULL concentracion · 0 mismatches DCI tras auditoria completa</a:t>
-            </a:r>
+              <a:rPr sz="1400" b="0" i="0" dirty="0" err="1">
+                <a:solidFill>
+                  <a:srgbClr val="1E293B"/>
+                </a:solidFill>
+              </a:rPr>
+              <a:t>duplicados</a:t>
+            </a:r>
+            <a:r>
+              <a:rPr sz="1400" b="0" i="0" dirty="0">
+                <a:solidFill>
+                  <a:srgbClr val="1E293B"/>
+                </a:solidFill>
+              </a:rPr>
+              <a:t> · 0 NULL </a:t>
+            </a:r>
+            <a:r>
+              <a:rPr sz="1400" b="0" i="0" dirty="0" err="1">
+                <a:solidFill>
+                  <a:srgbClr val="1E293B"/>
+                </a:solidFill>
+              </a:rPr>
+              <a:t>concentracion</a:t>
+            </a:r>
+            <a:r>
+              <a:rPr sz="1400" b="0" i="0" dirty="0">
+                <a:solidFill>
+                  <a:srgbClr val="1E293B"/>
+                </a:solidFill>
+              </a:rPr>
+              <a:t> · 0 mismatches DCI </a:t>
+            </a:r>
+            <a:r>
+              <a:rPr sz="1400" b="0" i="0" dirty="0" err="1">
+                <a:solidFill>
+                  <a:srgbClr val="1E293B"/>
+                </a:solidFill>
+              </a:rPr>
+              <a:t>tras</a:t>
+            </a:r>
+            <a:r>
+              <a:rPr sz="1400" b="0" i="0" dirty="0">
+                <a:solidFill>
+                  <a:srgbClr val="1E293B"/>
+                </a:solidFill>
+              </a:rPr>
+              <a:t> </a:t>
+            </a:r>
+            <a:r>
+              <a:rPr sz="1400" b="0" i="0" dirty="0" smtClean="0">
+                <a:solidFill>
+                  <a:srgbClr val="1E293B"/>
+                </a:solidFill>
+              </a:rPr>
+              <a:t>auditor</a:t>
+            </a:r>
+            <a:r>
+              <a:rPr lang="es-419" sz="1400" b="0" i="0" dirty="0" smtClean="0">
+                <a:solidFill>
+                  <a:srgbClr val="1E293B"/>
+                </a:solidFill>
+              </a:rPr>
+              <a:t>í</a:t>
+            </a:r>
+            <a:r>
+              <a:rPr sz="1400" b="0" i="0" dirty="0" smtClean="0">
+                <a:solidFill>
+                  <a:srgbClr val="1E293B"/>
+                </a:solidFill>
+              </a:rPr>
+              <a:t>a </a:t>
+            </a:r>
+            <a:r>
+              <a:rPr sz="1400" b="0" i="0" dirty="0" err="1">
+                <a:solidFill>
+                  <a:srgbClr val="1E293B"/>
+                </a:solidFill>
+              </a:rPr>
+              <a:t>completa</a:t>
+            </a:r>
+            <a:endParaRPr sz="1400" b="0" i="0" dirty="0">
+              <a:solidFill>
+                <a:srgbClr val="1E293B"/>
+              </a:solidFill>
+            </a:endParaRPr>
           </a:p>
         </p:txBody>
       </p:sp>
@@ -9537,6 +11371,7 @@
           <a:lstStyle/>
           <a:p>
             <a:pPr algn="ctr"/>
+            <a:endParaRPr/>
           </a:p>
         </p:txBody>
       </p:sp>
@@ -9580,6 +11415,7 @@
           <a:lstStyle/>
           <a:p>
             <a:pPr algn="ctr"/>
+            <a:endParaRPr/>
           </a:p>
         </p:txBody>
       </p:sp>
@@ -9693,6 +11529,7 @@
           <a:lstStyle/>
           <a:p>
             <a:pPr algn="ctr"/>
+            <a:endParaRPr/>
           </a:p>
         </p:txBody>
       </p:sp>
@@ -9736,6 +11573,7 @@
           <a:lstStyle/>
           <a:p>
             <a:pPr algn="ctr"/>
+            <a:endParaRPr/>
           </a:p>
         </p:txBody>
       </p:sp>
@@ -9782,7 +11620,7 @@
         <p:spPr>
           <a:xfrm>
             <a:off x="3429000" y="5669280"/>
-            <a:ext cx="2514600" cy="411480"/>
+            <a:ext cx="2514600" cy="261610"/>
           </a:xfrm>
           <a:prstGeom prst="rect">
             <a:avLst/>
@@ -9797,13 +11635,50 @@
           <a:p>
             <a:pPr algn="ctr"/>
             <a:r>
-              <a:rPr sz="1100" b="1" i="0">
-                <a:solidFill>
-                  <a:srgbClr val="1E293B"/>
-                </a:solidFill>
-              </a:rPr>
-              <a:t>Rondas auditoria</a:t>
-            </a:r>
+              <a:rPr sz="1100" b="1" i="0" dirty="0" err="1">
+                <a:solidFill>
+                  <a:srgbClr val="1E293B"/>
+                </a:solidFill>
+              </a:rPr>
+              <a:t>Rondas</a:t>
+            </a:r>
+            <a:r>
+              <a:rPr sz="1100" b="1" i="0" dirty="0">
+                <a:solidFill>
+                  <a:srgbClr val="1E293B"/>
+                </a:solidFill>
+              </a:rPr>
+              <a:t> </a:t>
+            </a:r>
+            <a:r>
+              <a:rPr sz="1100" b="1" i="0" dirty="0" smtClean="0">
+                <a:solidFill>
+                  <a:srgbClr val="1E293B"/>
+                </a:solidFill>
+              </a:rPr>
+              <a:t>auditor</a:t>
+            </a:r>
+            <a:r>
+              <a:rPr lang="es-419" sz="1100" b="1" i="0" dirty="0" smtClean="0">
+                <a:solidFill>
+                  <a:srgbClr val="1E293B"/>
+                </a:solidFill>
+              </a:rPr>
+              <a:t>í</a:t>
+            </a:r>
+            <a:r>
+              <a:rPr sz="1100" b="1" i="0" dirty="0" smtClean="0">
+                <a:solidFill>
+                  <a:srgbClr val="1E293B"/>
+                </a:solidFill>
+              </a:rPr>
+              <a:t>a</a:t>
+            </a:r>
+            <a:endParaRPr sz="1100" b="1" i="0" dirty="0">
+              <a:solidFill>
+                <a:srgbClr val="1E293B"/>
+              </a:solidFill>
+            </a:endParaRPr>
           </a:p>
         </p:txBody>
       </p:sp>
@@ -9849,6 +11724,7 @@
           <a:lstStyle/>
           <a:p>
             <a:pPr algn="ctr"/>
+            <a:endParaRPr/>
           </a:p>
         </p:txBody>
       </p:sp>
@@ -9892,6 +11768,7 @@
           <a:lstStyle/>
           <a:p>
             <a:pPr algn="ctr"/>
+            <a:endParaRPr/>
           </a:p>
         </p:txBody>
       </p:sp>
@@ -10005,6 +11882,7 @@
           <a:lstStyle/>
           <a:p>
             <a:pPr algn="ctr"/>
+            <a:endParaRPr/>
           </a:p>
         </p:txBody>
       </p:sp>
@@ -10048,6 +11926,7 @@
           <a:lstStyle/>
           <a:p>
             <a:pPr algn="ctr"/>
+            <a:endParaRPr/>
           </a:p>
         </p:txBody>
       </p:sp>
@@ -10162,7 +12041,7 @@
 </file>
 
 <file path=ppt/slides/slide6.xml><?xml version="1.0" encoding="utf-8"?>
-<p:sld xmlns:a="http://schemas.openxmlformats.org/drawingml/2006/main" xmlns:p="http://schemas.openxmlformats.org/presentationml/2006/main" xmlns:r="http://schemas.openxmlformats.org/officeDocument/2006/relationships">
+<p:sld xmlns:a="http://schemas.openxmlformats.org/drawingml/2006/main" xmlns:r="http://schemas.openxmlformats.org/officeDocument/2006/relationships" xmlns:p="http://schemas.openxmlformats.org/presentationml/2006/main">
   <p:cSld>
     <p:bg>
       <p:bgPr>
@@ -10178,7 +12057,14 @@
         <p:cNvGrpSpPr/>
         <p:nvPr/>
       </p:nvGrpSpPr>
-      <p:grpSpPr/>
+      <p:grpSpPr>
+        <a:xfrm>
+          <a:off x="0" y="0"/>
+          <a:ext cx="0" cy="0"/>
+          <a:chOff x="0" y="0"/>
+          <a:chExt cx="0" cy="0"/>
+        </a:xfrm>
+      </p:grpSpPr>
       <p:sp>
         <p:nvSpPr>
           <p:cNvPr id="2" name="Rectangle 1"/>
@@ -10219,6 +12105,7 @@
           <a:lstStyle/>
           <a:p>
             <a:pPr algn="ctr"/>
+            <a:endParaRPr/>
           </a:p>
         </p:txBody>
       </p:sp>
@@ -10262,6 +12149,7 @@
           <a:lstStyle/>
           <a:p>
             <a:pPr algn="ctr"/>
+            <a:endParaRPr/>
           </a:p>
         </p:txBody>
       </p:sp>
@@ -10274,7 +12162,7 @@
         <p:spPr>
           <a:xfrm>
             <a:off x="502920" y="164592"/>
-            <a:ext cx="10789920" cy="777240"/>
+            <a:ext cx="10789920" cy="507831"/>
           </a:xfrm>
           <a:prstGeom prst="rect">
             <a:avLst/>
@@ -10289,13 +12177,98 @@
           <a:p>
             <a:pPr algn="l"/>
             <a:r>
-              <a:rPr sz="2700" b="1" i="0">
+              <a:rPr sz="2700" b="1" i="0" dirty="0" err="1">
                 <a:solidFill>
                   <a:srgbClr val="0D2B55"/>
                 </a:solidFill>
               </a:rPr>
-              <a:t>Modelo Predictivo: Integridad Estadistica Rigurosa</a:t>
-            </a:r>
+              <a:t>Modelo</a:t>
+            </a:r>
+            <a:r>
+              <a:rPr sz="2700" b="1" i="0" dirty="0">
+                <a:solidFill>
+                  <a:srgbClr val="0D2B55"/>
+                </a:solidFill>
+              </a:rPr>
+              <a:t> </a:t>
+            </a:r>
+            <a:r>
+              <a:rPr sz="2700" b="1" i="0" dirty="0" err="1">
+                <a:solidFill>
+                  <a:srgbClr val="0D2B55"/>
+                </a:solidFill>
+              </a:rPr>
+              <a:t>Predictivo</a:t>
+            </a:r>
+            <a:r>
+              <a:rPr sz="2700" b="1" i="0" dirty="0">
+                <a:solidFill>
+                  <a:srgbClr val="0D2B55"/>
+                </a:solidFill>
+              </a:rPr>
+              <a:t>: </a:t>
+            </a:r>
+            <a:r>
+              <a:rPr sz="2700" b="1" i="0" dirty="0" err="1">
+                <a:solidFill>
+                  <a:srgbClr val="0D2B55"/>
+                </a:solidFill>
+              </a:rPr>
+              <a:t>Integridad</a:t>
+            </a:r>
+            <a:r>
+              <a:rPr sz="2700" b="1" i="0" dirty="0">
+                <a:solidFill>
+                  <a:srgbClr val="0D2B55"/>
+                </a:solidFill>
+              </a:rPr>
+              <a:t> </a:t>
+            </a:r>
+            <a:r>
+              <a:rPr sz="2700" b="1" i="0" dirty="0" err="1" smtClean="0">
+                <a:solidFill>
+                  <a:srgbClr val="0D2B55"/>
+                </a:solidFill>
+              </a:rPr>
+              <a:t>Estad</a:t>
+            </a:r>
+            <a:r>
+              <a:rPr lang="es-419" sz="2700" b="1" i="0" dirty="0" smtClean="0">
+                <a:solidFill>
+                  <a:srgbClr val="0D2B55"/>
+                </a:solidFill>
+              </a:rPr>
+              <a:t>í</a:t>
+            </a:r>
+            <a:r>
+              <a:rPr sz="2700" b="1" i="0" dirty="0" err="1" smtClean="0">
+                <a:solidFill>
+                  <a:srgbClr val="0D2B55"/>
+                </a:solidFill>
+              </a:rPr>
+              <a:t>stica</a:t>
+            </a:r>
+            <a:r>
+              <a:rPr sz="2700" b="1" i="0" dirty="0" smtClean="0">
+                <a:solidFill>
+                  <a:srgbClr val="0D2B55"/>
+                </a:solidFill>
+              </a:rPr>
+              <a:t> </a:t>
+            </a:r>
+            <a:r>
+              <a:rPr sz="2700" b="1" i="0" dirty="0" err="1">
+                <a:solidFill>
+                  <a:srgbClr val="0D2B55"/>
+                </a:solidFill>
+              </a:rPr>
+              <a:t>Rigurosa</a:t>
+            </a:r>
+            <a:endParaRPr sz="2700" b="1" i="0" dirty="0">
+              <a:solidFill>
+                <a:srgbClr val="0D2B55"/>
+              </a:solidFill>
+            </a:endParaRPr>
           </a:p>
         </p:txBody>
       </p:sp>
@@ -10339,6 +12312,7 @@
           <a:lstStyle/>
           <a:p>
             <a:pPr algn="ctr"/>
+            <a:endParaRPr/>
           </a:p>
         </p:txBody>
       </p:sp>
@@ -10418,6 +12392,7 @@
           <a:lstStyle/>
           <a:p>
             <a:pPr algn="ctr"/>
+            <a:endParaRPr/>
           </a:p>
         </p:txBody>
       </p:sp>
@@ -10461,6 +12436,7 @@
           <a:lstStyle/>
           <a:p>
             <a:pPr algn="ctr"/>
+            <a:endParaRPr/>
           </a:p>
         </p:txBody>
       </p:sp>
@@ -10608,6 +12584,7 @@
           <a:lstStyle/>
           <a:p>
             <a:pPr algn="ctr"/>
+            <a:endParaRPr/>
           </a:p>
         </p:txBody>
       </p:sp>
@@ -10651,6 +12628,7 @@
           <a:lstStyle/>
           <a:p>
             <a:pPr algn="ctr"/>
+            <a:endParaRPr/>
           </a:p>
         </p:txBody>
       </p:sp>
@@ -10697,7 +12675,7 @@
         <p:spPr>
           <a:xfrm>
             <a:off x="3474720" y="1828800"/>
-            <a:ext cx="2560320" cy="411480"/>
+            <a:ext cx="2560320" cy="261610"/>
           </a:xfrm>
           <a:prstGeom prst="rect">
             <a:avLst/>
@@ -10712,13 +12690,50 @@
           <a:p>
             <a:pPr algn="ctr"/>
             <a:r>
-              <a:rPr sz="1100" b="1" i="0">
-                <a:solidFill>
-                  <a:srgbClr val="1E293B"/>
-                </a:solidFill>
-              </a:rPr>
-              <a:t>Avg Precision</a:t>
-            </a:r>
+              <a:rPr sz="1100" b="1" i="0" dirty="0" err="1">
+                <a:solidFill>
+                  <a:srgbClr val="1E293B"/>
+                </a:solidFill>
+              </a:rPr>
+              <a:t>Avg</a:t>
+            </a:r>
+            <a:r>
+              <a:rPr sz="1100" b="1" i="0" dirty="0">
+                <a:solidFill>
+                  <a:srgbClr val="1E293B"/>
+                </a:solidFill>
+              </a:rPr>
+              <a:t> </a:t>
+            </a:r>
+            <a:r>
+              <a:rPr sz="1100" b="1" i="0" dirty="0" err="1" smtClean="0">
+                <a:solidFill>
+                  <a:srgbClr val="1E293B"/>
+                </a:solidFill>
+              </a:rPr>
+              <a:t>Precisi</a:t>
+            </a:r>
+            <a:r>
+              <a:rPr lang="es-419" sz="1100" b="1" dirty="0" err="1">
+                <a:solidFill>
+                  <a:srgbClr val="1E293B"/>
+                </a:solidFill>
+              </a:rPr>
+              <a:t>ó</a:t>
+            </a:r>
+            <a:r>
+              <a:rPr sz="1100" b="1" i="0" dirty="0" smtClean="0">
+                <a:solidFill>
+                  <a:srgbClr val="1E293B"/>
+                </a:solidFill>
+              </a:rPr>
+              <a:t>n</a:t>
+            </a:r>
+            <a:endParaRPr sz="1100" b="1" i="0" dirty="0">
+              <a:solidFill>
+                <a:srgbClr val="1E293B"/>
+              </a:solidFill>
+            </a:endParaRPr>
           </a:p>
         </p:txBody>
       </p:sp>
@@ -10798,6 +12813,7 @@
           <a:lstStyle/>
           <a:p>
             <a:pPr algn="ctr"/>
+            <a:endParaRPr/>
           </a:p>
         </p:txBody>
       </p:sp>
@@ -10841,6 +12857,7 @@
           <a:lstStyle/>
           <a:p>
             <a:pPr algn="ctr"/>
+            <a:endParaRPr/>
           </a:p>
         </p:txBody>
       </p:sp>
@@ -10988,6 +13005,7 @@
           <a:lstStyle/>
           <a:p>
             <a:pPr algn="ctr"/>
+            <a:endParaRPr/>
           </a:p>
         </p:txBody>
       </p:sp>
@@ -11031,6 +13049,7 @@
           <a:lstStyle/>
           <a:p>
             <a:pPr algn="ctr"/>
+            <a:endParaRPr/>
           </a:p>
         </p:txBody>
       </p:sp>
@@ -11178,6 +13197,7 @@
           <a:lstStyle/>
           <a:p>
             <a:pPr algn="ctr"/>
+            <a:endParaRPr/>
           </a:p>
         </p:txBody>
       </p:sp>
@@ -11221,6 +13241,7 @@
           <a:lstStyle/>
           <a:p>
             <a:pPr algn="ctr"/>
+            <a:endParaRPr/>
           </a:p>
         </p:txBody>
       </p:sp>
@@ -11403,7 +13424,7 @@
         <p:spPr>
           <a:xfrm>
             <a:off x="685800" y="5559552"/>
-            <a:ext cx="4937760" cy="475488"/>
+            <a:ext cx="4937760" cy="276999"/>
           </a:xfrm>
           <a:prstGeom prst="rect">
             <a:avLst/>
@@ -11418,13 +13439,138 @@
           <a:p>
             <a:pPr algn="l"/>
             <a:r>
-              <a:rPr sz="1200" b="0" i="0">
-                <a:solidFill>
-                  <a:srgbClr val="1E293B"/>
-                </a:solidFill>
-              </a:rPr>
-              <a:t>▸  Modelo produccion: reentrenado en todos los datos</a:t>
-            </a:r>
+              <a:rPr sz="1200" b="0" i="0" dirty="0">
+                <a:solidFill>
+                  <a:srgbClr val="1E293B"/>
+                </a:solidFill>
+              </a:rPr>
+              <a:t>▸  </a:t>
+            </a:r>
+            <a:r>
+              <a:rPr sz="1200" b="0" i="0" dirty="0" err="1">
+                <a:solidFill>
+                  <a:srgbClr val="1E293B"/>
+                </a:solidFill>
+              </a:rPr>
+              <a:t>Modelo</a:t>
+            </a:r>
+            <a:r>
+              <a:rPr sz="1200" b="0" i="0" dirty="0">
+                <a:solidFill>
+                  <a:srgbClr val="1E293B"/>
+                </a:solidFill>
+              </a:rPr>
+              <a:t> </a:t>
+            </a:r>
+            <a:r>
+              <a:rPr sz="1200" b="0" i="0" dirty="0" err="1" smtClean="0">
+                <a:solidFill>
+                  <a:srgbClr val="1E293B"/>
+                </a:solidFill>
+              </a:rPr>
+              <a:t>producci</a:t>
+            </a:r>
+            <a:r>
+              <a:rPr lang="es-419" sz="1200" b="0" i="0" dirty="0" err="1" smtClean="0">
+                <a:solidFill>
+                  <a:srgbClr val="1E293B"/>
+                </a:solidFill>
+              </a:rPr>
+              <a:t>ó</a:t>
+            </a:r>
+            <a:r>
+              <a:rPr sz="1200" b="0" i="0" dirty="0" smtClean="0">
+                <a:solidFill>
+                  <a:srgbClr val="1E293B"/>
+                </a:solidFill>
+              </a:rPr>
+              <a:t>n</a:t>
+            </a:r>
+            <a:r>
+              <a:rPr sz="1200" b="0" i="0" dirty="0">
+                <a:solidFill>
+                  <a:srgbClr val="1E293B"/>
+                </a:solidFill>
+              </a:rPr>
+              <a:t>: </a:t>
+            </a:r>
+            <a:r>
+              <a:rPr sz="1200" b="0" i="0" dirty="0" err="1">
+                <a:solidFill>
+                  <a:srgbClr val="1E293B"/>
+                </a:solidFill>
+              </a:rPr>
+              <a:t>reentrenado</a:t>
+            </a:r>
+            <a:r>
+              <a:rPr sz="1200" b="0" i="0" dirty="0">
+                <a:solidFill>
+                  <a:srgbClr val="1E293B"/>
+                </a:solidFill>
+              </a:rPr>
+              <a:t> </a:t>
+            </a:r>
+            <a:r>
+              <a:rPr sz="1200" b="0" i="0" dirty="0" err="1">
+                <a:solidFill>
+                  <a:srgbClr val="1E293B"/>
+                </a:solidFill>
+              </a:rPr>
+              <a:t>en</a:t>
+            </a:r>
+            <a:r>
+              <a:rPr sz="1200" b="0" i="0" dirty="0">
+                <a:solidFill>
+                  <a:srgbClr val="1E293B"/>
+                </a:solidFill>
+              </a:rPr>
+              <a:t> </a:t>
+            </a:r>
+            <a:r>
+              <a:rPr sz="1200" b="0" i="0" dirty="0" err="1">
+                <a:solidFill>
+                  <a:srgbClr val="1E293B"/>
+                </a:solidFill>
+              </a:rPr>
+              <a:t>todos</a:t>
+            </a:r>
+            <a:r>
+              <a:rPr sz="1200" b="0" i="0" dirty="0">
+                <a:solidFill>
+                  <a:srgbClr val="1E293B"/>
+                </a:solidFill>
+              </a:rPr>
+              <a:t> </a:t>
+            </a:r>
+            <a:r>
+              <a:rPr sz="1200" b="0" i="0" dirty="0" err="1">
+                <a:solidFill>
+                  <a:srgbClr val="1E293B"/>
+                </a:solidFill>
+              </a:rPr>
+              <a:t>los</a:t>
+            </a:r>
+            <a:r>
+              <a:rPr sz="1200" b="0" i="0" dirty="0">
+                <a:solidFill>
+                  <a:srgbClr val="1E293B"/>
+                </a:solidFill>
+              </a:rPr>
+              <a:t> </a:t>
+            </a:r>
+            <a:r>
+              <a:rPr sz="1200" b="0" i="0" dirty="0" err="1">
+                <a:solidFill>
+                  <a:srgbClr val="1E293B"/>
+                </a:solidFill>
+              </a:rPr>
+              <a:t>datos</a:t>
+            </a:r>
+            <a:endParaRPr sz="1200" b="0" i="0" dirty="0">
+              <a:solidFill>
+                <a:srgbClr val="1E293B"/>
+              </a:solidFill>
+            </a:endParaRPr>
           </a:p>
         </p:txBody>
       </p:sp>
@@ -11470,6 +13616,7 @@
           <a:lstStyle/>
           <a:p>
             <a:pPr algn="ctr"/>
+            <a:endParaRPr/>
           </a:p>
         </p:txBody>
       </p:sp>
@@ -11513,6 +13660,7 @@
           <a:lstStyle/>
           <a:p>
             <a:pPr algn="ctr"/>
+            <a:endParaRPr/>
           </a:p>
         </p:txBody>
       </p:sp>
@@ -11590,6 +13738,7 @@
           <a:lstStyle/>
           <a:p>
             <a:pPr algn="ctr"/>
+            <a:endParaRPr/>
           </a:p>
         </p:txBody>
       </p:sp>
@@ -11701,6 +13850,7 @@
           <a:lstStyle/>
           <a:p>
             <a:pPr algn="ctr"/>
+            <a:endParaRPr/>
           </a:p>
         </p:txBody>
       </p:sp>
@@ -11812,6 +13962,7 @@
           <a:lstStyle/>
           <a:p>
             <a:pPr algn="ctr"/>
+            <a:endParaRPr/>
           </a:p>
         </p:txBody>
       </p:sp>
@@ -11923,6 +14074,7 @@
           <a:lstStyle/>
           <a:p>
             <a:pPr algn="ctr"/>
+            <a:endParaRPr/>
           </a:p>
         </p:txBody>
       </p:sp>
@@ -12034,6 +14186,7 @@
           <a:lstStyle/>
           <a:p>
             <a:pPr algn="ctr"/>
+            <a:endParaRPr/>
           </a:p>
         </p:txBody>
       </p:sp>
@@ -12182,7 +14335,7 @@
 </file>
 
 <file path=ppt/slides/slide7.xml><?xml version="1.0" encoding="utf-8"?>
-<p:sld xmlns:a="http://schemas.openxmlformats.org/drawingml/2006/main" xmlns:p="http://schemas.openxmlformats.org/presentationml/2006/main" xmlns:r="http://schemas.openxmlformats.org/officeDocument/2006/relationships">
+<p:sld xmlns:a="http://schemas.openxmlformats.org/drawingml/2006/main" xmlns:r="http://schemas.openxmlformats.org/officeDocument/2006/relationships" xmlns:p="http://schemas.openxmlformats.org/presentationml/2006/main">
   <p:cSld>
     <p:bg>
       <p:bgPr>
@@ -12198,7 +14351,14 @@
         <p:cNvGrpSpPr/>
         <p:nvPr/>
       </p:nvGrpSpPr>
-      <p:grpSpPr/>
+      <p:grpSpPr>
+        <a:xfrm>
+          <a:off x="0" y="0"/>
+          <a:ext cx="0" cy="0"/>
+          <a:chOff x="0" y="0"/>
+          <a:chExt cx="0" cy="0"/>
+        </a:xfrm>
+      </p:grpSpPr>
       <p:sp>
         <p:nvSpPr>
           <p:cNvPr id="2" name="Rectangle 1"/>
@@ -12239,6 +14399,7 @@
           <a:lstStyle/>
           <a:p>
             <a:pPr algn="ctr"/>
+            <a:endParaRPr/>
           </a:p>
         </p:txBody>
       </p:sp>
@@ -12282,6 +14443,7 @@
           <a:lstStyle/>
           <a:p>
             <a:pPr algn="ctr"/>
+            <a:endParaRPr/>
           </a:p>
         </p:txBody>
       </p:sp>
@@ -12294,7 +14456,7 @@
         <p:spPr>
           <a:xfrm>
             <a:off x="502920" y="164592"/>
-            <a:ext cx="10789920" cy="777240"/>
+            <a:ext cx="10789920" cy="507831"/>
           </a:xfrm>
           <a:prstGeom prst="rect">
             <a:avLst/>
@@ -12309,12 +14471,100 @@
           <a:p>
             <a:pPr algn="l"/>
             <a:r>
-              <a:rPr sz="2700" b="1" i="0">
+              <a:rPr sz="2700" b="1" i="0" dirty="0">
                 <a:solidFill>
                   <a:srgbClr val="0D2B55"/>
                 </a:solidFill>
               </a:rPr>
-              <a:t>La Aplicacion: Para Pacientes, Clinicos e INVIMA</a:t>
+              <a:t>La </a:t>
+            </a:r>
+            <a:r>
+              <a:rPr sz="2700" b="1" i="0" dirty="0" err="1" smtClean="0">
+                <a:solidFill>
+                  <a:srgbClr val="0D2B55"/>
+                </a:solidFill>
+              </a:rPr>
+              <a:t>Aplicaci</a:t>
+            </a:r>
+            <a:r>
+              <a:rPr lang="es-419" sz="2700" b="1" i="0" dirty="0" err="1" smtClean="0">
+                <a:solidFill>
+                  <a:srgbClr val="0D2B55"/>
+                </a:solidFill>
+              </a:rPr>
+              <a:t>ó</a:t>
+            </a:r>
+            <a:r>
+              <a:rPr sz="2700" b="1" i="0" dirty="0" smtClean="0">
+                <a:solidFill>
+                  <a:srgbClr val="0D2B55"/>
+                </a:solidFill>
+              </a:rPr>
+              <a:t>n</a:t>
+            </a:r>
+            <a:r>
+              <a:rPr sz="2700" b="1" i="0" dirty="0">
+                <a:solidFill>
+                  <a:srgbClr val="0D2B55"/>
+                </a:solidFill>
+              </a:rPr>
+              <a:t>: Para </a:t>
+            </a:r>
+            <a:r>
+              <a:rPr sz="2700" b="1" i="0" dirty="0" err="1">
+                <a:solidFill>
+                  <a:srgbClr val="0D2B55"/>
+                </a:solidFill>
+              </a:rPr>
+              <a:t>Pacientes</a:t>
+            </a:r>
+            <a:r>
+              <a:rPr sz="2700" b="1" i="0" dirty="0">
+                <a:solidFill>
+                  <a:srgbClr val="0D2B55"/>
+                </a:solidFill>
+              </a:rPr>
+              <a:t>, </a:t>
+            </a:r>
+            <a:r>
+              <a:rPr sz="2700" b="1" i="0" dirty="0" smtClean="0">
+                <a:solidFill>
+                  <a:srgbClr val="0D2B55"/>
+                </a:solidFill>
+              </a:rPr>
+              <a:t>C</a:t>
+            </a:r>
+            <a:r>
+              <a:rPr lang="es-419" sz="2700" b="1" i="0" dirty="0" err="1" smtClean="0">
+                <a:solidFill>
+                  <a:srgbClr val="0D2B55"/>
+                </a:solidFill>
+              </a:rPr>
+              <a:t>lí</a:t>
+            </a:r>
+            <a:r>
+              <a:rPr sz="2700" b="1" i="0" dirty="0" err="1" smtClean="0">
+                <a:solidFill>
+                  <a:srgbClr val="0D2B55"/>
+                </a:solidFill>
+              </a:rPr>
+              <a:t>nicos</a:t>
+            </a:r>
+            <a:r>
+              <a:rPr sz="2700" b="1" i="0" dirty="0" smtClean="0">
+                <a:solidFill>
+                  <a:srgbClr val="0D2B55"/>
+                </a:solidFill>
+              </a:rPr>
+              <a:t> </a:t>
+            </a:r>
+            <a:r>
+              <a:rPr sz="2700" b="1" i="0" dirty="0">
+                <a:solidFill>
+                  <a:srgbClr val="0D2B55"/>
+                </a:solidFill>
+              </a:rPr>
+              <a:t>e INVIMA</a:t>
             </a:r>
           </a:p>
         </p:txBody>
@@ -12359,6 +14609,7 @@
           <a:lstStyle/>
           <a:p>
             <a:pPr algn="ctr"/>
+            <a:endParaRPr/>
           </a:p>
         </p:txBody>
       </p:sp>
@@ -12438,6 +14689,7 @@
           <a:lstStyle/>
           <a:p>
             <a:pPr algn="ctr"/>
+            <a:endParaRPr/>
           </a:p>
         </p:txBody>
       </p:sp>
@@ -12484,7 +14736,7 @@
         <p:spPr>
           <a:xfrm>
             <a:off x="1143000" y="1188720"/>
-            <a:ext cx="10332720" cy="411480"/>
+            <a:ext cx="10332720" cy="307777"/>
           </a:xfrm>
           <a:prstGeom prst="rect">
             <a:avLst/>
@@ -12499,12 +14751,124 @@
           <a:p>
             <a:pPr algn="l"/>
             <a:r>
-              <a:rPr sz="1400" b="0" i="0">
-                <a:solidFill>
-                  <a:srgbClr val="1E293B"/>
-                </a:solidFill>
-              </a:rPr>
-              <a:t>Busqueda en tiempo real: 52,830 medicamentos CUM via Socrata API + fallback local</a:t>
+              <a:rPr sz="1400" b="0" i="0" dirty="0" smtClean="0">
+                <a:solidFill>
+                  <a:srgbClr val="1E293B"/>
+                </a:solidFill>
+              </a:rPr>
+              <a:t>B</a:t>
+            </a:r>
+            <a:r>
+              <a:rPr lang="es-419" sz="1400" b="0" i="0" dirty="0" smtClean="0">
+                <a:solidFill>
+                  <a:srgbClr val="1E293B"/>
+                </a:solidFill>
+              </a:rPr>
+              <a:t>ú</a:t>
+            </a:r>
+            <a:r>
+              <a:rPr sz="1400" b="0" i="0" dirty="0" err="1" smtClean="0">
+                <a:solidFill>
+                  <a:srgbClr val="1E293B"/>
+                </a:solidFill>
+              </a:rPr>
+              <a:t>squeda</a:t>
+            </a:r>
+            <a:r>
+              <a:rPr sz="1400" b="0" i="0" dirty="0" smtClean="0">
+                <a:solidFill>
+                  <a:srgbClr val="1E293B"/>
+                </a:solidFill>
+              </a:rPr>
+              <a:t> </a:t>
+            </a:r>
+            <a:r>
+              <a:rPr sz="1400" b="0" i="0" dirty="0" err="1">
+                <a:solidFill>
+                  <a:srgbClr val="1E293B"/>
+                </a:solidFill>
+              </a:rPr>
+              <a:t>en</a:t>
+            </a:r>
+            <a:r>
+              <a:rPr sz="1400" b="0" i="0" dirty="0">
+                <a:solidFill>
+                  <a:srgbClr val="1E293B"/>
+                </a:solidFill>
+              </a:rPr>
+              <a:t> </a:t>
+            </a:r>
+            <a:r>
+              <a:rPr sz="1400" b="0" i="0" dirty="0" err="1">
+                <a:solidFill>
+                  <a:srgbClr val="1E293B"/>
+                </a:solidFill>
+              </a:rPr>
+              <a:t>tiempo</a:t>
+            </a:r>
+            <a:r>
+              <a:rPr sz="1400" b="0" i="0" dirty="0">
+                <a:solidFill>
+                  <a:srgbClr val="1E293B"/>
+                </a:solidFill>
+              </a:rPr>
+              <a:t> real: 52,830 </a:t>
+            </a:r>
+            <a:r>
+              <a:rPr sz="1400" b="0" i="0" dirty="0" err="1">
+                <a:solidFill>
+                  <a:srgbClr val="1E293B"/>
+                </a:solidFill>
+              </a:rPr>
+              <a:t>medicamentos</a:t>
+            </a:r>
+            <a:r>
+              <a:rPr sz="1400" b="0" i="0" dirty="0">
+                <a:solidFill>
+                  <a:srgbClr val="1E293B"/>
+                </a:solidFill>
+              </a:rPr>
+              <a:t> CUM </a:t>
+            </a:r>
+            <a:r>
+              <a:rPr sz="1400" b="0" i="0" dirty="0" smtClean="0">
+                <a:solidFill>
+                  <a:srgbClr val="1E293B"/>
+                </a:solidFill>
+              </a:rPr>
+              <a:t>v</a:t>
+            </a:r>
+            <a:r>
+              <a:rPr lang="es-419" sz="1400" b="0" i="0" dirty="0" smtClean="0">
+                <a:solidFill>
+                  <a:srgbClr val="1E293B"/>
+                </a:solidFill>
+              </a:rPr>
+              <a:t>í</a:t>
+            </a:r>
+            <a:r>
+              <a:rPr sz="1400" b="0" i="0" dirty="0" smtClean="0">
+                <a:solidFill>
+                  <a:srgbClr val="1E293B"/>
+                </a:solidFill>
+              </a:rPr>
+              <a:t>a </a:t>
+            </a:r>
+            <a:r>
+              <a:rPr sz="1400" b="0" i="0" dirty="0" err="1">
+                <a:solidFill>
+                  <a:srgbClr val="1E293B"/>
+                </a:solidFill>
+              </a:rPr>
+              <a:t>Socrata</a:t>
+            </a:r>
+            <a:r>
+              <a:rPr sz="1400" b="0" i="0" dirty="0">
+                <a:solidFill>
+                  <a:srgbClr val="1E293B"/>
+                </a:solidFill>
+              </a:rPr>
+              <a:t> API + fallback local</a:t>
             </a:r>
           </a:p>
         </p:txBody>
@@ -12551,6 +14915,7 @@
           <a:lstStyle/>
           <a:p>
             <a:pPr algn="ctr"/>
+            <a:endParaRPr/>
           </a:p>
         </p:txBody>
       </p:sp>
@@ -12597,7 +14962,7 @@
         <p:spPr>
           <a:xfrm>
             <a:off x="1143000" y="1828800"/>
-            <a:ext cx="10332720" cy="411480"/>
+            <a:ext cx="10332720" cy="307777"/>
           </a:xfrm>
           <a:prstGeom prst="rect">
             <a:avLst/>
@@ -12612,13 +14977,146 @@
           <a:p>
             <a:pPr algn="l"/>
             <a:r>
-              <a:rPr sz="1400" b="0" i="0">
-                <a:solidFill>
-                  <a:srgbClr val="1E293B"/>
-                </a:solidFill>
-              </a:rPr>
-              <a:t>Alternativas terapeuticas en 8 niveles: sustituto directo → clase ATC completa</a:t>
-            </a:r>
+              <a:rPr sz="1400" b="0" i="0" dirty="0" err="1">
+                <a:solidFill>
+                  <a:srgbClr val="1E293B"/>
+                </a:solidFill>
+              </a:rPr>
+              <a:t>Alternativas</a:t>
+            </a:r>
+            <a:r>
+              <a:rPr sz="1400" b="0" i="0" dirty="0">
+                <a:solidFill>
+                  <a:srgbClr val="1E293B"/>
+                </a:solidFill>
+              </a:rPr>
+              <a:t> </a:t>
+            </a:r>
+            <a:r>
+              <a:rPr sz="1400" b="0" i="0" dirty="0" err="1" smtClean="0">
+                <a:solidFill>
+                  <a:srgbClr val="1E293B"/>
+                </a:solidFill>
+              </a:rPr>
+              <a:t>terap</a:t>
+            </a:r>
+            <a:r>
+              <a:rPr lang="es-419" sz="1400" b="0" i="0" dirty="0" smtClean="0">
+                <a:solidFill>
+                  <a:srgbClr val="1E293B"/>
+                </a:solidFill>
+              </a:rPr>
+              <a:t>é</a:t>
+            </a:r>
+            <a:r>
+              <a:rPr sz="1400" b="0" i="0" dirty="0" err="1" smtClean="0">
+                <a:solidFill>
+                  <a:srgbClr val="1E293B"/>
+                </a:solidFill>
+              </a:rPr>
+              <a:t>uticas</a:t>
+            </a:r>
+            <a:r>
+              <a:rPr sz="1400" b="0" i="0" dirty="0" smtClean="0">
+                <a:solidFill>
+                  <a:srgbClr val="1E293B"/>
+                </a:solidFill>
+              </a:rPr>
+              <a:t> </a:t>
+            </a:r>
+            <a:r>
+              <a:rPr sz="1400" b="0" i="0" dirty="0" err="1">
+                <a:solidFill>
+                  <a:srgbClr val="1E293B"/>
+                </a:solidFill>
+              </a:rPr>
+              <a:t>en</a:t>
+            </a:r>
+            <a:r>
+              <a:rPr sz="1400" b="0" i="0" dirty="0">
+                <a:solidFill>
+                  <a:srgbClr val="1E293B"/>
+                </a:solidFill>
+              </a:rPr>
+              <a:t> 8 </a:t>
+            </a:r>
+            <a:r>
+              <a:rPr sz="1400" b="0" i="0" dirty="0" err="1">
+                <a:solidFill>
+                  <a:srgbClr val="1E293B"/>
+                </a:solidFill>
+              </a:rPr>
+              <a:t>niveles</a:t>
+            </a:r>
+            <a:r>
+              <a:rPr sz="1400" b="0" i="0" dirty="0">
+                <a:solidFill>
+                  <a:srgbClr val="1E293B"/>
+                </a:solidFill>
+              </a:rPr>
+              <a:t>: </a:t>
+            </a:r>
+            <a:r>
+              <a:rPr sz="1400" b="0" i="0" dirty="0" err="1">
+                <a:solidFill>
+                  <a:srgbClr val="1E293B"/>
+                </a:solidFill>
+              </a:rPr>
+              <a:t>sustituto</a:t>
+            </a:r>
+            <a:r>
+              <a:rPr sz="1400" b="0" i="0" dirty="0">
+                <a:solidFill>
+                  <a:srgbClr val="1E293B"/>
+                </a:solidFill>
+              </a:rPr>
+              <a:t> </a:t>
+            </a:r>
+            <a:r>
+              <a:rPr sz="1400" b="0" i="0" dirty="0" err="1">
+                <a:solidFill>
+                  <a:srgbClr val="1E293B"/>
+                </a:solidFill>
+              </a:rPr>
+              <a:t>directo</a:t>
+            </a:r>
+            <a:r>
+              <a:rPr sz="1400" b="0" i="0" dirty="0">
+                <a:solidFill>
+                  <a:srgbClr val="1E293B"/>
+                </a:solidFill>
+              </a:rPr>
+              <a:t> → </a:t>
+            </a:r>
+            <a:r>
+              <a:rPr sz="1400" b="0" i="0" dirty="0" err="1">
+                <a:solidFill>
+                  <a:srgbClr val="1E293B"/>
+                </a:solidFill>
+              </a:rPr>
+              <a:t>clase</a:t>
+            </a:r>
+            <a:r>
+              <a:rPr sz="1400" b="0" i="0" dirty="0">
+                <a:solidFill>
+                  <a:srgbClr val="1E293B"/>
+                </a:solidFill>
+              </a:rPr>
+              <a:t> ATC </a:t>
+            </a:r>
+            <a:r>
+              <a:rPr sz="1400" b="0" i="0" dirty="0" err="1">
+                <a:solidFill>
+                  <a:srgbClr val="1E293B"/>
+                </a:solidFill>
+              </a:rPr>
+              <a:t>completa</a:t>
+            </a:r>
+            <a:endParaRPr sz="1400" b="0" i="0" dirty="0">
+              <a:solidFill>
+                <a:srgbClr val="1E293B"/>
+              </a:solidFill>
+            </a:endParaRPr>
           </a:p>
         </p:txBody>
       </p:sp>
@@ -12664,6 +15162,7 @@
           <a:lstStyle/>
           <a:p>
             <a:pPr algn="ctr"/>
+            <a:endParaRPr/>
           </a:p>
         </p:txBody>
       </p:sp>
@@ -12710,7 +15209,7 @@
         <p:spPr>
           <a:xfrm>
             <a:off x="1143000" y="2468880"/>
-            <a:ext cx="10332720" cy="411480"/>
+            <a:ext cx="10332720" cy="307777"/>
           </a:xfrm>
           <a:prstGeom prst="rect">
             <a:avLst/>
@@ -12725,13 +15224,130 @@
           <a:p>
             <a:pPr algn="l"/>
             <a:r>
-              <a:rPr sz="1400" b="0" i="0">
-                <a:solidFill>
-                  <a:srgbClr val="1E293B"/>
-                </a:solidFill>
-              </a:rPr>
-              <a:t>Badge de riesgo ML por medicamento: probabilidad 0-100% con nivel Bajo/Medio/Alto/Critico</a:t>
-            </a:r>
+              <a:rPr sz="1400" b="0" i="0" dirty="0">
+                <a:solidFill>
+                  <a:srgbClr val="1E293B"/>
+                </a:solidFill>
+              </a:rPr>
+              <a:t>Badge de </a:t>
+            </a:r>
+            <a:r>
+              <a:rPr sz="1400" b="0" i="0" dirty="0" err="1">
+                <a:solidFill>
+                  <a:srgbClr val="1E293B"/>
+                </a:solidFill>
+              </a:rPr>
+              <a:t>riesgo</a:t>
+            </a:r>
+            <a:r>
+              <a:rPr sz="1400" b="0" i="0" dirty="0">
+                <a:solidFill>
+                  <a:srgbClr val="1E293B"/>
+                </a:solidFill>
+              </a:rPr>
+              <a:t> ML </a:t>
+            </a:r>
+            <a:r>
+              <a:rPr sz="1400" b="0" i="0" dirty="0" err="1">
+                <a:solidFill>
+                  <a:srgbClr val="1E293B"/>
+                </a:solidFill>
+              </a:rPr>
+              <a:t>por</a:t>
+            </a:r>
+            <a:r>
+              <a:rPr sz="1400" b="0" i="0" dirty="0">
+                <a:solidFill>
+                  <a:srgbClr val="1E293B"/>
+                </a:solidFill>
+              </a:rPr>
+              <a:t> </a:t>
+            </a:r>
+            <a:r>
+              <a:rPr sz="1400" b="0" i="0" dirty="0" err="1">
+                <a:solidFill>
+                  <a:srgbClr val="1E293B"/>
+                </a:solidFill>
+              </a:rPr>
+              <a:t>medicamento</a:t>
+            </a:r>
+            <a:r>
+              <a:rPr sz="1400" b="0" i="0" dirty="0">
+                <a:solidFill>
+                  <a:srgbClr val="1E293B"/>
+                </a:solidFill>
+              </a:rPr>
+              <a:t>: </a:t>
+            </a:r>
+            <a:r>
+              <a:rPr sz="1400" b="0" i="0" dirty="0" err="1">
+                <a:solidFill>
+                  <a:srgbClr val="1E293B"/>
+                </a:solidFill>
+              </a:rPr>
+              <a:t>probabilidad</a:t>
+            </a:r>
+            <a:r>
+              <a:rPr sz="1400" b="0" i="0" dirty="0">
+                <a:solidFill>
+                  <a:srgbClr val="1E293B"/>
+                </a:solidFill>
+              </a:rPr>
+              <a:t> 0-100% con </a:t>
+            </a:r>
+            <a:r>
+              <a:rPr sz="1400" b="0" i="0" dirty="0" err="1">
+                <a:solidFill>
+                  <a:srgbClr val="1E293B"/>
+                </a:solidFill>
+              </a:rPr>
+              <a:t>nivel</a:t>
+            </a:r>
+            <a:r>
+              <a:rPr sz="1400" b="0" i="0" dirty="0">
+                <a:solidFill>
+                  <a:srgbClr val="1E293B"/>
+                </a:solidFill>
+              </a:rPr>
+              <a:t> </a:t>
+            </a:r>
+            <a:r>
+              <a:rPr sz="1400" b="0" i="0" dirty="0" err="1" smtClean="0">
+                <a:solidFill>
+                  <a:srgbClr val="1E293B"/>
+                </a:solidFill>
+              </a:rPr>
+              <a:t>Bajo</a:t>
+            </a:r>
+            <a:r>
+              <a:rPr sz="1400" b="0" i="0" dirty="0" smtClean="0">
+                <a:solidFill>
+                  <a:srgbClr val="1E293B"/>
+                </a:solidFill>
+              </a:rPr>
+              <a:t>/Medio/Alto/Cr</a:t>
+            </a:r>
+            <a:r>
+              <a:rPr lang="es-419" sz="1400" b="0" i="0" dirty="0" smtClean="0">
+                <a:solidFill>
+                  <a:srgbClr val="1E293B"/>
+                </a:solidFill>
+              </a:rPr>
+              <a:t>í</a:t>
+            </a:r>
+            <a:r>
+              <a:rPr sz="1400" b="0" i="0" dirty="0" err="1" smtClean="0">
+                <a:solidFill>
+                  <a:srgbClr val="1E293B"/>
+                </a:solidFill>
+              </a:rPr>
+              <a:t>tico</a:t>
+            </a:r>
+            <a:endParaRPr sz="1400" b="0" i="0" dirty="0">
+              <a:solidFill>
+                <a:srgbClr val="1E293B"/>
+              </a:solidFill>
+            </a:endParaRPr>
           </a:p>
         </p:txBody>
       </p:sp>
@@ -12777,6 +15393,7 @@
           <a:lstStyle/>
           <a:p>
             <a:pPr algn="ctr"/>
+            <a:endParaRPr/>
           </a:p>
         </p:txBody>
       </p:sp>
@@ -12823,7 +15440,7 @@
         <p:spPr>
           <a:xfrm>
             <a:off x="1143000" y="3108960"/>
-            <a:ext cx="10332720" cy="411480"/>
+            <a:ext cx="10332720" cy="307777"/>
           </a:xfrm>
           <a:prstGeom prst="rect">
             <a:avLst/>
@@ -12838,13 +15455,98 @@
           <a:p>
             <a:pPr algn="l"/>
             <a:r>
-              <a:rPr sz="1400" b="0" i="0">
-                <a:solidFill>
-                  <a:srgbClr val="1E293B"/>
-                </a:solidFill>
-              </a:rPr>
-              <a:t>Formulario de reporte mejorado: busca con ficha CUM completa antes de enviar</a:t>
-            </a:r>
+              <a:rPr sz="1400" b="0" i="0" dirty="0" err="1">
+                <a:solidFill>
+                  <a:srgbClr val="1E293B"/>
+                </a:solidFill>
+              </a:rPr>
+              <a:t>Formulario</a:t>
+            </a:r>
+            <a:r>
+              <a:rPr sz="1400" b="0" i="0" dirty="0">
+                <a:solidFill>
+                  <a:srgbClr val="1E293B"/>
+                </a:solidFill>
+              </a:rPr>
+              <a:t> de </a:t>
+            </a:r>
+            <a:r>
+              <a:rPr sz="1400" b="0" i="0" dirty="0" err="1" smtClean="0">
+                <a:solidFill>
+                  <a:srgbClr val="1E293B"/>
+                </a:solidFill>
+              </a:rPr>
+              <a:t>reporte</a:t>
+            </a:r>
+            <a:r>
+              <a:rPr sz="1400" b="0" i="0" dirty="0" smtClean="0">
+                <a:solidFill>
+                  <a:srgbClr val="1E293B"/>
+                </a:solidFill>
+              </a:rPr>
+              <a:t>: </a:t>
+            </a:r>
+            <a:r>
+              <a:rPr sz="1400" b="0" i="0" dirty="0" err="1">
+                <a:solidFill>
+                  <a:srgbClr val="1E293B"/>
+                </a:solidFill>
+              </a:rPr>
+              <a:t>busca</a:t>
+            </a:r>
+            <a:r>
+              <a:rPr sz="1400" b="0" i="0" dirty="0">
+                <a:solidFill>
+                  <a:srgbClr val="1E293B"/>
+                </a:solidFill>
+              </a:rPr>
+              <a:t> con </a:t>
+            </a:r>
+            <a:r>
+              <a:rPr sz="1400" b="0" i="0" dirty="0" err="1">
+                <a:solidFill>
+                  <a:srgbClr val="1E293B"/>
+                </a:solidFill>
+              </a:rPr>
+              <a:t>ficha</a:t>
+            </a:r>
+            <a:r>
+              <a:rPr sz="1400" b="0" i="0" dirty="0">
+                <a:solidFill>
+                  <a:srgbClr val="1E293B"/>
+                </a:solidFill>
+              </a:rPr>
+              <a:t> CUM </a:t>
+            </a:r>
+            <a:r>
+              <a:rPr sz="1400" b="0" i="0" dirty="0" err="1">
+                <a:solidFill>
+                  <a:srgbClr val="1E293B"/>
+                </a:solidFill>
+              </a:rPr>
+              <a:t>completa</a:t>
+            </a:r>
+            <a:r>
+              <a:rPr sz="1400" b="0" i="0" dirty="0">
+                <a:solidFill>
+                  <a:srgbClr val="1E293B"/>
+                </a:solidFill>
+              </a:rPr>
+              <a:t> antes de </a:t>
+            </a:r>
+            <a:r>
+              <a:rPr sz="1400" b="0" i="0" dirty="0" err="1">
+                <a:solidFill>
+                  <a:srgbClr val="1E293B"/>
+                </a:solidFill>
+              </a:rPr>
+              <a:t>enviar</a:t>
+            </a:r>
+            <a:endParaRPr sz="1400" b="0" i="0" dirty="0">
+              <a:solidFill>
+                <a:srgbClr val="1E293B"/>
+              </a:solidFill>
+            </a:endParaRPr>
           </a:p>
         </p:txBody>
       </p:sp>
@@ -12890,6 +15592,7 @@
           <a:lstStyle/>
           <a:p>
             <a:pPr algn="ctr"/>
+            <a:endParaRPr/>
           </a:p>
         </p:txBody>
       </p:sp>
@@ -13003,6 +15706,7 @@
           <a:lstStyle/>
           <a:p>
             <a:pPr algn="ctr"/>
+            <a:endParaRPr/>
           </a:p>
         </p:txBody>
       </p:sp>
@@ -13049,7 +15753,7 @@
         <p:spPr>
           <a:xfrm>
             <a:off x="1143000" y="4389120"/>
-            <a:ext cx="10332720" cy="411480"/>
+            <a:ext cx="10332720" cy="307777"/>
           </a:xfrm>
           <a:prstGeom prst="rect">
             <a:avLst/>
@@ -13064,13 +15768,106 @@
           <a:p>
             <a:pPr algn="l"/>
             <a:r>
-              <a:rPr sz="1400" b="0" i="0">
-                <a:solidFill>
-                  <a:srgbClr val="1E293B"/>
-                </a:solidFill>
-              </a:rPr>
-              <a:t>Senales anticipadas: spike ciudadano sin alerta INVIMA = riesgo emergente</a:t>
-            </a:r>
+              <a:rPr sz="1400" b="0" i="0" dirty="0" smtClean="0">
+                <a:solidFill>
+                  <a:srgbClr val="1E293B"/>
+                </a:solidFill>
+              </a:rPr>
+              <a:t>Se</a:t>
+            </a:r>
+            <a:r>
+              <a:rPr lang="es-419" sz="1400" dirty="0">
+                <a:solidFill>
+                  <a:srgbClr val="1E293B"/>
+                </a:solidFill>
+              </a:rPr>
+              <a:t>ñ</a:t>
+            </a:r>
+            <a:r>
+              <a:rPr sz="1400" b="0" i="0" dirty="0" smtClean="0">
+                <a:solidFill>
+                  <a:srgbClr val="1E293B"/>
+                </a:solidFill>
+              </a:rPr>
+              <a:t>ales </a:t>
+            </a:r>
+            <a:r>
+              <a:rPr sz="1400" b="0" i="0" dirty="0" err="1">
+                <a:solidFill>
+                  <a:srgbClr val="1E293B"/>
+                </a:solidFill>
+              </a:rPr>
+              <a:t>anticipadas</a:t>
+            </a:r>
+            <a:r>
+              <a:rPr sz="1400" b="0" i="0" dirty="0">
+                <a:solidFill>
+                  <a:srgbClr val="1E293B"/>
+                </a:solidFill>
+              </a:rPr>
+              <a:t>: spike </a:t>
+            </a:r>
+            <a:r>
+              <a:rPr sz="1400" b="0" i="0" dirty="0" err="1">
+                <a:solidFill>
+                  <a:srgbClr val="1E293B"/>
+                </a:solidFill>
+              </a:rPr>
+              <a:t>ciudadano</a:t>
+            </a:r>
+            <a:r>
+              <a:rPr sz="1400" b="0" i="0" dirty="0">
+                <a:solidFill>
+                  <a:srgbClr val="1E293B"/>
+                </a:solidFill>
+              </a:rPr>
+              <a:t> sin </a:t>
+            </a:r>
+            <a:r>
+              <a:rPr sz="1400" b="0" i="0" dirty="0" err="1">
+                <a:solidFill>
+                  <a:srgbClr val="1E293B"/>
+                </a:solidFill>
+              </a:rPr>
+              <a:t>alerta</a:t>
+            </a:r>
+            <a:r>
+              <a:rPr sz="1400" b="0" i="0" dirty="0">
+                <a:solidFill>
+                  <a:srgbClr val="1E293B"/>
+                </a:solidFill>
+              </a:rPr>
+              <a:t> INVIMA = </a:t>
+            </a:r>
+            <a:r>
+              <a:rPr sz="1400" b="0" i="0" dirty="0" err="1">
+                <a:solidFill>
+                  <a:srgbClr val="1E293B"/>
+                </a:solidFill>
+              </a:rPr>
+              <a:t>riesgo</a:t>
+            </a:r>
+            <a:r>
+              <a:rPr sz="1400" b="0" i="0" dirty="0">
+                <a:solidFill>
+                  <a:srgbClr val="1E293B"/>
+                </a:solidFill>
+              </a:rPr>
+              <a:t> </a:t>
+            </a:r>
+            <a:r>
+              <a:rPr sz="1400" b="0" i="0" dirty="0" err="1">
+                <a:solidFill>
+                  <a:srgbClr val="1E293B"/>
+                </a:solidFill>
+              </a:rPr>
+              <a:t>emergente</a:t>
+            </a:r>
+            <a:endParaRPr sz="1400" b="0" i="0" dirty="0">
+              <a:solidFill>
+                <a:srgbClr val="1E293B"/>
+              </a:solidFill>
+            </a:endParaRPr>
           </a:p>
         </p:txBody>
       </p:sp>
@@ -13116,6 +15913,7 @@
           <a:lstStyle/>
           <a:p>
             <a:pPr algn="ctr"/>
+            <a:endParaRPr/>
           </a:p>
         </p:txBody>
       </p:sp>
@@ -13196,7 +15994,7 @@
 </file>
 
 <file path=ppt/slides/slide8.xml><?xml version="1.0" encoding="utf-8"?>
-<p:sld xmlns:a="http://schemas.openxmlformats.org/drawingml/2006/main" xmlns:p="http://schemas.openxmlformats.org/presentationml/2006/main" xmlns:r="http://schemas.openxmlformats.org/officeDocument/2006/relationships">
+<p:sld xmlns:a="http://schemas.openxmlformats.org/drawingml/2006/main" xmlns:r="http://schemas.openxmlformats.org/officeDocument/2006/relationships" xmlns:p="http://schemas.openxmlformats.org/presentationml/2006/main">
   <p:cSld>
     <p:bg>
       <p:bgPr>
@@ -13212,7 +16010,14 @@
         <p:cNvGrpSpPr/>
         <p:nvPr/>
       </p:nvGrpSpPr>
-      <p:grpSpPr/>
+      <p:grpSpPr>
+        <a:xfrm>
+          <a:off x="0" y="0"/>
+          <a:ext cx="0" cy="0"/>
+          <a:chOff x="0" y="0"/>
+          <a:chExt cx="0" cy="0"/>
+        </a:xfrm>
+      </p:grpSpPr>
       <p:sp>
         <p:nvSpPr>
           <p:cNvPr id="2" name="Rectangle 1"/>
@@ -13253,6 +16058,7 @@
           <a:lstStyle/>
           <a:p>
             <a:pPr algn="ctr"/>
+            <a:endParaRPr/>
           </a:p>
         </p:txBody>
       </p:sp>
@@ -13296,6 +16102,7 @@
           <a:lstStyle/>
           <a:p>
             <a:pPr algn="ctr"/>
+            <a:endParaRPr/>
           </a:p>
         </p:txBody>
       </p:sp>
@@ -13373,6 +16180,7 @@
           <a:lstStyle/>
           <a:p>
             <a:pPr algn="ctr"/>
+            <a:endParaRPr/>
           </a:p>
         </p:txBody>
       </p:sp>
@@ -13452,6 +16260,7 @@
           <a:lstStyle/>
           <a:p>
             <a:pPr algn="ctr"/>
+            <a:endParaRPr/>
           </a:p>
         </p:txBody>
       </p:sp>
@@ -13495,6 +16304,7 @@
           <a:lstStyle/>
           <a:p>
             <a:pPr algn="ctr"/>
+            <a:endParaRPr/>
           </a:p>
         </p:txBody>
       </p:sp>
@@ -13575,7 +16385,7 @@
         <p:spPr>
           <a:xfrm>
             <a:off x="685800" y="2468880"/>
-            <a:ext cx="5029200" cy="658368"/>
+            <a:ext cx="5029200" cy="292388"/>
           </a:xfrm>
           <a:prstGeom prst="rect">
             <a:avLst/>
@@ -13590,12 +16400,84 @@
           <a:p>
             <a:pPr algn="l"/>
             <a:r>
-              <a:rPr sz="1300" b="0" i="0">
-                <a:solidFill>
-                  <a:srgbClr val="1E293B"/>
-                </a:solidFill>
-              </a:rPr>
-              <a:t>✓  Canal ciudadano → senal regulatoria directa a INVIMA</a:t>
+              <a:rPr sz="1300" b="0" i="0" dirty="0">
+                <a:solidFill>
+                  <a:srgbClr val="1E293B"/>
+                </a:solidFill>
+              </a:rPr>
+              <a:t>✓  Canal </a:t>
+            </a:r>
+            <a:r>
+              <a:rPr sz="1300" b="0" i="0" dirty="0" err="1">
+                <a:solidFill>
+                  <a:srgbClr val="1E293B"/>
+                </a:solidFill>
+              </a:rPr>
+              <a:t>ciudadano</a:t>
+            </a:r>
+            <a:r>
+              <a:rPr sz="1300" b="0" i="0" dirty="0">
+                <a:solidFill>
+                  <a:srgbClr val="1E293B"/>
+                </a:solidFill>
+              </a:rPr>
+              <a:t> → </a:t>
+            </a:r>
+            <a:r>
+              <a:rPr sz="1300" b="0" i="0" dirty="0" smtClean="0">
+                <a:solidFill>
+                  <a:srgbClr val="1E293B"/>
+                </a:solidFill>
+              </a:rPr>
+              <a:t>se</a:t>
+            </a:r>
+            <a:r>
+              <a:rPr lang="es-419" sz="1300" b="0" i="0" dirty="0" smtClean="0">
+                <a:solidFill>
+                  <a:srgbClr val="1E293B"/>
+                </a:solidFill>
+              </a:rPr>
+              <a:t>ñ</a:t>
+            </a:r>
+            <a:r>
+              <a:rPr sz="1300" b="0" i="0" dirty="0" smtClean="0">
+                <a:solidFill>
+                  <a:srgbClr val="1E293B"/>
+                </a:solidFill>
+              </a:rPr>
+              <a:t>al </a:t>
+            </a:r>
+            <a:r>
+              <a:rPr sz="1300" b="0" i="0" dirty="0" err="1">
+                <a:solidFill>
+                  <a:srgbClr val="1E293B"/>
+                </a:solidFill>
+              </a:rPr>
+              <a:t>regulatoria</a:t>
+            </a:r>
+            <a:r>
+              <a:rPr sz="1300" b="0" i="0" dirty="0">
+                <a:solidFill>
+                  <a:srgbClr val="1E293B"/>
+                </a:solidFill>
+              </a:rPr>
+              <a:t> </a:t>
+            </a:r>
+            <a:r>
+              <a:rPr sz="1300" b="0" i="0" dirty="0" err="1">
+                <a:solidFill>
+                  <a:srgbClr val="1E293B"/>
+                </a:solidFill>
+              </a:rPr>
+              <a:t>directa</a:t>
+            </a:r>
+            <a:r>
+              <a:rPr sz="1300" b="0" i="0" dirty="0">
+                <a:solidFill>
+                  <a:srgbClr val="1E293B"/>
+                </a:solidFill>
+              </a:rPr>
+              <a:t> a INVIMA</a:t>
             </a:r>
           </a:p>
         </p:txBody>
@@ -13609,7 +16491,7 @@
         <p:spPr>
           <a:xfrm>
             <a:off x="685800" y="3200400"/>
-            <a:ext cx="5029200" cy="658368"/>
+            <a:ext cx="5029200" cy="292388"/>
           </a:xfrm>
           <a:prstGeom prst="rect">
             <a:avLst/>
@@ -13624,13 +16506,106 @@
           <a:p>
             <a:pPr algn="l"/>
             <a:r>
-              <a:rPr sz="1300" b="0" i="0">
-                <a:solidFill>
-                  <a:srgbClr val="1E293B"/>
-                </a:solidFill>
-              </a:rPr>
-              <a:t>✓  Anticipa desabastecimiento 30 dias antes que alertas oficiales</a:t>
-            </a:r>
+              <a:rPr sz="1300" b="0" i="0" dirty="0">
+                <a:solidFill>
+                  <a:srgbClr val="1E293B"/>
+                </a:solidFill>
+              </a:rPr>
+              <a:t>✓  </a:t>
+            </a:r>
+            <a:r>
+              <a:rPr sz="1300" b="0" i="0" dirty="0" err="1">
+                <a:solidFill>
+                  <a:srgbClr val="1E293B"/>
+                </a:solidFill>
+              </a:rPr>
+              <a:t>Anticipa</a:t>
+            </a:r>
+            <a:r>
+              <a:rPr sz="1300" b="0" i="0" dirty="0">
+                <a:solidFill>
+                  <a:srgbClr val="1E293B"/>
+                </a:solidFill>
+              </a:rPr>
+              <a:t> </a:t>
+            </a:r>
+            <a:r>
+              <a:rPr sz="1300" b="0" i="0" dirty="0" err="1">
+                <a:solidFill>
+                  <a:srgbClr val="1E293B"/>
+                </a:solidFill>
+              </a:rPr>
+              <a:t>desabastecimiento</a:t>
+            </a:r>
+            <a:r>
+              <a:rPr sz="1300" b="0" i="0" dirty="0">
+                <a:solidFill>
+                  <a:srgbClr val="1E293B"/>
+                </a:solidFill>
+              </a:rPr>
+              <a:t> 30 </a:t>
+            </a:r>
+            <a:r>
+              <a:rPr sz="1300" b="0" i="0" dirty="0" smtClean="0">
+                <a:solidFill>
+                  <a:srgbClr val="1E293B"/>
+                </a:solidFill>
+              </a:rPr>
+              <a:t>d</a:t>
+            </a:r>
+            <a:r>
+              <a:rPr lang="es-419" sz="1300" b="0" i="0" dirty="0" smtClean="0">
+                <a:solidFill>
+                  <a:srgbClr val="1E293B"/>
+                </a:solidFill>
+              </a:rPr>
+              <a:t>í</a:t>
+            </a:r>
+            <a:r>
+              <a:rPr sz="1300" b="0" i="0" dirty="0" smtClean="0">
+                <a:solidFill>
+                  <a:srgbClr val="1E293B"/>
+                </a:solidFill>
+              </a:rPr>
+              <a:t>as </a:t>
+            </a:r>
+            <a:r>
+              <a:rPr sz="1300" b="0" i="0" dirty="0">
+                <a:solidFill>
+                  <a:srgbClr val="1E293B"/>
+                </a:solidFill>
+              </a:rPr>
+              <a:t>antes que </a:t>
+            </a:r>
+            <a:r>
+              <a:rPr sz="1300" b="0" i="0" dirty="0" err="1">
+                <a:solidFill>
+                  <a:srgbClr val="1E293B"/>
+                </a:solidFill>
+              </a:rPr>
+              <a:t>alertas</a:t>
+            </a:r>
+            <a:r>
+              <a:rPr sz="1300" b="0" i="0" dirty="0">
+                <a:solidFill>
+                  <a:srgbClr val="1E293B"/>
+                </a:solidFill>
+              </a:rPr>
+              <a:t> </a:t>
+            </a:r>
+            <a:r>
+              <a:rPr sz="1300" b="0" i="0" dirty="0" err="1">
+                <a:solidFill>
+                  <a:srgbClr val="1E293B"/>
+                </a:solidFill>
+              </a:rPr>
+              <a:t>oficiales</a:t>
+            </a:r>
+            <a:endParaRPr sz="1300" b="0" i="0" dirty="0">
+              <a:solidFill>
+                <a:srgbClr val="1E293B"/>
+              </a:solidFill>
+            </a:endParaRPr>
           </a:p>
         </p:txBody>
       </p:sp>
@@ -13643,7 +16618,7 @@
         <p:spPr>
           <a:xfrm>
             <a:off x="685800" y="3931920"/>
-            <a:ext cx="5029200" cy="658368"/>
+            <a:ext cx="5029200" cy="292388"/>
           </a:xfrm>
           <a:prstGeom prst="rect">
             <a:avLst/>
@@ -13658,13 +16633,106 @@
           <a:p>
             <a:pPr algn="l"/>
             <a:r>
-              <a:rPr sz="1300" b="0" i="0">
-                <a:solidFill>
-                  <a:srgbClr val="1E293B"/>
-                </a:solidFill>
-              </a:rPr>
-              <a:t>✓  Alternativas terapeuticas: reduce impacto en pacientes</a:t>
-            </a:r>
+              <a:rPr sz="1300" b="0" i="0" dirty="0">
+                <a:solidFill>
+                  <a:srgbClr val="1E293B"/>
+                </a:solidFill>
+              </a:rPr>
+              <a:t>✓  </a:t>
+            </a:r>
+            <a:r>
+              <a:rPr sz="1300" b="0" i="0" dirty="0" err="1">
+                <a:solidFill>
+                  <a:srgbClr val="1E293B"/>
+                </a:solidFill>
+              </a:rPr>
+              <a:t>Alternativas</a:t>
+            </a:r>
+            <a:r>
+              <a:rPr sz="1300" b="0" i="0" dirty="0">
+                <a:solidFill>
+                  <a:srgbClr val="1E293B"/>
+                </a:solidFill>
+              </a:rPr>
+              <a:t> </a:t>
+            </a:r>
+            <a:r>
+              <a:rPr sz="1300" b="0" i="0" dirty="0" err="1" smtClean="0">
+                <a:solidFill>
+                  <a:srgbClr val="1E293B"/>
+                </a:solidFill>
+              </a:rPr>
+              <a:t>terap</a:t>
+            </a:r>
+            <a:r>
+              <a:rPr lang="es-419" sz="1300" b="0" i="0" dirty="0" smtClean="0">
+                <a:solidFill>
+                  <a:srgbClr val="1E293B"/>
+                </a:solidFill>
+              </a:rPr>
+              <a:t>é</a:t>
+            </a:r>
+            <a:r>
+              <a:rPr sz="1300" b="0" i="0" dirty="0" err="1" smtClean="0">
+                <a:solidFill>
+                  <a:srgbClr val="1E293B"/>
+                </a:solidFill>
+              </a:rPr>
+              <a:t>uticas</a:t>
+            </a:r>
+            <a:r>
+              <a:rPr sz="1300" b="0" i="0" dirty="0">
+                <a:solidFill>
+                  <a:srgbClr val="1E293B"/>
+                </a:solidFill>
+              </a:rPr>
+              <a:t>: reduce </a:t>
+            </a:r>
+            <a:r>
+              <a:rPr sz="1300" b="0" i="0" dirty="0" err="1">
+                <a:solidFill>
+                  <a:srgbClr val="1E293B"/>
+                </a:solidFill>
+              </a:rPr>
+              <a:t>impacto</a:t>
+            </a:r>
+            <a:r>
+              <a:rPr sz="1300" b="0" i="0" dirty="0">
+                <a:solidFill>
+                  <a:srgbClr val="1E293B"/>
+                </a:solidFill>
+              </a:rPr>
+              <a:t> </a:t>
+            </a:r>
+            <a:r>
+              <a:rPr sz="1300" b="0" i="0" dirty="0" err="1">
+                <a:solidFill>
+                  <a:srgbClr val="1E293B"/>
+                </a:solidFill>
+              </a:rPr>
+              <a:t>en</a:t>
+            </a:r>
+            <a:r>
+              <a:rPr sz="1300" b="0" i="0" dirty="0">
+                <a:solidFill>
+                  <a:srgbClr val="1E293B"/>
+                </a:solidFill>
+              </a:rPr>
+              <a:t> </a:t>
+            </a:r>
+            <a:r>
+              <a:rPr sz="1300" b="0" i="0" dirty="0" err="1">
+                <a:solidFill>
+                  <a:srgbClr val="1E293B"/>
+                </a:solidFill>
+              </a:rPr>
+              <a:t>pacientes</a:t>
+            </a:r>
+            <a:endParaRPr sz="1300" b="0" i="0" dirty="0">
+              <a:solidFill>
+                <a:srgbClr val="1E293B"/>
+              </a:solidFill>
+            </a:endParaRPr>
           </a:p>
         </p:txBody>
       </p:sp>
@@ -13677,7 +16745,7 @@
         <p:spPr>
           <a:xfrm>
             <a:off x="685800" y="4663440"/>
-            <a:ext cx="5029200" cy="658368"/>
+            <a:ext cx="5029200" cy="292388"/>
           </a:xfrm>
           <a:prstGeom prst="rect">
             <a:avLst/>
@@ -13692,13 +16760,122 @@
           <a:p>
             <a:pPr algn="l"/>
             <a:r>
-              <a:rPr sz="1300" b="0" i="0">
-                <a:solidFill>
-                  <a:srgbClr val="1E293B"/>
-                </a:solidFill>
-              </a:rPr>
-              <a:t>✓  Codigo abierto MIT: cualquier entidad puede adoptarlo</a:t>
-            </a:r>
+              <a:rPr sz="1300" b="0" i="0" dirty="0">
+                <a:solidFill>
+                  <a:srgbClr val="1E293B"/>
+                </a:solidFill>
+              </a:rPr>
+              <a:t>✓  </a:t>
+            </a:r>
+            <a:r>
+              <a:rPr sz="1300" b="0" i="0" dirty="0" smtClean="0">
+                <a:solidFill>
+                  <a:srgbClr val="1E293B"/>
+                </a:solidFill>
+              </a:rPr>
+              <a:t>C</a:t>
+            </a:r>
+            <a:r>
+              <a:rPr lang="es-419" sz="1300" b="0" i="0" dirty="0" err="1" smtClean="0">
+                <a:solidFill>
+                  <a:srgbClr val="1E293B"/>
+                </a:solidFill>
+              </a:rPr>
+              <a:t>ó</a:t>
+            </a:r>
+            <a:r>
+              <a:rPr sz="1300" b="0" i="0" dirty="0" err="1" smtClean="0">
+                <a:solidFill>
+                  <a:srgbClr val="1E293B"/>
+                </a:solidFill>
+              </a:rPr>
+              <a:t>digo</a:t>
+            </a:r>
+            <a:r>
+              <a:rPr sz="1300" b="0" i="0" dirty="0" smtClean="0">
+                <a:solidFill>
+                  <a:srgbClr val="1E293B"/>
+                </a:solidFill>
+              </a:rPr>
+              <a:t> </a:t>
+            </a:r>
+            <a:r>
+              <a:rPr sz="1300" b="0" i="0" dirty="0" err="1">
+                <a:solidFill>
+                  <a:srgbClr val="1E293B"/>
+                </a:solidFill>
+              </a:rPr>
+              <a:t>abierto</a:t>
+            </a:r>
+            <a:r>
+              <a:rPr sz="1300" b="0" i="0" dirty="0">
+                <a:solidFill>
+                  <a:srgbClr val="1E293B"/>
+                </a:solidFill>
+              </a:rPr>
+              <a:t> MIT: </a:t>
+            </a:r>
+            <a:r>
+              <a:rPr sz="1300" b="0" i="0" dirty="0" err="1">
+                <a:solidFill>
+                  <a:srgbClr val="1E293B"/>
+                </a:solidFill>
+              </a:rPr>
+              <a:t>cualquier</a:t>
+            </a:r>
+            <a:r>
+              <a:rPr sz="1300" b="0" i="0" dirty="0">
+                <a:solidFill>
+                  <a:srgbClr val="1E293B"/>
+                </a:solidFill>
+              </a:rPr>
+              <a:t> </a:t>
+            </a:r>
+            <a:r>
+              <a:rPr sz="1300" b="0" i="0" dirty="0" err="1">
+                <a:solidFill>
+                  <a:srgbClr val="1E293B"/>
+                </a:solidFill>
+              </a:rPr>
+              <a:t>entidad</a:t>
+            </a:r>
+            <a:r>
+              <a:rPr sz="1300" b="0" i="0" dirty="0">
+                <a:solidFill>
+                  <a:srgbClr val="1E293B"/>
+                </a:solidFill>
+              </a:rPr>
+              <a:t> </a:t>
+            </a:r>
+            <a:r>
+              <a:rPr sz="1300" b="0" i="0" dirty="0" err="1">
+                <a:solidFill>
+                  <a:srgbClr val="1E293B"/>
+                </a:solidFill>
+              </a:rPr>
+              <a:t>puede</a:t>
+            </a:r>
+            <a:r>
+              <a:rPr sz="1300" b="0" i="0" dirty="0">
+                <a:solidFill>
+                  <a:srgbClr val="1E293B"/>
+                </a:solidFill>
+              </a:rPr>
+              <a:t> </a:t>
+            </a:r>
+            <a:r>
+              <a:rPr sz="1300" b="0" i="0" dirty="0" err="1">
+                <a:solidFill>
+                  <a:srgbClr val="1E293B"/>
+                </a:solidFill>
+              </a:rPr>
+              <a:t>adoptarlo</a:t>
+            </a:r>
+            <a:endParaRPr sz="1300" b="0" i="0" dirty="0">
+              <a:solidFill>
+                <a:srgbClr val="1E293B"/>
+              </a:solidFill>
+            </a:endParaRPr>
           </a:p>
         </p:txBody>
       </p:sp>
@@ -13744,6 +16921,7 @@
           <a:lstStyle/>
           <a:p>
             <a:pPr algn="ctr"/>
+            <a:endParaRPr/>
           </a:p>
         </p:txBody>
       </p:sp>
@@ -13787,6 +16965,7 @@
           <a:lstStyle/>
           <a:p>
             <a:pPr algn="ctr"/>
+            <a:endParaRPr/>
           </a:p>
         </p:txBody>
       </p:sp>
@@ -13833,7 +17012,7 @@
         <p:spPr>
           <a:xfrm>
             <a:off x="6446520" y="1737360"/>
-            <a:ext cx="5120640" cy="658368"/>
+            <a:ext cx="5120640" cy="292388"/>
           </a:xfrm>
           <a:prstGeom prst="rect">
             <a:avLst/>
@@ -13848,12 +17027,100 @@
           <a:p>
             <a:pPr algn="l"/>
             <a:r>
-              <a:rPr sz="1300" b="0" i="0">
-                <a:solidFill>
-                  <a:srgbClr val="1E293B"/>
-                </a:solidFill>
-              </a:rPr>
-              <a:t>🏥  Integracion directa API INVIMA (alertas automaticas)</a:t>
+              <a:rPr sz="1300" b="0" i="0" dirty="0">
+                <a:solidFill>
+                  <a:srgbClr val="1E293B"/>
+                </a:solidFill>
+              </a:rPr>
+              <a:t>🏥  </a:t>
+            </a:r>
+            <a:r>
+              <a:rPr sz="1300" b="0" i="0" dirty="0" err="1" smtClean="0">
+                <a:solidFill>
+                  <a:srgbClr val="1E293B"/>
+                </a:solidFill>
+              </a:rPr>
+              <a:t>Integraci</a:t>
+            </a:r>
+            <a:r>
+              <a:rPr lang="es-419" sz="1300" b="0" i="0" dirty="0" err="1" smtClean="0">
+                <a:solidFill>
+                  <a:srgbClr val="1E293B"/>
+                </a:solidFill>
+              </a:rPr>
+              <a:t>ó</a:t>
+            </a:r>
+            <a:r>
+              <a:rPr sz="1300" b="0" i="0" dirty="0" smtClean="0">
+                <a:solidFill>
+                  <a:srgbClr val="1E293B"/>
+                </a:solidFill>
+              </a:rPr>
+              <a:t>n </a:t>
+            </a:r>
+            <a:r>
+              <a:rPr sz="1300" b="0" i="0" dirty="0" err="1">
+                <a:solidFill>
+                  <a:srgbClr val="1E293B"/>
+                </a:solidFill>
+              </a:rPr>
+              <a:t>directa</a:t>
+            </a:r>
+            <a:r>
+              <a:rPr sz="1300" b="0" i="0" dirty="0">
+                <a:solidFill>
+                  <a:srgbClr val="1E293B"/>
+                </a:solidFill>
+              </a:rPr>
+              <a:t> API INVIMA (</a:t>
+            </a:r>
+            <a:r>
+              <a:rPr sz="1300" b="0" i="0" dirty="0" err="1">
+                <a:solidFill>
+                  <a:srgbClr val="1E293B"/>
+                </a:solidFill>
+              </a:rPr>
+              <a:t>alertas</a:t>
+            </a:r>
+            <a:r>
+              <a:rPr sz="1300" b="0" i="0" dirty="0">
+                <a:solidFill>
+                  <a:srgbClr val="1E293B"/>
+                </a:solidFill>
+              </a:rPr>
+              <a:t> </a:t>
+            </a:r>
+            <a:r>
+              <a:rPr sz="1300" b="0" i="0" dirty="0" err="1" smtClean="0">
+                <a:solidFill>
+                  <a:srgbClr val="1E293B"/>
+                </a:solidFill>
+              </a:rPr>
+              <a:t>autom</a:t>
+            </a:r>
+            <a:r>
+              <a:rPr lang="es-419" sz="1300" b="0" i="0" dirty="0" smtClean="0">
+                <a:solidFill>
+                  <a:srgbClr val="1E293B"/>
+                </a:solidFill>
+              </a:rPr>
+              <a:t>á</a:t>
+            </a:r>
+            <a:r>
+              <a:rPr sz="1300" b="0" i="0" dirty="0" err="1" smtClean="0">
+                <a:solidFill>
+                  <a:srgbClr val="1E293B"/>
+                </a:solidFill>
+              </a:rPr>
+              <a:t>ticas</a:t>
+            </a:r>
+            <a:r>
+              <a:rPr sz="1300" b="0" i="0" dirty="0">
+                <a:solidFill>
+                  <a:srgbClr val="1E293B"/>
+                </a:solidFill>
+              </a:rPr>
+              <a:t>)</a:t>
             </a:r>
           </a:p>
         </p:txBody>
@@ -13916,7 +17183,7 @@
           <a:p>
             <a:pPr algn="l"/>
             <a:r>
-              <a:rPr sz="1300" b="0" i="0">
+              <a:rPr sz="1300" b="0" i="0" dirty="0">
                 <a:solidFill>
                   <a:srgbClr val="1E293B"/>
                 </a:solidFill>
@@ -13935,7 +17202,7 @@
         <p:spPr>
           <a:xfrm>
             <a:off x="6446520" y="3931920"/>
-            <a:ext cx="5120640" cy="658368"/>
+            <a:ext cx="5120640" cy="292388"/>
           </a:xfrm>
           <a:prstGeom prst="rect">
             <a:avLst/>
@@ -13950,13 +17217,114 @@
           <a:p>
             <a:pPr algn="l"/>
             <a:r>
-              <a:rPr sz="1300" b="0" i="0">
-                <a:solidFill>
-                  <a:srgbClr val="1E293B"/>
-                </a:solidFill>
-              </a:rPr>
-              <a:t>📈  Re-entrenamiento mensual automatico con datos nuevos</a:t>
-            </a:r>
+              <a:rPr sz="1300" b="0" i="0" dirty="0">
+                <a:solidFill>
+                  <a:srgbClr val="1E293B"/>
+                </a:solidFill>
+              </a:rPr>
+              <a:t>📈  Re-</a:t>
+            </a:r>
+            <a:r>
+              <a:rPr sz="1300" b="0" i="0" dirty="0" err="1">
+                <a:solidFill>
+                  <a:srgbClr val="1E293B"/>
+                </a:solidFill>
+              </a:rPr>
+              <a:t>entrenamiento</a:t>
+            </a:r>
+            <a:r>
+              <a:rPr sz="1300" b="0" i="0" dirty="0">
+                <a:solidFill>
+                  <a:srgbClr val="1E293B"/>
+                </a:solidFill>
+              </a:rPr>
+              <a:t> </a:t>
+            </a:r>
+            <a:r>
+              <a:rPr sz="1300" b="0" i="0" dirty="0" err="1">
+                <a:solidFill>
+                  <a:srgbClr val="1E293B"/>
+                </a:solidFill>
+              </a:rPr>
+              <a:t>mensual</a:t>
+            </a:r>
+            <a:r>
+              <a:rPr sz="1300" b="0" i="0" dirty="0">
+                <a:solidFill>
+                  <a:srgbClr val="1E293B"/>
+                </a:solidFill>
+              </a:rPr>
+              <a:t> </a:t>
+            </a:r>
+            <a:r>
+              <a:rPr sz="1300" b="0" i="0" dirty="0" err="1" smtClean="0">
+                <a:solidFill>
+                  <a:srgbClr val="1E293B"/>
+                </a:solidFill>
+              </a:rPr>
+              <a:t>autom</a:t>
+            </a:r>
+            <a:r>
+              <a:rPr lang="es-419" sz="1300" b="0" i="0" dirty="0" smtClean="0">
+                <a:solidFill>
+                  <a:srgbClr val="1E293B"/>
+                </a:solidFill>
+              </a:rPr>
+              <a:t>á</a:t>
+            </a:r>
+            <a:r>
+              <a:rPr sz="1300" b="0" i="0" dirty="0" err="1" smtClean="0">
+                <a:solidFill>
+                  <a:srgbClr val="1E293B"/>
+                </a:solidFill>
+              </a:rPr>
+              <a:t>tico</a:t>
+            </a:r>
+            <a:r>
+              <a:rPr sz="1300" b="0" i="0" dirty="0" smtClean="0">
+                <a:solidFill>
+                  <a:srgbClr val="1E293B"/>
+                </a:solidFill>
+              </a:rPr>
+              <a:t> </a:t>
+            </a:r>
+            <a:r>
+              <a:rPr sz="1300" b="0" i="0" dirty="0">
+                <a:solidFill>
+                  <a:srgbClr val="1E293B"/>
+                </a:solidFill>
+              </a:rPr>
+              <a:t>con </a:t>
+            </a:r>
+            <a:r>
+              <a:rPr sz="1300" b="0" i="0" dirty="0" err="1">
+                <a:solidFill>
+                  <a:srgbClr val="1E293B"/>
+                </a:solidFill>
+              </a:rPr>
+              <a:t>datos</a:t>
+            </a:r>
+            <a:r>
+              <a:rPr sz="1300" b="0" i="0" dirty="0">
+                <a:solidFill>
+                  <a:srgbClr val="1E293B"/>
+                </a:solidFill>
+              </a:rPr>
+              <a:t> </a:t>
+            </a:r>
+            <a:r>
+              <a:rPr sz="1300" b="0" i="0" dirty="0" err="1">
+                <a:solidFill>
+                  <a:srgbClr val="1E293B"/>
+                </a:solidFill>
+              </a:rPr>
+              <a:t>nuevos</a:t>
+            </a:r>
+            <a:endParaRPr sz="1300" b="0" i="0" dirty="0">
+              <a:solidFill>
+                <a:srgbClr val="1E293B"/>
+              </a:solidFill>
+            </a:endParaRPr>
           </a:p>
         </p:txBody>
       </p:sp>
@@ -13969,7 +17337,7 @@
         <p:spPr>
           <a:xfrm>
             <a:off x="6446520" y="4663440"/>
-            <a:ext cx="5120640" cy="658368"/>
+            <a:ext cx="5120640" cy="292388"/>
           </a:xfrm>
           <a:prstGeom prst="rect">
             <a:avLst/>
@@ -13984,13 +17352,82 @@
           <a:p>
             <a:pPr algn="l"/>
             <a:r>
-              <a:rPr sz="1300" b="0" i="0">
-                <a:solidFill>
-                  <a:srgbClr val="1E293B"/>
-                </a:solidFill>
-              </a:rPr>
-              <a:t>🤝  Partnership con MinSalud para adopcion institucional</a:t>
-            </a:r>
+              <a:rPr lang="es-419" sz="1300" b="0" i="0" dirty="0" smtClean="0">
+                <a:solidFill>
+                  <a:srgbClr val="1E293B"/>
+                </a:solidFill>
+              </a:rPr>
+              <a:t>🙌</a:t>
+            </a:r>
+            <a:r>
+              <a:rPr sz="1300" b="0" i="0" dirty="0" smtClean="0">
+                <a:solidFill>
+                  <a:srgbClr val="1E293B"/>
+                </a:solidFill>
+              </a:rPr>
+              <a:t>  </a:t>
+            </a:r>
+            <a:r>
+              <a:rPr sz="1300" b="0" i="0" dirty="0">
+                <a:solidFill>
+                  <a:srgbClr val="1E293B"/>
+                </a:solidFill>
+              </a:rPr>
+              <a:t>Partnership con </a:t>
+            </a:r>
+            <a:r>
+              <a:rPr sz="1300" b="0" i="0" dirty="0" err="1">
+                <a:solidFill>
+                  <a:srgbClr val="1E293B"/>
+                </a:solidFill>
+              </a:rPr>
+              <a:t>MinSalud</a:t>
+            </a:r>
+            <a:r>
+              <a:rPr sz="1300" b="0" i="0" dirty="0">
+                <a:solidFill>
+                  <a:srgbClr val="1E293B"/>
+                </a:solidFill>
+              </a:rPr>
+              <a:t> para </a:t>
+            </a:r>
+            <a:r>
+              <a:rPr sz="1300" b="0" i="0" dirty="0" err="1" smtClean="0">
+                <a:solidFill>
+                  <a:srgbClr val="1E293B"/>
+                </a:solidFill>
+              </a:rPr>
+              <a:t>adopci</a:t>
+            </a:r>
+            <a:r>
+              <a:rPr lang="es-419" sz="1300" b="0" i="0" dirty="0" err="1" smtClean="0">
+                <a:solidFill>
+                  <a:srgbClr val="1E293B"/>
+                </a:solidFill>
+              </a:rPr>
+              <a:t>ó</a:t>
+            </a:r>
+            <a:r>
+              <a:rPr sz="1300" b="0" i="0" dirty="0" smtClean="0">
+                <a:solidFill>
+                  <a:srgbClr val="1E293B"/>
+                </a:solidFill>
+              </a:rPr>
+              <a:t>n </a:t>
+            </a:r>
+            <a:r>
+              <a:rPr sz="1300" b="0" i="0" dirty="0" err="1">
+                <a:solidFill>
+                  <a:srgbClr val="1E293B"/>
+                </a:solidFill>
+              </a:rPr>
+              <a:t>institucional</a:t>
+            </a:r>
+            <a:endParaRPr sz="1300" b="0" i="0" dirty="0">
+              <a:solidFill>
+                <a:srgbClr val="1E293B"/>
+              </a:solidFill>
+            </a:endParaRPr>
           </a:p>
         </p:txBody>
       </p:sp>
@@ -14034,6 +17471,7 @@
           <a:lstStyle/>
           <a:p>
             <a:pPr algn="ctr"/>
+            <a:endParaRPr/>
           </a:p>
         </p:txBody>
       </p:sp>
@@ -14061,1325 +17499,60 @@
           <a:p>
             <a:pPr algn="ctr"/>
             <a:r>
-              <a:rPr sz="1200" b="1" i="0">
+              <a:rPr sz="1200" b="1" i="0" dirty="0">
                 <a:solidFill>
                   <a:srgbClr val="FFFFFF"/>
                 </a:solidFill>
               </a:rPr>
-              <a:t>⭐  github.com/vamanrique/OpenFarma  ·  🌐  openfarma-production.up.railway.app  ·  📧  vamanrique@gmail.com</a:t>
-            </a:r>
-          </a:p>
-        </p:txBody>
-      </p:sp>
-    </p:spTree>
-  </p:cSld>
-  <p:clrMapOvr>
-    <a:masterClrMapping/>
-  </p:clrMapOvr>
-</p:sld>
-</file>
-
-<file path=ppt/slides/slide9.xml><?xml version="1.0" encoding="utf-8"?>
-<p:sld xmlns:a="http://schemas.openxmlformats.org/drawingml/2006/main" xmlns:p="http://schemas.openxmlformats.org/presentationml/2006/main" xmlns:r="http://schemas.openxmlformats.org/officeDocument/2006/relationships">
-  <p:cSld>
-    <p:bg>
-      <p:bgPr>
-        <a:solidFill>
-          <a:srgbClr val="FFFFFF"/>
-        </a:solidFill>
-        <a:effectLst/>
-      </p:bgPr>
-    </p:bg>
-    <p:spTree>
-      <p:nvGrpSpPr>
-        <p:cNvPr id="1" name=""/>
-        <p:cNvGrpSpPr/>
-        <p:nvPr/>
-      </p:nvGrpSpPr>
-      <p:grpSpPr/>
-      <p:sp>
-        <p:nvSpPr>
-          <p:cNvPr id="2" name="Rectangle 1"/>
-          <p:cNvSpPr/>
-          <p:nvPr/>
-        </p:nvSpPr>
-        <p:spPr>
-          <a:xfrm>
-            <a:off x="0" y="0"/>
-            <a:ext cx="12188952" cy="64008"/>
-          </a:xfrm>
-          <a:prstGeom prst="rect">
-            <a:avLst/>
-          </a:prstGeom>
-          <a:solidFill>
-            <a:srgbClr val="B45A00"/>
-          </a:solidFill>
-          <a:ln>
-            <a:noFill/>
-          </a:ln>
-        </p:spPr>
-        <p:style>
-          <a:lnRef idx="1">
-            <a:schemeClr val="accent1"/>
-          </a:lnRef>
-          <a:fillRef idx="3">
-            <a:schemeClr val="accent1"/>
-          </a:fillRef>
-          <a:effectRef idx="2">
-            <a:schemeClr val="accent1"/>
-          </a:effectRef>
-          <a:fontRef idx="minor">
-            <a:schemeClr val="lt1"/>
-          </a:fontRef>
-        </p:style>
-        <p:txBody>
-          <a:bodyPr rtlCol="0" anchor="ctr"/>
-          <a:lstStyle/>
-          <a:p>
-            <a:pPr algn="ctr"/>
-          </a:p>
-        </p:txBody>
-      </p:sp>
-      <p:sp>
-        <p:nvSpPr>
-          <p:cNvPr id="3" name="Rectangle 2"/>
-          <p:cNvSpPr/>
-          <p:nvPr/>
-        </p:nvSpPr>
-        <p:spPr>
-          <a:xfrm>
-            <a:off x="0" y="0"/>
-            <a:ext cx="12188952" cy="64008"/>
-          </a:xfrm>
-          <a:prstGeom prst="rect">
-            <a:avLst/>
-          </a:prstGeom>
-          <a:solidFill>
-            <a:srgbClr val="B45A00"/>
-          </a:solidFill>
-          <a:ln>
-            <a:noFill/>
-          </a:ln>
-        </p:spPr>
-        <p:style>
-          <a:lnRef idx="1">
-            <a:schemeClr val="accent1"/>
-          </a:lnRef>
-          <a:fillRef idx="3">
-            <a:schemeClr val="accent1"/>
-          </a:fillRef>
-          <a:effectRef idx="2">
-            <a:schemeClr val="accent1"/>
-          </a:effectRef>
-          <a:fontRef idx="minor">
-            <a:schemeClr val="lt1"/>
-          </a:fontRef>
-        </p:style>
-        <p:txBody>
-          <a:bodyPr rtlCol="0" anchor="ctr"/>
-          <a:lstStyle/>
-          <a:p>
-            <a:pPr algn="ctr"/>
-          </a:p>
-        </p:txBody>
-      </p:sp>
-      <p:sp>
-        <p:nvSpPr>
-          <p:cNvPr id="4" name="TextBox 3"/>
-          <p:cNvSpPr txBox="1"/>
-          <p:nvPr/>
-        </p:nvSpPr>
-        <p:spPr>
-          <a:xfrm>
-            <a:off x="502920" y="164592"/>
-            <a:ext cx="10789920" cy="777240"/>
-          </a:xfrm>
-          <a:prstGeom prst="rect">
-            <a:avLst/>
-          </a:prstGeom>
-          <a:noFill/>
-        </p:spPr>
-        <p:txBody>
-          <a:bodyPr wrap="square">
-            <a:spAutoFit/>
-          </a:bodyPr>
-          <a:lstStyle/>
-          <a:p>
-            <a:pPr algn="l"/>
-            <a:r>
-              <a:rPr sz="2700" b="1" i="0">
-                <a:solidFill>
-                  <a:srgbClr val="0D2B55"/>
-                </a:solidFill>
-              </a:rPr>
-              <a:t>El Equipo</a:t>
-            </a:r>
-          </a:p>
-        </p:txBody>
-      </p:sp>
-      <p:sp>
-        <p:nvSpPr>
-          <p:cNvPr id="5" name="Rectangle 4"/>
-          <p:cNvSpPr/>
-          <p:nvPr/>
-        </p:nvSpPr>
-        <p:spPr>
-          <a:xfrm>
-            <a:off x="502920" y="914400"/>
-            <a:ext cx="2560320" cy="50292"/>
-          </a:xfrm>
-          <a:prstGeom prst="rect">
-            <a:avLst/>
-          </a:prstGeom>
-          <a:solidFill>
-            <a:srgbClr val="B45A00"/>
-          </a:solidFill>
-          <a:ln>
-            <a:noFill/>
-          </a:ln>
-        </p:spPr>
-        <p:style>
-          <a:lnRef idx="1">
-            <a:schemeClr val="accent1"/>
-          </a:lnRef>
-          <a:fillRef idx="3">
-            <a:schemeClr val="accent1"/>
-          </a:fillRef>
-          <a:effectRef idx="2">
-            <a:schemeClr val="accent1"/>
-          </a:effectRef>
-          <a:fontRef idx="minor">
-            <a:schemeClr val="lt1"/>
-          </a:fontRef>
-        </p:style>
-        <p:txBody>
-          <a:bodyPr rtlCol="0" anchor="ctr"/>
-          <a:lstStyle/>
-          <a:p>
-            <a:pPr algn="ctr"/>
-          </a:p>
-        </p:txBody>
-      </p:sp>
-      <p:sp>
-        <p:nvSpPr>
-          <p:cNvPr id="6" name="TextBox 5"/>
-          <p:cNvSpPr txBox="1"/>
-          <p:nvPr/>
-        </p:nvSpPr>
-        <p:spPr>
-          <a:xfrm>
-            <a:off x="11247120" y="164592"/>
-            <a:ext cx="822960" cy="777240"/>
-          </a:xfrm>
-          <a:prstGeom prst="rect">
-            <a:avLst/>
-          </a:prstGeom>
-          <a:noFill/>
-        </p:spPr>
-        <p:txBody>
-          <a:bodyPr wrap="square">
-            <a:spAutoFit/>
-          </a:bodyPr>
-          <a:lstStyle/>
-          <a:p>
-            <a:pPr algn="r"/>
-            <a:r>
-              <a:rPr sz="2800" b="1" i="0">
-                <a:solidFill>
-                  <a:srgbClr val="B45A00"/>
-                </a:solidFill>
-              </a:rPr>
-              <a:t>09</a:t>
-            </a:r>
-          </a:p>
-        </p:txBody>
-      </p:sp>
-      <p:sp>
-        <p:nvSpPr>
-          <p:cNvPr id="7" name="Rectangle 6"/>
-          <p:cNvSpPr/>
-          <p:nvPr/>
-        </p:nvSpPr>
-        <p:spPr>
-          <a:xfrm>
-            <a:off x="502920" y="1024128"/>
-            <a:ext cx="11155680" cy="502920"/>
-          </a:xfrm>
-          <a:prstGeom prst="rect">
-            <a:avLst/>
-          </a:prstGeom>
-          <a:solidFill>
-            <a:srgbClr val="FFF7ED"/>
-          </a:solidFill>
-          <a:ln w="19050">
-            <a:solidFill>
-              <a:srgbClr val="F5A623"/>
-            </a:solidFill>
-          </a:ln>
-        </p:spPr>
-        <p:style>
-          <a:lnRef idx="1">
-            <a:schemeClr val="accent1"/>
-          </a:lnRef>
-          <a:fillRef idx="3">
-            <a:schemeClr val="accent1"/>
-          </a:fillRef>
-          <a:effectRef idx="2">
-            <a:schemeClr val="accent1"/>
-          </a:effectRef>
-          <a:fontRef idx="minor">
-            <a:schemeClr val="lt1"/>
-          </a:fontRef>
-        </p:style>
-        <p:txBody>
-          <a:bodyPr rtlCol="0" anchor="ctr"/>
-          <a:lstStyle/>
-          <a:p>
-            <a:pPr algn="ctr"/>
-          </a:p>
-        </p:txBody>
-      </p:sp>
-      <p:sp>
-        <p:nvSpPr>
-          <p:cNvPr id="8" name="TextBox 7"/>
-          <p:cNvSpPr txBox="1"/>
-          <p:nvPr/>
-        </p:nvSpPr>
-        <p:spPr>
-          <a:xfrm>
-            <a:off x="685800" y="1078992"/>
-            <a:ext cx="10789920" cy="393192"/>
-          </a:xfrm>
-          <a:prstGeom prst="rect">
-            <a:avLst/>
-          </a:prstGeom>
-          <a:noFill/>
-        </p:spPr>
-        <p:txBody>
-          <a:bodyPr wrap="square">
-            <a:spAutoFit/>
-          </a:bodyPr>
-          <a:lstStyle/>
-          <a:p>
-            <a:pPr algn="l"/>
-            <a:r>
-              <a:rPr sz="1200" b="1" i="0">
-                <a:solidFill>
-                  <a:srgbClr val="B45A00"/>
-                </a:solidFill>
-              </a:rPr>
-              <a:t>⚠  BORRADOR — Informacion de participantes pendiente de confirmacion</a:t>
-            </a:r>
-          </a:p>
-        </p:txBody>
-      </p:sp>
-      <p:sp>
-        <p:nvSpPr>
-          <p:cNvPr id="9" name="Rectangle 8"/>
-          <p:cNvSpPr/>
-          <p:nvPr/>
-        </p:nvSpPr>
-        <p:spPr>
-          <a:xfrm>
-            <a:off x="502920" y="1691640"/>
-            <a:ext cx="3657600" cy="4023360"/>
-          </a:xfrm>
-          <a:prstGeom prst="rect">
-            <a:avLst/>
-          </a:prstGeom>
-          <a:solidFill>
-            <a:srgbClr val="F7F9FC"/>
-          </a:solidFill>
-          <a:ln w="6350">
-            <a:solidFill>
-              <a:srgbClr val="CBD5E1"/>
-            </a:solidFill>
-          </a:ln>
-        </p:spPr>
-        <p:style>
-          <a:lnRef idx="1">
-            <a:schemeClr val="accent1"/>
-          </a:lnRef>
-          <a:fillRef idx="3">
-            <a:schemeClr val="accent1"/>
-          </a:fillRef>
-          <a:effectRef idx="2">
-            <a:schemeClr val="accent1"/>
-          </a:effectRef>
-          <a:fontRef idx="minor">
-            <a:schemeClr val="lt1"/>
-          </a:fontRef>
-        </p:style>
-        <p:txBody>
-          <a:bodyPr rtlCol="0" anchor="ctr"/>
-          <a:lstStyle/>
-          <a:p>
-            <a:pPr algn="ctr"/>
-          </a:p>
-        </p:txBody>
-      </p:sp>
-      <p:sp>
-        <p:nvSpPr>
-          <p:cNvPr id="10" name="Rectangle 9"/>
-          <p:cNvSpPr/>
-          <p:nvPr/>
-        </p:nvSpPr>
-        <p:spPr>
-          <a:xfrm>
-            <a:off x="502920" y="1691640"/>
-            <a:ext cx="3657600" cy="64008"/>
-          </a:xfrm>
-          <a:prstGeom prst="rect">
-            <a:avLst/>
-          </a:prstGeom>
-          <a:solidFill>
-            <a:srgbClr val="B45A00"/>
-          </a:solidFill>
-          <a:ln>
-            <a:noFill/>
-          </a:ln>
-        </p:spPr>
-        <p:style>
-          <a:lnRef idx="1">
-            <a:schemeClr val="accent1"/>
-          </a:lnRef>
-          <a:fillRef idx="3">
-            <a:schemeClr val="accent1"/>
-          </a:fillRef>
-          <a:effectRef idx="2">
-            <a:schemeClr val="accent1"/>
-          </a:effectRef>
-          <a:fontRef idx="minor">
-            <a:schemeClr val="lt1"/>
-          </a:fontRef>
-        </p:style>
-        <p:txBody>
-          <a:bodyPr rtlCol="0" anchor="ctr"/>
-          <a:lstStyle/>
-          <a:p>
-            <a:pPr algn="ctr"/>
-          </a:p>
-        </p:txBody>
-      </p:sp>
-      <p:sp>
-        <p:nvSpPr>
-          <p:cNvPr id="11" name="Rectangle 10"/>
-          <p:cNvSpPr/>
-          <p:nvPr/>
-        </p:nvSpPr>
-        <p:spPr>
-          <a:xfrm>
-            <a:off x="1645920" y="1874519"/>
-            <a:ext cx="1371600" cy="1371600"/>
-          </a:xfrm>
-          <a:prstGeom prst="rect">
-            <a:avLst/>
-          </a:prstGeom>
-          <a:solidFill>
-            <a:srgbClr val="EBF4FF"/>
-          </a:solidFill>
-          <a:ln w="6350">
-            <a:solidFill>
-              <a:srgbClr val="CBD5E1"/>
-            </a:solidFill>
-          </a:ln>
-        </p:spPr>
-        <p:style>
-          <a:lnRef idx="1">
-            <a:schemeClr val="accent1"/>
-          </a:lnRef>
-          <a:fillRef idx="3">
-            <a:schemeClr val="accent1"/>
-          </a:fillRef>
-          <a:effectRef idx="2">
-            <a:schemeClr val="accent1"/>
-          </a:effectRef>
-          <a:fontRef idx="minor">
-            <a:schemeClr val="lt1"/>
-          </a:fontRef>
-        </p:style>
-        <p:txBody>
-          <a:bodyPr rtlCol="0" anchor="ctr"/>
-          <a:lstStyle/>
-          <a:p>
-            <a:pPr algn="ctr"/>
-          </a:p>
-        </p:txBody>
-      </p:sp>
-      <p:sp>
-        <p:nvSpPr>
-          <p:cNvPr id="12" name="TextBox 11"/>
-          <p:cNvSpPr txBox="1"/>
-          <p:nvPr/>
-        </p:nvSpPr>
-        <p:spPr>
-          <a:xfrm>
-            <a:off x="1645920" y="1920240"/>
-            <a:ext cx="1371600" cy="1280160"/>
-          </a:xfrm>
-          <a:prstGeom prst="rect">
-            <a:avLst/>
-          </a:prstGeom>
-          <a:noFill/>
-        </p:spPr>
-        <p:txBody>
-          <a:bodyPr wrap="square">
-            <a:spAutoFit/>
-          </a:bodyPr>
-          <a:lstStyle/>
-          <a:p>
-            <a:pPr algn="ctr"/>
-            <a:r>
-              <a:rPr sz="3600" b="0" i="0">
-                <a:solidFill>
-                  <a:srgbClr val="1A568C"/>
-                </a:solidFill>
-              </a:rPr>
-              <a:t>👤</a:t>
-            </a:r>
-          </a:p>
-        </p:txBody>
-      </p:sp>
-      <p:sp>
-        <p:nvSpPr>
-          <p:cNvPr id="13" name="TextBox 12"/>
-          <p:cNvSpPr txBox="1"/>
-          <p:nvPr/>
-        </p:nvSpPr>
-        <p:spPr>
-          <a:xfrm>
-            <a:off x="502920" y="3337560"/>
-            <a:ext cx="3657600" cy="411480"/>
-          </a:xfrm>
-          <a:prstGeom prst="rect">
-            <a:avLst/>
-          </a:prstGeom>
-          <a:noFill/>
-        </p:spPr>
-        <p:txBody>
-          <a:bodyPr wrap="square">
-            <a:spAutoFit/>
-          </a:bodyPr>
-          <a:lstStyle/>
-          <a:p>
-            <a:pPr algn="ctr"/>
-            <a:r>
-              <a:rPr sz="1000" b="1" i="0">
-                <a:solidFill>
-                  <a:srgbClr val="B45A00"/>
-                </a:solidFill>
-              </a:rPr>
-              <a:t>Lider de Equipo</a:t>
-            </a:r>
-          </a:p>
-        </p:txBody>
-      </p:sp>
-      <p:sp>
-        <p:nvSpPr>
-          <p:cNvPr id="14" name="TextBox 13"/>
-          <p:cNvSpPr txBox="1"/>
-          <p:nvPr/>
-        </p:nvSpPr>
-        <p:spPr>
-          <a:xfrm>
-            <a:off x="502920" y="3730752"/>
-            <a:ext cx="3657600" cy="411480"/>
-          </a:xfrm>
-          <a:prstGeom prst="rect">
-            <a:avLst/>
-          </a:prstGeom>
-          <a:noFill/>
-        </p:spPr>
-        <p:txBody>
-          <a:bodyPr wrap="square">
-            <a:spAutoFit/>
-          </a:bodyPr>
-          <a:lstStyle/>
-          <a:p>
-            <a:pPr algn="ctr"/>
-            <a:r>
-              <a:rPr sz="1300" b="1" i="0">
-                <a:solidFill>
-                  <a:srgbClr val="0D2B55"/>
-                </a:solidFill>
-              </a:rPr>
-              <a:t>[NOMBRE COMPLETO]</a:t>
-            </a:r>
-          </a:p>
-        </p:txBody>
-      </p:sp>
-      <p:sp>
-        <p:nvSpPr>
-          <p:cNvPr id="15" name="TextBox 14"/>
-          <p:cNvSpPr txBox="1"/>
-          <p:nvPr/>
-        </p:nvSpPr>
-        <p:spPr>
-          <a:xfrm>
-            <a:off x="502920" y="4114800"/>
-            <a:ext cx="3657600" cy="365760"/>
-          </a:xfrm>
-          <a:prstGeom prst="rect">
-            <a:avLst/>
-          </a:prstGeom>
-          <a:noFill/>
-        </p:spPr>
-        <p:txBody>
-          <a:bodyPr wrap="square">
-            <a:spAutoFit/>
-          </a:bodyPr>
-          <a:lstStyle/>
-          <a:p>
-            <a:pPr algn="ctr"/>
-            <a:r>
-              <a:rPr sz="1000" b="0" i="0">
-                <a:solidFill>
-                  <a:srgbClr val="4A5B6E"/>
-                </a:solidFill>
-              </a:rPr>
-              <a:t>[Cargo / Institucion]</a:t>
-            </a:r>
-          </a:p>
-        </p:txBody>
-      </p:sp>
-      <p:sp>
-        <p:nvSpPr>
-          <p:cNvPr id="16" name="TextBox 15"/>
-          <p:cNvSpPr txBox="1"/>
-          <p:nvPr/>
-        </p:nvSpPr>
-        <p:spPr>
-          <a:xfrm>
-            <a:off x="502920" y="4462272"/>
-            <a:ext cx="3657600" cy="365760"/>
-          </a:xfrm>
-          <a:prstGeom prst="rect">
-            <a:avLst/>
-          </a:prstGeom>
-          <a:noFill/>
-        </p:spPr>
-        <p:txBody>
-          <a:bodyPr wrap="square">
-            <a:spAutoFit/>
-          </a:bodyPr>
-          <a:lstStyle/>
-          <a:p>
-            <a:pPr algn="ctr"/>
-            <a:r>
-              <a:rPr sz="1000" b="0" i="0">
-                <a:solidFill>
-                  <a:srgbClr val="94A3B8"/>
-                </a:solidFill>
-              </a:rPr>
-              <a:t>[Ciudad, Colombia]</a:t>
-            </a:r>
-          </a:p>
-        </p:txBody>
-      </p:sp>
-      <p:sp>
-        <p:nvSpPr>
-          <p:cNvPr id="17" name="Rectangle 16"/>
-          <p:cNvSpPr/>
-          <p:nvPr/>
-        </p:nvSpPr>
-        <p:spPr>
-          <a:xfrm>
-            <a:off x="4389120" y="1691640"/>
-            <a:ext cx="3657600" cy="4023360"/>
-          </a:xfrm>
-          <a:prstGeom prst="rect">
-            <a:avLst/>
-          </a:prstGeom>
-          <a:solidFill>
-            <a:srgbClr val="F7F9FC"/>
-          </a:solidFill>
-          <a:ln w="6350">
-            <a:solidFill>
-              <a:srgbClr val="CBD5E1"/>
-            </a:solidFill>
-          </a:ln>
-        </p:spPr>
-        <p:style>
-          <a:lnRef idx="1">
-            <a:schemeClr val="accent1"/>
-          </a:lnRef>
-          <a:fillRef idx="3">
-            <a:schemeClr val="accent1"/>
-          </a:fillRef>
-          <a:effectRef idx="2">
-            <a:schemeClr val="accent1"/>
-          </a:effectRef>
-          <a:fontRef idx="minor">
-            <a:schemeClr val="lt1"/>
-          </a:fontRef>
-        </p:style>
-        <p:txBody>
-          <a:bodyPr rtlCol="0" anchor="ctr"/>
-          <a:lstStyle/>
-          <a:p>
-            <a:pPr algn="ctr"/>
-          </a:p>
-        </p:txBody>
-      </p:sp>
-      <p:sp>
-        <p:nvSpPr>
-          <p:cNvPr id="18" name="Rectangle 17"/>
-          <p:cNvSpPr/>
-          <p:nvPr/>
-        </p:nvSpPr>
-        <p:spPr>
-          <a:xfrm>
-            <a:off x="4389120" y="1691640"/>
-            <a:ext cx="3657600" cy="64008"/>
-          </a:xfrm>
-          <a:prstGeom prst="rect">
-            <a:avLst/>
-          </a:prstGeom>
-          <a:solidFill>
-            <a:srgbClr val="B45A00"/>
-          </a:solidFill>
-          <a:ln>
-            <a:noFill/>
-          </a:ln>
-        </p:spPr>
-        <p:style>
-          <a:lnRef idx="1">
-            <a:schemeClr val="accent1"/>
-          </a:lnRef>
-          <a:fillRef idx="3">
-            <a:schemeClr val="accent1"/>
-          </a:fillRef>
-          <a:effectRef idx="2">
-            <a:schemeClr val="accent1"/>
-          </a:effectRef>
-          <a:fontRef idx="minor">
-            <a:schemeClr val="lt1"/>
-          </a:fontRef>
-        </p:style>
-        <p:txBody>
-          <a:bodyPr rtlCol="0" anchor="ctr"/>
-          <a:lstStyle/>
-          <a:p>
-            <a:pPr algn="ctr"/>
-          </a:p>
-        </p:txBody>
-      </p:sp>
-      <p:sp>
-        <p:nvSpPr>
-          <p:cNvPr id="19" name="Rectangle 18"/>
-          <p:cNvSpPr/>
-          <p:nvPr/>
-        </p:nvSpPr>
-        <p:spPr>
-          <a:xfrm>
-            <a:off x="5532120" y="1874519"/>
-            <a:ext cx="1371600" cy="1371600"/>
-          </a:xfrm>
-          <a:prstGeom prst="rect">
-            <a:avLst/>
-          </a:prstGeom>
-          <a:solidFill>
-            <a:srgbClr val="EBF4FF"/>
-          </a:solidFill>
-          <a:ln w="6350">
-            <a:solidFill>
-              <a:srgbClr val="CBD5E1"/>
-            </a:solidFill>
-          </a:ln>
-        </p:spPr>
-        <p:style>
-          <a:lnRef idx="1">
-            <a:schemeClr val="accent1"/>
-          </a:lnRef>
-          <a:fillRef idx="3">
-            <a:schemeClr val="accent1"/>
-          </a:fillRef>
-          <a:effectRef idx="2">
-            <a:schemeClr val="accent1"/>
-          </a:effectRef>
-          <a:fontRef idx="minor">
-            <a:schemeClr val="lt1"/>
-          </a:fontRef>
-        </p:style>
-        <p:txBody>
-          <a:bodyPr rtlCol="0" anchor="ctr"/>
-          <a:lstStyle/>
-          <a:p>
-            <a:pPr algn="ctr"/>
-          </a:p>
-        </p:txBody>
-      </p:sp>
-      <p:sp>
-        <p:nvSpPr>
-          <p:cNvPr id="20" name="TextBox 19"/>
-          <p:cNvSpPr txBox="1"/>
-          <p:nvPr/>
-        </p:nvSpPr>
-        <p:spPr>
-          <a:xfrm>
-            <a:off x="5532120" y="1920240"/>
-            <a:ext cx="1371600" cy="1280160"/>
-          </a:xfrm>
-          <a:prstGeom prst="rect">
-            <a:avLst/>
-          </a:prstGeom>
-          <a:noFill/>
-        </p:spPr>
-        <p:txBody>
-          <a:bodyPr wrap="square">
-            <a:spAutoFit/>
-          </a:bodyPr>
-          <a:lstStyle/>
-          <a:p>
-            <a:pPr algn="ctr"/>
-            <a:r>
-              <a:rPr sz="3600" b="0" i="0">
-                <a:solidFill>
-                  <a:srgbClr val="1A568C"/>
-                </a:solidFill>
-              </a:rPr>
-              <a:t>👤</a:t>
-            </a:r>
-          </a:p>
-        </p:txBody>
-      </p:sp>
-      <p:sp>
-        <p:nvSpPr>
-          <p:cNvPr id="21" name="TextBox 20"/>
-          <p:cNvSpPr txBox="1"/>
-          <p:nvPr/>
-        </p:nvSpPr>
-        <p:spPr>
-          <a:xfrm>
-            <a:off x="4389120" y="3337560"/>
-            <a:ext cx="3657600" cy="411480"/>
-          </a:xfrm>
-          <a:prstGeom prst="rect">
-            <a:avLst/>
-          </a:prstGeom>
-          <a:noFill/>
-        </p:spPr>
-        <p:txBody>
-          <a:bodyPr wrap="square">
-            <a:spAutoFit/>
-          </a:bodyPr>
-          <a:lstStyle/>
-          <a:p>
-            <a:pPr algn="ctr"/>
-            <a:r>
-              <a:rPr sz="1000" b="1" i="0">
-                <a:solidFill>
-                  <a:srgbClr val="B45A00"/>
-                </a:solidFill>
-              </a:rPr>
-              <a:t>Analista de Datos / ML</a:t>
-            </a:r>
-          </a:p>
-        </p:txBody>
-      </p:sp>
-      <p:sp>
-        <p:nvSpPr>
-          <p:cNvPr id="22" name="TextBox 21"/>
-          <p:cNvSpPr txBox="1"/>
-          <p:nvPr/>
-        </p:nvSpPr>
-        <p:spPr>
-          <a:xfrm>
-            <a:off x="4389120" y="3730752"/>
-            <a:ext cx="3657600" cy="411480"/>
-          </a:xfrm>
-          <a:prstGeom prst="rect">
-            <a:avLst/>
-          </a:prstGeom>
-          <a:noFill/>
-        </p:spPr>
-        <p:txBody>
-          <a:bodyPr wrap="square">
-            <a:spAutoFit/>
-          </a:bodyPr>
-          <a:lstStyle/>
-          <a:p>
-            <a:pPr algn="ctr"/>
-            <a:r>
-              <a:rPr sz="1300" b="1" i="0">
-                <a:solidFill>
-                  <a:srgbClr val="0D2B55"/>
-                </a:solidFill>
-              </a:rPr>
-              <a:t>[NOMBRE COMPLETO]</a:t>
-            </a:r>
-          </a:p>
-        </p:txBody>
-      </p:sp>
-      <p:sp>
-        <p:nvSpPr>
-          <p:cNvPr id="23" name="TextBox 22"/>
-          <p:cNvSpPr txBox="1"/>
-          <p:nvPr/>
-        </p:nvSpPr>
-        <p:spPr>
-          <a:xfrm>
-            <a:off x="4389120" y="4114800"/>
-            <a:ext cx="3657600" cy="365760"/>
-          </a:xfrm>
-          <a:prstGeom prst="rect">
-            <a:avLst/>
-          </a:prstGeom>
-          <a:noFill/>
-        </p:spPr>
-        <p:txBody>
-          <a:bodyPr wrap="square">
-            <a:spAutoFit/>
-          </a:bodyPr>
-          <a:lstStyle/>
-          <a:p>
-            <a:pPr algn="ctr"/>
-            <a:r>
-              <a:rPr sz="1000" b="0" i="0">
-                <a:solidFill>
-                  <a:srgbClr val="4A5B6E"/>
-                </a:solidFill>
-              </a:rPr>
-              <a:t>[Cargo / Institucion]</a:t>
-            </a:r>
-          </a:p>
-        </p:txBody>
-      </p:sp>
-      <p:sp>
-        <p:nvSpPr>
-          <p:cNvPr id="24" name="TextBox 23"/>
-          <p:cNvSpPr txBox="1"/>
-          <p:nvPr/>
-        </p:nvSpPr>
-        <p:spPr>
-          <a:xfrm>
-            <a:off x="4389120" y="4462272"/>
-            <a:ext cx="3657600" cy="365760"/>
-          </a:xfrm>
-          <a:prstGeom prst="rect">
-            <a:avLst/>
-          </a:prstGeom>
-          <a:noFill/>
-        </p:spPr>
-        <p:txBody>
-          <a:bodyPr wrap="square">
-            <a:spAutoFit/>
-          </a:bodyPr>
-          <a:lstStyle/>
-          <a:p>
-            <a:pPr algn="ctr"/>
-            <a:r>
-              <a:rPr sz="1000" b="0" i="0">
-                <a:solidFill>
-                  <a:srgbClr val="94A3B8"/>
-                </a:solidFill>
-              </a:rPr>
-              <a:t>[Ciudad, Colombia]</a:t>
-            </a:r>
-          </a:p>
-        </p:txBody>
-      </p:sp>
-      <p:sp>
-        <p:nvSpPr>
-          <p:cNvPr id="25" name="Rectangle 24"/>
-          <p:cNvSpPr/>
-          <p:nvPr/>
-        </p:nvSpPr>
-        <p:spPr>
-          <a:xfrm>
-            <a:off x="8275320" y="1691640"/>
-            <a:ext cx="3657600" cy="4023360"/>
-          </a:xfrm>
-          <a:prstGeom prst="rect">
-            <a:avLst/>
-          </a:prstGeom>
-          <a:solidFill>
-            <a:srgbClr val="F7F9FC"/>
-          </a:solidFill>
-          <a:ln w="6350">
-            <a:solidFill>
-              <a:srgbClr val="CBD5E1"/>
-            </a:solidFill>
-          </a:ln>
-        </p:spPr>
-        <p:style>
-          <a:lnRef idx="1">
-            <a:schemeClr val="accent1"/>
-          </a:lnRef>
-          <a:fillRef idx="3">
-            <a:schemeClr val="accent1"/>
-          </a:fillRef>
-          <a:effectRef idx="2">
-            <a:schemeClr val="accent1"/>
-          </a:effectRef>
-          <a:fontRef idx="minor">
-            <a:schemeClr val="lt1"/>
-          </a:fontRef>
-        </p:style>
-        <p:txBody>
-          <a:bodyPr rtlCol="0" anchor="ctr"/>
-          <a:lstStyle/>
-          <a:p>
-            <a:pPr algn="ctr"/>
-          </a:p>
-        </p:txBody>
-      </p:sp>
-      <p:sp>
-        <p:nvSpPr>
-          <p:cNvPr id="26" name="Rectangle 25"/>
-          <p:cNvSpPr/>
-          <p:nvPr/>
-        </p:nvSpPr>
-        <p:spPr>
-          <a:xfrm>
-            <a:off x="8275320" y="1691640"/>
-            <a:ext cx="3657600" cy="64008"/>
-          </a:xfrm>
-          <a:prstGeom prst="rect">
-            <a:avLst/>
-          </a:prstGeom>
-          <a:solidFill>
-            <a:srgbClr val="B45A00"/>
-          </a:solidFill>
-          <a:ln>
-            <a:noFill/>
-          </a:ln>
-        </p:spPr>
-        <p:style>
-          <a:lnRef idx="1">
-            <a:schemeClr val="accent1"/>
-          </a:lnRef>
-          <a:fillRef idx="3">
-            <a:schemeClr val="accent1"/>
-          </a:fillRef>
-          <a:effectRef idx="2">
-            <a:schemeClr val="accent1"/>
-          </a:effectRef>
-          <a:fontRef idx="minor">
-            <a:schemeClr val="lt1"/>
-          </a:fontRef>
-        </p:style>
-        <p:txBody>
-          <a:bodyPr rtlCol="0" anchor="ctr"/>
-          <a:lstStyle/>
-          <a:p>
-            <a:pPr algn="ctr"/>
-          </a:p>
-        </p:txBody>
-      </p:sp>
-      <p:sp>
-        <p:nvSpPr>
-          <p:cNvPr id="27" name="Rectangle 26"/>
-          <p:cNvSpPr/>
-          <p:nvPr/>
-        </p:nvSpPr>
-        <p:spPr>
-          <a:xfrm>
-            <a:off x="9418320" y="1874519"/>
-            <a:ext cx="1371600" cy="1371600"/>
-          </a:xfrm>
-          <a:prstGeom prst="rect">
-            <a:avLst/>
-          </a:prstGeom>
-          <a:solidFill>
-            <a:srgbClr val="EBF4FF"/>
-          </a:solidFill>
-          <a:ln w="6350">
-            <a:solidFill>
-              <a:srgbClr val="CBD5E1"/>
-            </a:solidFill>
-          </a:ln>
-        </p:spPr>
-        <p:style>
-          <a:lnRef idx="1">
-            <a:schemeClr val="accent1"/>
-          </a:lnRef>
-          <a:fillRef idx="3">
-            <a:schemeClr val="accent1"/>
-          </a:fillRef>
-          <a:effectRef idx="2">
-            <a:schemeClr val="accent1"/>
-          </a:effectRef>
-          <a:fontRef idx="minor">
-            <a:schemeClr val="lt1"/>
-          </a:fontRef>
-        </p:style>
-        <p:txBody>
-          <a:bodyPr rtlCol="0" anchor="ctr"/>
-          <a:lstStyle/>
-          <a:p>
-            <a:pPr algn="ctr"/>
-          </a:p>
-        </p:txBody>
-      </p:sp>
-      <p:sp>
-        <p:nvSpPr>
-          <p:cNvPr id="28" name="TextBox 27"/>
-          <p:cNvSpPr txBox="1"/>
-          <p:nvPr/>
-        </p:nvSpPr>
-        <p:spPr>
-          <a:xfrm>
-            <a:off x="9418320" y="1920240"/>
-            <a:ext cx="1371600" cy="1280160"/>
-          </a:xfrm>
-          <a:prstGeom prst="rect">
-            <a:avLst/>
-          </a:prstGeom>
-          <a:noFill/>
-        </p:spPr>
-        <p:txBody>
-          <a:bodyPr wrap="square">
-            <a:spAutoFit/>
-          </a:bodyPr>
-          <a:lstStyle/>
-          <a:p>
-            <a:pPr algn="ctr"/>
-            <a:r>
-              <a:rPr sz="3600" b="0" i="0">
-                <a:solidFill>
-                  <a:srgbClr val="1A568C"/>
-                </a:solidFill>
-              </a:rPr>
-              <a:t>👤</a:t>
-            </a:r>
-          </a:p>
-        </p:txBody>
-      </p:sp>
-      <p:sp>
-        <p:nvSpPr>
-          <p:cNvPr id="29" name="TextBox 28"/>
-          <p:cNvSpPr txBox="1"/>
-          <p:nvPr/>
-        </p:nvSpPr>
-        <p:spPr>
-          <a:xfrm>
-            <a:off x="8275320" y="3337560"/>
-            <a:ext cx="3657600" cy="411480"/>
-          </a:xfrm>
-          <a:prstGeom prst="rect">
-            <a:avLst/>
-          </a:prstGeom>
-          <a:noFill/>
-        </p:spPr>
-        <p:txBody>
-          <a:bodyPr wrap="square">
-            <a:spAutoFit/>
-          </a:bodyPr>
-          <a:lstStyle/>
-          <a:p>
-            <a:pPr algn="ctr"/>
-            <a:r>
-              <a:rPr sz="1000" b="1" i="0">
-                <a:solidFill>
-                  <a:srgbClr val="B45A00"/>
-                </a:solidFill>
-              </a:rPr>
-              <a:t>Desarrollador Full-Stack</a:t>
-            </a:r>
-          </a:p>
-        </p:txBody>
-      </p:sp>
-      <p:sp>
-        <p:nvSpPr>
-          <p:cNvPr id="30" name="TextBox 29"/>
-          <p:cNvSpPr txBox="1"/>
-          <p:nvPr/>
-        </p:nvSpPr>
-        <p:spPr>
-          <a:xfrm>
-            <a:off x="8275320" y="3730752"/>
-            <a:ext cx="3657600" cy="411480"/>
-          </a:xfrm>
-          <a:prstGeom prst="rect">
-            <a:avLst/>
-          </a:prstGeom>
-          <a:noFill/>
-        </p:spPr>
-        <p:txBody>
-          <a:bodyPr wrap="square">
-            <a:spAutoFit/>
-          </a:bodyPr>
-          <a:lstStyle/>
-          <a:p>
-            <a:pPr algn="ctr"/>
-            <a:r>
-              <a:rPr sz="1300" b="1" i="0">
-                <a:solidFill>
-                  <a:srgbClr val="0D2B55"/>
-                </a:solidFill>
-              </a:rPr>
-              <a:t>[NOMBRE COMPLETO]</a:t>
-            </a:r>
-          </a:p>
-        </p:txBody>
-      </p:sp>
-      <p:sp>
-        <p:nvSpPr>
-          <p:cNvPr id="31" name="TextBox 30"/>
-          <p:cNvSpPr txBox="1"/>
-          <p:nvPr/>
-        </p:nvSpPr>
-        <p:spPr>
-          <a:xfrm>
-            <a:off x="8275320" y="4114800"/>
-            <a:ext cx="3657600" cy="365760"/>
-          </a:xfrm>
-          <a:prstGeom prst="rect">
-            <a:avLst/>
-          </a:prstGeom>
-          <a:noFill/>
-        </p:spPr>
-        <p:txBody>
-          <a:bodyPr wrap="square">
-            <a:spAutoFit/>
-          </a:bodyPr>
-          <a:lstStyle/>
-          <a:p>
-            <a:pPr algn="ctr"/>
-            <a:r>
-              <a:rPr sz="1000" b="0" i="0">
-                <a:solidFill>
-                  <a:srgbClr val="4A5B6E"/>
-                </a:solidFill>
-              </a:rPr>
-              <a:t>[Cargo / Institucion]</a:t>
-            </a:r>
-          </a:p>
-        </p:txBody>
-      </p:sp>
-      <p:sp>
-        <p:nvSpPr>
-          <p:cNvPr id="32" name="TextBox 31"/>
-          <p:cNvSpPr txBox="1"/>
-          <p:nvPr/>
-        </p:nvSpPr>
-        <p:spPr>
-          <a:xfrm>
-            <a:off x="8275320" y="4462272"/>
-            <a:ext cx="3657600" cy="365760"/>
-          </a:xfrm>
-          <a:prstGeom prst="rect">
-            <a:avLst/>
-          </a:prstGeom>
-          <a:noFill/>
-        </p:spPr>
-        <p:txBody>
-          <a:bodyPr wrap="square">
-            <a:spAutoFit/>
-          </a:bodyPr>
-          <a:lstStyle/>
-          <a:p>
-            <a:pPr algn="ctr"/>
-            <a:r>
-              <a:rPr sz="1000" b="0" i="0">
-                <a:solidFill>
-                  <a:srgbClr val="94A3B8"/>
-                </a:solidFill>
-              </a:rPr>
-              <a:t>[Ciudad, Colombia]</a:t>
-            </a:r>
-          </a:p>
-        </p:txBody>
-      </p:sp>
-      <p:sp>
-        <p:nvSpPr>
-          <p:cNvPr id="33" name="TextBox 32"/>
-          <p:cNvSpPr txBox="1"/>
-          <p:nvPr/>
-        </p:nvSpPr>
-        <p:spPr>
-          <a:xfrm>
-            <a:off x="502920" y="5897880"/>
-            <a:ext cx="10972800" cy="365760"/>
-          </a:xfrm>
-          <a:prstGeom prst="rect">
-            <a:avLst/>
-          </a:prstGeom>
-          <a:noFill/>
-        </p:spPr>
-        <p:txBody>
-          <a:bodyPr wrap="square">
-            <a:spAutoFit/>
-          </a:bodyPr>
-          <a:lstStyle/>
-          <a:p>
-            <a:pPr algn="l"/>
-            <a:r>
-              <a:rPr sz="1000" b="0" i="1">
-                <a:solidFill>
-                  <a:srgbClr val="94A3B8"/>
-                </a:solidFill>
-              </a:rPr>
-              <a:t>Requisito concurso: equipos 2-4 personas · minimo una mujer · al menos un perfil tecnico</a:t>
-            </a:r>
-          </a:p>
-        </p:txBody>
-      </p:sp>
-      <p:sp>
-        <p:nvSpPr>
-          <p:cNvPr id="34" name="TextBox 33"/>
-          <p:cNvSpPr txBox="1"/>
-          <p:nvPr/>
-        </p:nvSpPr>
-        <p:spPr>
-          <a:xfrm>
-            <a:off x="502920" y="6400800"/>
-            <a:ext cx="4572000" cy="365760"/>
-          </a:xfrm>
-          <a:prstGeom prst="rect">
-            <a:avLst/>
-          </a:prstGeom>
-          <a:noFill/>
-        </p:spPr>
-        <p:txBody>
-          <a:bodyPr wrap="square">
-            <a:spAutoFit/>
-          </a:bodyPr>
-          <a:lstStyle/>
-          <a:p>
-            <a:pPr algn="l"/>
-            <a:r>
-              <a:rPr sz="1100" b="0" i="0">
-                <a:solidFill>
-                  <a:srgbClr val="1A568C"/>
-                </a:solidFill>
-              </a:rPr>
-              <a:t>vamanrique@gmail.com</a:t>
-            </a:r>
-          </a:p>
-        </p:txBody>
-      </p:sp>
-      <p:sp>
-        <p:nvSpPr>
-          <p:cNvPr id="35" name="TextBox 34"/>
-          <p:cNvSpPr txBox="1"/>
-          <p:nvPr/>
-        </p:nvSpPr>
-        <p:spPr>
-          <a:xfrm>
-            <a:off x="7315200" y="6492240"/>
-            <a:ext cx="4572000" cy="320040"/>
-          </a:xfrm>
-          <a:prstGeom prst="rect">
-            <a:avLst/>
-          </a:prstGeom>
-          <a:noFill/>
-        </p:spPr>
-        <p:txBody>
-          <a:bodyPr wrap="square">
-            <a:spAutoFit/>
-          </a:bodyPr>
-          <a:lstStyle/>
-          <a:p>
-            <a:pPr algn="r"/>
-            <a:r>
-              <a:rPr sz="900" b="0" i="0">
-                <a:solidFill>
-                  <a:srgbClr val="94A3B8"/>
-                </a:solidFill>
-              </a:rPr>
-              <a:t>OpenFarma  |  Datos al Ecosistema 2026</a:t>
+              <a:t>⭐  github.com/</a:t>
+            </a:r>
+            <a:r>
+              <a:rPr sz="1200" b="1" i="0" dirty="0" err="1">
+                <a:solidFill>
+                  <a:srgbClr val="FFFFFF"/>
+                </a:solidFill>
+              </a:rPr>
+              <a:t>vamanrique</a:t>
+            </a:r>
+            <a:r>
+              <a:rPr sz="1200" b="1" i="0" dirty="0">
+                <a:solidFill>
+                  <a:srgbClr val="FFFFFF"/>
+                </a:solidFill>
+              </a:rPr>
+              <a:t>/</a:t>
+            </a:r>
+            <a:r>
+              <a:rPr sz="1200" b="1" i="0" dirty="0" err="1">
+                <a:solidFill>
+                  <a:srgbClr val="FFFFFF"/>
+                </a:solidFill>
+              </a:rPr>
+              <a:t>OpenFarma</a:t>
+            </a:r>
+            <a:r>
+              <a:rPr sz="1200" b="1" i="0" dirty="0">
+                <a:solidFill>
+                  <a:srgbClr val="FFFFFF"/>
+                </a:solidFill>
+              </a:rPr>
+              <a:t>  ·  🌐  </a:t>
+            </a:r>
+            <a:r>
+              <a:rPr sz="1200" b="1" i="0" dirty="0" err="1">
+                <a:solidFill>
+                  <a:srgbClr val="FFFFFF"/>
+                </a:solidFill>
+              </a:rPr>
+              <a:t>openfarma-production.up.railway.app</a:t>
+            </a:r>
+            <a:r>
+              <a:rPr sz="1200" b="1" i="0" dirty="0">
+                <a:solidFill>
+                  <a:srgbClr val="FFFFFF"/>
+                </a:solidFill>
+              </a:rPr>
+              <a:t>  ·  📧  vamanrique@gmail.com</a:t>
             </a:r>
           </a:p>
         </p:txBody>
